--- a/Project/images.pptx
+++ b/Project/images.pptx
@@ -5,7 +5,7 @@
     <p:sldMasterId id="2147483648" r:id="rId1"/>
   </p:sldMasterIdLst>
   <p:notesMasterIdLst>
-    <p:notesMasterId r:id="rId8"/>
+    <p:notesMasterId r:id="rId10"/>
   </p:notesMasterIdLst>
   <p:sldIdLst>
     <p:sldId id="257" r:id="rId2"/>
@@ -14,6 +14,8 @@
     <p:sldId id="261" r:id="rId5"/>
     <p:sldId id="259" r:id="rId6"/>
     <p:sldId id="260" r:id="rId7"/>
+    <p:sldId id="262" r:id="rId8"/>
+    <p:sldId id="263" r:id="rId9"/>
   </p:sldIdLst>
   <p:sldSz cx="12192000" cy="6858000"/>
   <p:notesSz cx="6858000" cy="9144000"/>
@@ -157,36 +159,12 @@
             </c:strRef>
           </c:tx>
           <c:spPr>
-            <a:gradFill flip="none" rotWithShape="1">
-              <a:gsLst>
-                <a:gs pos="0">
-                  <a:schemeClr val="accent5">
-                    <a:lumMod val="60000"/>
-                    <a:lumOff val="40000"/>
-                    <a:shade val="30000"/>
-                    <a:satMod val="115000"/>
-                  </a:schemeClr>
-                </a:gs>
-                <a:gs pos="50000">
-                  <a:schemeClr val="accent5">
-                    <a:lumMod val="60000"/>
-                    <a:lumOff val="40000"/>
-                    <a:shade val="67500"/>
-                    <a:satMod val="115000"/>
-                  </a:schemeClr>
-                </a:gs>
-                <a:gs pos="100000">
-                  <a:schemeClr val="accent5">
-                    <a:lumMod val="60000"/>
-                    <a:lumOff val="40000"/>
-                    <a:shade val="100000"/>
-                    <a:satMod val="115000"/>
-                  </a:schemeClr>
-                </a:gs>
-              </a:gsLst>
-              <a:lin ang="5400000" scaled="1"/>
-              <a:tileRect/>
-            </a:gradFill>
+            <a:solidFill>
+              <a:srgbClr val="4472C4">
+                <a:lumMod val="60000"/>
+                <a:lumOff val="40000"/>
+              </a:srgbClr>
+            </a:solidFill>
             <a:ln>
               <a:noFill/>
             </a:ln>
@@ -301,12 +279,9 @@
             </c:strRef>
           </c:tx>
           <c:spPr>
-            <a:ln w="28575" cap="rnd">
+            <a:ln w="38100" cap="rnd">
               <a:solidFill>
-                <a:schemeClr val="accent5">
-                  <a:lumMod val="60000"/>
-                  <a:lumOff val="40000"/>
-                </a:schemeClr>
+                <a:srgbClr val="4472C4"/>
               </a:solidFill>
               <a:round/>
             </a:ln>
@@ -322,12 +297,9 @@
             </c:marker>
             <c:bubble3D val="0"/>
             <c:spPr>
-              <a:ln w="28575" cap="rnd">
+              <a:ln w="38100" cap="rnd">
                 <a:solidFill>
-                  <a:schemeClr val="accent5">
-                    <a:lumMod val="60000"/>
-                    <a:lumOff val="40000"/>
-                  </a:schemeClr>
+                  <a:srgbClr val="4472C4"/>
                 </a:solidFill>
                 <a:round/>
                 <a:headEnd type="oval" w="med" len="med"/>
@@ -348,12 +320,9 @@
             </c:marker>
             <c:bubble3D val="0"/>
             <c:spPr>
-              <a:ln w="28575" cap="rnd">
+              <a:ln w="38100" cap="rnd">
                 <a:solidFill>
-                  <a:schemeClr val="accent5">
-                    <a:lumMod val="60000"/>
-                    <a:lumOff val="40000"/>
-                  </a:schemeClr>
+                  <a:srgbClr val="4472C4"/>
                 </a:solidFill>
                 <a:round/>
                 <a:headEnd type="oval" w="med" len="med"/>
@@ -374,12 +343,9 @@
             </c:marker>
             <c:bubble3D val="0"/>
             <c:spPr>
-              <a:ln w="28575" cap="rnd">
+              <a:ln w="38100" cap="rnd">
                 <a:solidFill>
-                  <a:schemeClr val="accent5">
-                    <a:lumMod val="60000"/>
-                    <a:lumOff val="40000"/>
-                  </a:schemeClr>
+                  <a:srgbClr val="4472C4"/>
                 </a:solidFill>
                 <a:round/>
                 <a:headEnd type="oval" w="med" len="med"/>
@@ -400,12 +366,9 @@
             </c:marker>
             <c:bubble3D val="0"/>
             <c:spPr>
-              <a:ln w="28575" cap="rnd">
+              <a:ln w="38100" cap="rnd">
                 <a:solidFill>
-                  <a:schemeClr val="accent5">
-                    <a:lumMod val="60000"/>
-                    <a:lumOff val="40000"/>
-                  </a:schemeClr>
+                  <a:srgbClr val="4472C4"/>
                 </a:solidFill>
                 <a:round/>
                 <a:headEnd type="oval" w="med" len="med"/>
@@ -426,12 +389,9 @@
             </c:marker>
             <c:bubble3D val="0"/>
             <c:spPr>
-              <a:ln w="28575" cap="rnd">
+              <a:ln w="38100" cap="rnd">
                 <a:solidFill>
-                  <a:schemeClr val="accent5">
-                    <a:lumMod val="60000"/>
-                    <a:lumOff val="40000"/>
-                  </a:schemeClr>
+                  <a:srgbClr val="4472C4"/>
                 </a:solidFill>
                 <a:round/>
                 <a:headEnd type="oval" w="med" len="med"/>
@@ -452,12 +412,9 @@
             </c:marker>
             <c:bubble3D val="0"/>
             <c:spPr>
-              <a:ln w="28575" cap="rnd">
+              <a:ln w="38100" cap="rnd">
                 <a:solidFill>
-                  <a:schemeClr val="accent5">
-                    <a:lumMod val="60000"/>
-                    <a:lumOff val="40000"/>
-                  </a:schemeClr>
+                  <a:srgbClr val="4472C4"/>
                 </a:solidFill>
                 <a:round/>
                 <a:headEnd type="oval" w="med" len="med"/>
@@ -478,12 +435,9 @@
             </c:marker>
             <c:bubble3D val="0"/>
             <c:spPr>
-              <a:ln w="28575" cap="rnd">
+              <a:ln w="38100" cap="rnd">
                 <a:solidFill>
-                  <a:schemeClr val="accent5">
-                    <a:lumMod val="60000"/>
-                    <a:lumOff val="40000"/>
-                  </a:schemeClr>
+                  <a:srgbClr val="4472C4"/>
                 </a:solidFill>
                 <a:round/>
                 <a:headEnd type="oval" w="med" len="med"/>
@@ -826,7 +780,7 @@
             </c:strRef>
           </c:tx>
           <c:spPr>
-            <a:ln w="28575" cap="rnd">
+            <a:ln w="38100" cap="rnd">
               <a:solidFill>
                 <a:schemeClr val="accent1"/>
               </a:solidFill>
@@ -2652,7 +2606,7 @@
           <c:smooth val="0"/>
           <c:extLst>
             <c:ext xmlns:c16="http://schemas.microsoft.com/office/drawing/2014/chart" uri="{C3380CC4-5D6E-409C-BE32-E72D297353CC}">
-              <c16:uniqueId val="{00000000-633F-6C44-B1C1-0BFFFA7C2A95}"/>
+              <c16:uniqueId val="{00000000-340F-7B4D-8640-5B7A25F062D5}"/>
             </c:ext>
           </c:extLst>
         </c:ser>
@@ -2856,7 +2810,7 @@
           <c:spPr>
             <a:ln w="38100" cap="rnd">
               <a:solidFill>
-                <a:schemeClr val="accent6"/>
+                <a:srgbClr val="E68109"/>
               </a:solidFill>
               <a:round/>
             </a:ln>
@@ -8723,7 +8677,7 @@
           <c:smooth val="0"/>
           <c:extLst>
             <c:ext xmlns:c16="http://schemas.microsoft.com/office/drawing/2014/chart" uri="{C3380CC4-5D6E-409C-BE32-E72D297353CC}">
-              <c16:uniqueId val="{00000000-A628-E248-A67F-973BF4F5F251}"/>
+              <c16:uniqueId val="{00000000-A8AA-FB41-B94C-06A0C0E76E9C}"/>
             </c:ext>
           </c:extLst>
         </c:ser>
@@ -8744,7 +8698,9 @@
           <c:spPr>
             <a:ln w="38100" cap="rnd">
               <a:solidFill>
-                <a:srgbClr val="C00000"/>
+                <a:schemeClr val="bg1">
+                  <a:lumMod val="65000"/>
+                </a:schemeClr>
               </a:solidFill>
               <a:round/>
             </a:ln>
@@ -14611,7 +14567,7 @@
           <c:smooth val="0"/>
           <c:extLst>
             <c:ext xmlns:c16="http://schemas.microsoft.com/office/drawing/2014/chart" uri="{C3380CC4-5D6E-409C-BE32-E72D297353CC}">
-              <c16:uniqueId val="{00000001-A628-E248-A67F-973BF4F5F251}"/>
+              <c16:uniqueId val="{00000001-A8AA-FB41-B94C-06A0C0E76E9C}"/>
             </c:ext>
           </c:extLst>
         </c:ser>
@@ -14648,9 +14604,7 @@
           <c:spPr>
             <a:ln w="38100" cap="rnd">
               <a:solidFill>
-                <a:schemeClr val="accent5">
-                  <a:lumMod val="50000"/>
-                </a:schemeClr>
+                <a:schemeClr val="accent1"/>
               </a:solidFill>
               <a:round/>
             </a:ln>
@@ -20517,7 +20471,7 @@
           <c:smooth val="0"/>
           <c:extLst>
             <c:ext xmlns:c16="http://schemas.microsoft.com/office/drawing/2014/chart" uri="{C3380CC4-5D6E-409C-BE32-E72D297353CC}">
-              <c16:uniqueId val="{00000002-A628-E248-A67F-973BF4F5F251}"/>
+              <c16:uniqueId val="{00000002-A8AA-FB41-B94C-06A0C0E76E9C}"/>
             </c:ext>
           </c:extLst>
         </c:ser>
@@ -20811,7 +20765,9 @@
           </c:tx>
           <c:spPr>
             <a:solidFill>
-              <a:schemeClr val="accent1"/>
+              <a:schemeClr val="bg1">
+                <a:lumMod val="65000"/>
+              </a:schemeClr>
             </a:solidFill>
             <a:ln>
               <a:noFill/>
@@ -20825,7 +20781,10 @@
             <c:bubble3D val="0"/>
             <c:spPr>
               <a:solidFill>
-                <a:schemeClr val="accent2"/>
+                <a:schemeClr val="tx1">
+                  <a:lumMod val="65000"/>
+                  <a:lumOff val="35000"/>
+                </a:schemeClr>
               </a:solidFill>
               <a:ln>
                 <a:noFill/>
@@ -20844,7 +20803,10 @@
             <c:bubble3D val="0"/>
             <c:spPr>
               <a:solidFill>
-                <a:schemeClr val="accent4"/>
+                <a:schemeClr val="tx1">
+                  <a:lumMod val="65000"/>
+                  <a:lumOff val="35000"/>
+                </a:schemeClr>
               </a:solidFill>
               <a:ln>
                 <a:noFill/>
@@ -20863,7 +20825,7 @@
             <c:bubble3D val="0"/>
             <c:spPr>
               <a:solidFill>
-                <a:schemeClr val="accent6"/>
+                <a:srgbClr val="E68109"/>
               </a:solidFill>
               <a:ln>
                 <a:noFill/>
@@ -20882,7 +20844,7 @@
             <c:bubble3D val="0"/>
             <c:spPr>
               <a:solidFill>
-                <a:srgbClr val="002060"/>
+                <a:schemeClr val="accent1"/>
               </a:solidFill>
               <a:ln>
                 <a:noFill/>
@@ -20895,6 +20857,88 @@
               </c:ext>
             </c:extLst>
           </c:dPt>
+          <c:dLbls>
+            <c:dLbl>
+              <c:idx val="23"/>
+              <c:tx>
+                <c:rich>
+                  <a:bodyPr/>
+                  <a:lstStyle/>
+                  <a:p>
+                    <a:r>
+                      <a:rPr lang="en-US" dirty="0"/>
+                      <a:t>19.5%</a:t>
+                    </a:r>
+                  </a:p>
+                </c:rich>
+              </c:tx>
+              <c:showLegendKey val="0"/>
+              <c:showVal val="1"/>
+              <c:showCatName val="0"/>
+              <c:showSerName val="0"/>
+              <c:showPercent val="0"/>
+              <c:showBubbleSize val="0"/>
+              <c:extLst>
+                <c:ext xmlns:c15="http://schemas.microsoft.com/office/drawing/2012/chart" uri="{CE6537A1-D6FC-4f65-9D91-7224C49458BB}">
+                  <c15:showDataLabelsRange val="0"/>
+                </c:ext>
+                <c:ext xmlns:c16="http://schemas.microsoft.com/office/drawing/2014/chart" uri="{C3380CC4-5D6E-409C-BE32-E72D297353CC}">
+                  <c16:uniqueId val="{00000005-5710-6F4F-8FF1-4D7880F4CDAB}"/>
+                </c:ext>
+              </c:extLst>
+            </c:dLbl>
+            <c:spPr>
+              <a:noFill/>
+              <a:ln>
+                <a:noFill/>
+              </a:ln>
+              <a:effectLst/>
+            </c:spPr>
+            <c:txPr>
+              <a:bodyPr rot="0" spcFirstLastPara="1" vertOverflow="ellipsis" vert="horz" wrap="square" lIns="38100" tIns="19050" rIns="38100" bIns="19050" anchor="ctr" anchorCtr="1">
+                <a:spAutoFit/>
+              </a:bodyPr>
+              <a:lstStyle/>
+              <a:p>
+                <a:pPr>
+                  <a:defRPr sz="900" b="1" i="0" u="none" strike="noStrike" kern="1200" baseline="0">
+                    <a:solidFill>
+                      <a:schemeClr val="tx1"/>
+                    </a:solidFill>
+                    <a:latin typeface="Times New Roman" panose="02020603050405020304" pitchFamily="18" charset="0"/>
+                    <a:ea typeface="+mn-ea"/>
+                    <a:cs typeface="Times New Roman" panose="02020603050405020304" pitchFamily="18" charset="0"/>
+                  </a:defRPr>
+                </a:pPr>
+                <a:endParaRPr lang="en-CN"/>
+              </a:p>
+            </c:txPr>
+            <c:showLegendKey val="0"/>
+            <c:showVal val="0"/>
+            <c:showCatName val="0"/>
+            <c:showSerName val="0"/>
+            <c:showPercent val="0"/>
+            <c:showBubbleSize val="0"/>
+            <c:extLst>
+              <c:ext xmlns:c15="http://schemas.microsoft.com/office/drawing/2012/chart" uri="{CE6537A1-D6FC-4f65-9D91-7224C49458BB}">
+                <c15:showLeaderLines val="1"/>
+                <c15:leaderLines>
+                  <c:spPr>
+                    <a:ln w="9525" cap="flat" cmpd="sng" algn="ctr">
+                      <a:solidFill>
+                        <a:schemeClr val="tx1">
+                          <a:lumMod val="35000"/>
+                          <a:lumOff val="65000"/>
+                        </a:schemeClr>
+                      </a:solidFill>
+                      <a:round/>
+                    </a:ln>
+                    <a:effectLst/>
+                  </c:spPr>
+                </c15:leaderLines>
+              </c:ext>
+            </c:extLst>
+          </c:dLbls>
           <c:cat>
             <c:strRef>
               <c:f>'2016'!$C$2:$C$25</c:f>
@@ -21146,7 +21190,7 @@
             <a:effectLst/>
           </c:spPr>
         </c:majorGridlines>
-        <c:numFmt formatCode="General" sourceLinked="1"/>
+        <c:numFmt formatCode="0%" sourceLinked="0"/>
         <c:majorTickMark val="none"/>
         <c:minorTickMark val="none"/>
         <c:tickLblPos val="nextTo"/>
@@ -21162,7 +21206,7 @@
           <a:lstStyle/>
           <a:p>
             <a:pPr>
-              <a:defRPr sz="900" b="1" i="0" u="none" strike="noStrike" kern="1200" baseline="0">
+              <a:defRPr sz="1400" b="1" i="0" u="none" strike="noStrike" kern="1200" baseline="0">
                 <a:solidFill>
                   <a:schemeClr val="tx1"/>
                 </a:solidFill>
@@ -21256,7 +21300,9 @@
           </c:tx>
           <c:spPr>
             <a:solidFill>
-              <a:schemeClr val="accent1"/>
+              <a:schemeClr val="bg1">
+                <a:lumMod val="65000"/>
+              </a:schemeClr>
             </a:solidFill>
             <a:ln>
               <a:noFill/>
@@ -21270,7 +21316,9 @@
             <c:bubble3D val="0"/>
             <c:spPr>
               <a:solidFill>
-                <a:schemeClr val="accent1"/>
+                <a:schemeClr val="bg1">
+                  <a:lumMod val="65000"/>
+                </a:schemeClr>
               </a:solidFill>
               <a:ln>
                 <a:noFill/>
@@ -21289,7 +21337,9 @@
             <c:bubble3D val="0"/>
             <c:spPr>
               <a:solidFill>
-                <a:schemeClr val="accent1"/>
+                <a:schemeClr val="bg1">
+                  <a:lumMod val="65000"/>
+                </a:schemeClr>
               </a:solidFill>
               <a:ln>
                 <a:noFill/>
@@ -21308,7 +21358,9 @@
             <c:bubble3D val="0"/>
             <c:spPr>
               <a:solidFill>
-                <a:schemeClr val="accent1"/>
+                <a:schemeClr val="bg1">
+                  <a:lumMod val="65000"/>
+                </a:schemeClr>
               </a:solidFill>
               <a:ln>
                 <a:noFill/>
@@ -21327,7 +21379,10 @@
             <c:bubble3D val="0"/>
             <c:spPr>
               <a:solidFill>
-                <a:schemeClr val="accent4"/>
+                <a:schemeClr val="tx1">
+                  <a:lumMod val="65000"/>
+                  <a:lumOff val="35000"/>
+                </a:schemeClr>
               </a:solidFill>
               <a:ln>
                 <a:noFill/>
@@ -21346,7 +21401,7 @@
             <c:bubble3D val="0"/>
             <c:spPr>
               <a:solidFill>
-                <a:schemeClr val="accent6"/>
+                <a:srgbClr val="E68109"/>
               </a:solidFill>
               <a:ln>
                 <a:noFill/>
@@ -21365,9 +21420,7 @@
             <c:bubble3D val="0"/>
             <c:spPr>
               <a:solidFill>
-                <a:schemeClr val="accent1">
-                  <a:lumMod val="50000"/>
-                </a:schemeClr>
+                <a:schemeClr val="accent1"/>
               </a:solidFill>
               <a:ln>
                 <a:noFill/>
@@ -21380,6 +21433,88 @@
               </c:ext>
             </c:extLst>
           </c:dPt>
+          <c:dLbls>
+            <c:dLbl>
+              <c:idx val="12"/>
+              <c:tx>
+                <c:rich>
+                  <a:bodyPr/>
+                  <a:lstStyle/>
+                  <a:p>
+                    <a:r>
+                      <a:rPr lang="en-US" dirty="0"/>
+                      <a:t>26.4%</a:t>
+                    </a:r>
+                  </a:p>
+                </c:rich>
+              </c:tx>
+              <c:showLegendKey val="0"/>
+              <c:showVal val="1"/>
+              <c:showCatName val="0"/>
+              <c:showSerName val="0"/>
+              <c:showPercent val="0"/>
+              <c:showBubbleSize val="0"/>
+              <c:extLst>
+                <c:ext xmlns:c15="http://schemas.microsoft.com/office/drawing/2012/chart" uri="{CE6537A1-D6FC-4f65-9D91-7224C49458BB}">
+                  <c15:showDataLabelsRange val="0"/>
+                </c:ext>
+                <c:ext xmlns:c16="http://schemas.microsoft.com/office/drawing/2014/chart" uri="{C3380CC4-5D6E-409C-BE32-E72D297353CC}">
+                  <c16:uniqueId val="{00000005-16F9-E840-8E70-718531218F5F}"/>
+                </c:ext>
+              </c:extLst>
+            </c:dLbl>
+            <c:spPr>
+              <a:noFill/>
+              <a:ln>
+                <a:noFill/>
+              </a:ln>
+              <a:effectLst/>
+            </c:spPr>
+            <c:txPr>
+              <a:bodyPr rot="0" spcFirstLastPara="1" vertOverflow="ellipsis" vert="horz" wrap="square" lIns="38100" tIns="19050" rIns="38100" bIns="19050" anchor="ctr" anchorCtr="1">
+                <a:spAutoFit/>
+              </a:bodyPr>
+              <a:lstStyle/>
+              <a:p>
+                <a:pPr>
+                  <a:defRPr sz="1000" b="1" i="0" u="none" strike="noStrike" kern="1200" baseline="0">
+                    <a:solidFill>
+                      <a:schemeClr val="tx1"/>
+                    </a:solidFill>
+                    <a:latin typeface="Times New Roman" panose="02020603050405020304" pitchFamily="18" charset="0"/>
+                    <a:ea typeface="+mn-ea"/>
+                    <a:cs typeface="Times New Roman" panose="02020603050405020304" pitchFamily="18" charset="0"/>
+                  </a:defRPr>
+                </a:pPr>
+                <a:endParaRPr lang="en-CN"/>
+              </a:p>
+            </c:txPr>
+            <c:showLegendKey val="0"/>
+            <c:showVal val="0"/>
+            <c:showCatName val="0"/>
+            <c:showSerName val="0"/>
+            <c:showPercent val="0"/>
+            <c:showBubbleSize val="0"/>
+            <c:extLst>
+              <c:ext xmlns:c15="http://schemas.microsoft.com/office/drawing/2012/chart" uri="{CE6537A1-D6FC-4f65-9D91-7224C49458BB}">
+                <c15:showLeaderLines val="1"/>
+                <c15:leaderLines>
+                  <c:spPr>
+                    <a:ln w="9525" cap="flat" cmpd="sng" algn="ctr">
+                      <a:solidFill>
+                        <a:schemeClr val="tx1">
+                          <a:lumMod val="35000"/>
+                          <a:lumOff val="65000"/>
+                        </a:schemeClr>
+                      </a:solidFill>
+                      <a:round/>
+                    </a:ln>
+                    <a:effectLst/>
+                  </c:spPr>
+                </c15:leaderLines>
+              </c:ext>
+            </c:extLst>
+          </c:dLbls>
           <c:cat>
             <c:strRef>
               <c:f>'2016'!$F$2:$F$14</c:f>
@@ -21563,7 +21698,7 @@
             <a:effectLst/>
           </c:spPr>
         </c:majorGridlines>
-        <c:numFmt formatCode="General" sourceLinked="1"/>
+        <c:numFmt formatCode="0%" sourceLinked="0"/>
         <c:majorTickMark val="none"/>
         <c:minorTickMark val="none"/>
         <c:tickLblPos val="nextTo"/>
@@ -21579,7 +21714,7 @@
           <a:lstStyle/>
           <a:p>
             <a:pPr>
-              <a:defRPr sz="1000" b="1" i="0" u="none" strike="noStrike" kern="1200" baseline="0">
+              <a:defRPr sz="1400" b="1" i="0" u="none" strike="noStrike" kern="1200" baseline="0">
                 <a:solidFill>
                   <a:schemeClr val="tx1"/>
                 </a:solidFill>
@@ -21622,6 +21757,1164 @@
         <a:defRPr sz="1000" b="1">
           <a:solidFill>
             <a:schemeClr val="tx1"/>
+          </a:solidFill>
+          <a:latin typeface="Times New Roman" panose="02020603050405020304" pitchFamily="18" charset="0"/>
+          <a:cs typeface="Times New Roman" panose="02020603050405020304" pitchFamily="18" charset="0"/>
+        </a:defRPr>
+      </a:pPr>
+      <a:endParaRPr lang="en-CN"/>
+    </a:p>
+  </c:txPr>
+  <c:externalData r:id="rId3">
+    <c:autoUpdate val="0"/>
+  </c:externalData>
+</c:chartSpace>
+</file>
+
+<file path=ppt/charts/chart6.xml><?xml version="1.0" encoding="utf-8"?>
+<c:chartSpace xmlns:c="http://schemas.openxmlformats.org/drawingml/2006/chart" xmlns:a="http://schemas.openxmlformats.org/drawingml/2006/main" xmlns:r="http://schemas.openxmlformats.org/officeDocument/2006/relationships" xmlns:c16r2="http://schemas.microsoft.com/office/drawing/2015/06/chart">
+  <c:date1904 val="0"/>
+  <c:lang val="en-US"/>
+  <c:roundedCorners val="0"/>
+  <mc:AlternateContent xmlns:mc="http://schemas.openxmlformats.org/markup-compatibility/2006">
+    <mc:Choice xmlns:c14="http://schemas.microsoft.com/office/drawing/2007/8/2/chart" Requires="c14">
+      <c14:style val="102"/>
+    </mc:Choice>
+    <mc:Fallback>
+      <c:style val="2"/>
+    </mc:Fallback>
+  </mc:AlternateContent>
+  <c:chart>
+    <c:autoTitleDeleted val="1"/>
+    <c:plotArea>
+      <c:layout/>
+      <c:barChart>
+        <c:barDir val="bar"/>
+        <c:grouping val="clustered"/>
+        <c:varyColors val="0"/>
+        <c:ser>
+          <c:idx val="0"/>
+          <c:order val="0"/>
+          <c:spPr>
+            <a:solidFill>
+              <a:schemeClr val="bg1">
+                <a:lumMod val="65000"/>
+              </a:schemeClr>
+            </a:solidFill>
+            <a:ln>
+              <a:noFill/>
+            </a:ln>
+            <a:effectLst/>
+          </c:spPr>
+          <c:invertIfNegative val="0"/>
+          <c:dPt>
+            <c:idx val="3"/>
+            <c:invertIfNegative val="0"/>
+            <c:bubble3D val="0"/>
+            <c:spPr>
+              <a:solidFill>
+                <a:srgbClr val="C00000"/>
+              </a:solidFill>
+              <a:ln>
+                <a:noFill/>
+              </a:ln>
+              <a:effectLst/>
+            </c:spPr>
+            <c:extLst>
+              <c:ext xmlns:c16="http://schemas.microsoft.com/office/drawing/2014/chart" uri="{C3380CC4-5D6E-409C-BE32-E72D297353CC}">
+                <c16:uniqueId val="{00000004-6096-D740-A777-22D0D198AC97}"/>
+              </c:ext>
+            </c:extLst>
+          </c:dPt>
+          <c:dPt>
+            <c:idx val="6"/>
+            <c:invertIfNegative val="0"/>
+            <c:bubble3D val="0"/>
+            <c:spPr>
+              <a:solidFill>
+                <a:srgbClr val="E68109"/>
+              </a:solidFill>
+              <a:ln>
+                <a:noFill/>
+              </a:ln>
+              <a:effectLst/>
+            </c:spPr>
+            <c:extLst>
+              <c:ext xmlns:c16="http://schemas.microsoft.com/office/drawing/2014/chart" uri="{C3380CC4-5D6E-409C-BE32-E72D297353CC}">
+                <c16:uniqueId val="{00000003-9E58-0447-9437-75647892D8A4}"/>
+              </c:ext>
+            </c:extLst>
+          </c:dPt>
+          <c:dPt>
+            <c:idx val="7"/>
+            <c:invertIfNegative val="0"/>
+            <c:bubble3D val="0"/>
+            <c:spPr>
+              <a:solidFill>
+                <a:schemeClr val="accent1"/>
+              </a:solidFill>
+              <a:ln>
+                <a:noFill/>
+              </a:ln>
+              <a:effectLst/>
+            </c:spPr>
+            <c:extLst>
+              <c:ext xmlns:c16="http://schemas.microsoft.com/office/drawing/2014/chart" uri="{C3380CC4-5D6E-409C-BE32-E72D297353CC}">
+                <c16:uniqueId val="{00000001-9E58-0447-9437-75647892D8A4}"/>
+              </c:ext>
+            </c:extLst>
+          </c:dPt>
+          <c:dLbls>
+            <c:spPr>
+              <a:noFill/>
+              <a:ln>
+                <a:noFill/>
+              </a:ln>
+              <a:effectLst/>
+            </c:spPr>
+            <c:txPr>
+              <a:bodyPr rot="0" spcFirstLastPara="1" vertOverflow="ellipsis" vert="horz" wrap="square" anchor="ctr" anchorCtr="1"/>
+              <a:lstStyle/>
+              <a:p>
+                <a:pPr>
+                  <a:defRPr sz="1400" b="0" i="0" u="none" strike="noStrike" kern="1200" baseline="0">
+                    <a:solidFill>
+                      <a:sysClr val="windowText" lastClr="000000"/>
+                    </a:solidFill>
+                    <a:latin typeface="Times New Roman" panose="02020603050405020304" pitchFamily="18" charset="0"/>
+                    <a:ea typeface="+mn-ea"/>
+                    <a:cs typeface="Times New Roman" panose="02020603050405020304" pitchFamily="18" charset="0"/>
+                  </a:defRPr>
+                </a:pPr>
+                <a:endParaRPr lang="en-CN"/>
+              </a:p>
+            </c:txPr>
+            <c:showLegendKey val="0"/>
+            <c:showVal val="1"/>
+            <c:showCatName val="0"/>
+            <c:showSerName val="0"/>
+            <c:showPercent val="0"/>
+            <c:showBubbleSize val="0"/>
+            <c:showLeaderLines val="0"/>
+            <c:extLst>
+              <c:ext xmlns:c15="http://schemas.microsoft.com/office/drawing/2012/chart" uri="{CE6537A1-D6FC-4f65-9D91-7224C49458BB}">
+                <c15:showLeaderLines val="1"/>
+                <c15:leaderLines>
+                  <c:spPr>
+                    <a:ln w="9525" cap="flat" cmpd="sng" algn="ctr">
+                      <a:solidFill>
+                        <a:schemeClr val="tx1">
+                          <a:lumMod val="35000"/>
+                          <a:lumOff val="65000"/>
+                        </a:schemeClr>
+                      </a:solidFill>
+                      <a:round/>
+                    </a:ln>
+                    <a:effectLst/>
+                  </c:spPr>
+                </c15:leaderLines>
+              </c:ext>
+            </c:extLst>
+          </c:dLbls>
+          <c:cat>
+            <c:strRef>
+              <c:f>Sheet1!$A$2:$A$9</c:f>
+              <c:strCache>
+                <c:ptCount val="8"/>
+                <c:pt idx="0">
+                  <c:v>Other Currencies</c:v>
+                </c:pt>
+                <c:pt idx="1">
+                  <c:v>AUD</c:v>
+                </c:pt>
+                <c:pt idx="2">
+                  <c:v>CAD</c:v>
+                </c:pt>
+                <c:pt idx="3">
+                  <c:v>CNY</c:v>
+                </c:pt>
+                <c:pt idx="4">
+                  <c:v>GBP</c:v>
+                </c:pt>
+                <c:pt idx="5">
+                  <c:v>JPY</c:v>
+                </c:pt>
+                <c:pt idx="6">
+                  <c:v>EUR</c:v>
+                </c:pt>
+                <c:pt idx="7">
+                  <c:v>USD</c:v>
+                </c:pt>
+              </c:strCache>
+            </c:strRef>
+          </c:cat>
+          <c:val>
+            <c:numRef>
+              <c:f>Sheet1!$B$2:$B$9</c:f>
+              <c:numCache>
+                <c:formatCode>0.00%</c:formatCode>
+                <c:ptCount val="8"/>
+                <c:pt idx="0">
+                  <c:v>3.9E-2</c:v>
+                </c:pt>
+                <c:pt idx="1">
+                  <c:v>0.02</c:v>
+                </c:pt>
+                <c:pt idx="2">
+                  <c:v>2.4E-2</c:v>
+                </c:pt>
+                <c:pt idx="3">
+                  <c:v>2.5999999999999999E-2</c:v>
+                </c:pt>
+                <c:pt idx="4">
+                  <c:v>4.9000000000000002E-2</c:v>
+                </c:pt>
+                <c:pt idx="5">
+                  <c:v>5.5E-2</c:v>
+                </c:pt>
+                <c:pt idx="6">
+                  <c:v>0.19800000000000001</c:v>
+                </c:pt>
+                <c:pt idx="7">
+                  <c:v>0.59</c:v>
+                </c:pt>
+              </c:numCache>
+            </c:numRef>
+          </c:val>
+          <c:extLst>
+            <c:ext xmlns:c16="http://schemas.microsoft.com/office/drawing/2014/chart" uri="{C3380CC4-5D6E-409C-BE32-E72D297353CC}">
+              <c16:uniqueId val="{00000000-9E58-0447-9437-75647892D8A4}"/>
+            </c:ext>
+          </c:extLst>
+        </c:ser>
+        <c:dLbls>
+          <c:showLegendKey val="0"/>
+          <c:showVal val="0"/>
+          <c:showCatName val="0"/>
+          <c:showSerName val="0"/>
+          <c:showPercent val="0"/>
+          <c:showBubbleSize val="0"/>
+        </c:dLbls>
+        <c:gapWidth val="182"/>
+        <c:axId val="1112240016"/>
+        <c:axId val="1112241616"/>
+      </c:barChart>
+      <c:catAx>
+        <c:axId val="1112240016"/>
+        <c:scaling>
+          <c:orientation val="minMax"/>
+        </c:scaling>
+        <c:delete val="0"/>
+        <c:axPos val="l"/>
+        <c:numFmt formatCode="General" sourceLinked="1"/>
+        <c:majorTickMark val="none"/>
+        <c:minorTickMark val="none"/>
+        <c:tickLblPos val="nextTo"/>
+        <c:spPr>
+          <a:noFill/>
+          <a:ln w="9525" cap="flat" cmpd="sng" algn="ctr">
+            <a:solidFill>
+              <a:schemeClr val="tx1">
+                <a:lumMod val="15000"/>
+                <a:lumOff val="85000"/>
+              </a:schemeClr>
+            </a:solidFill>
+            <a:round/>
+          </a:ln>
+          <a:effectLst/>
+        </c:spPr>
+        <c:txPr>
+          <a:bodyPr rot="-60000000" spcFirstLastPara="1" vertOverflow="ellipsis" vert="horz" wrap="square" anchor="ctr" anchorCtr="1"/>
+          <a:lstStyle/>
+          <a:p>
+            <a:pPr>
+              <a:defRPr sz="1400" b="0" i="0" u="none" strike="noStrike" kern="1200" baseline="0">
+                <a:solidFill>
+                  <a:sysClr val="windowText" lastClr="000000"/>
+                </a:solidFill>
+                <a:latin typeface="Times New Roman" panose="02020603050405020304" pitchFamily="18" charset="0"/>
+                <a:ea typeface="+mn-ea"/>
+                <a:cs typeface="Times New Roman" panose="02020603050405020304" pitchFamily="18" charset="0"/>
+              </a:defRPr>
+            </a:pPr>
+            <a:endParaRPr lang="en-CN"/>
+          </a:p>
+        </c:txPr>
+        <c:crossAx val="1112241616"/>
+        <c:crosses val="autoZero"/>
+        <c:auto val="1"/>
+        <c:lblAlgn val="ctr"/>
+        <c:lblOffset val="100"/>
+        <c:noMultiLvlLbl val="0"/>
+      </c:catAx>
+      <c:valAx>
+        <c:axId val="1112241616"/>
+        <c:scaling>
+          <c:orientation val="minMax"/>
+          <c:max val="0.65000000000000013"/>
+          <c:min val="0"/>
+        </c:scaling>
+        <c:delete val="0"/>
+        <c:axPos val="b"/>
+        <c:majorGridlines>
+          <c:spPr>
+            <a:ln w="9525" cap="flat" cmpd="sng" algn="ctr">
+              <a:solidFill>
+                <a:schemeClr val="tx1">
+                  <a:lumMod val="15000"/>
+                  <a:lumOff val="85000"/>
+                </a:schemeClr>
+              </a:solidFill>
+              <a:prstDash val="dash"/>
+              <a:round/>
+            </a:ln>
+            <a:effectLst/>
+          </c:spPr>
+        </c:majorGridlines>
+        <c:numFmt formatCode="0%" sourceLinked="0"/>
+        <c:majorTickMark val="none"/>
+        <c:minorTickMark val="none"/>
+        <c:tickLblPos val="nextTo"/>
+        <c:spPr>
+          <a:noFill/>
+          <a:ln>
+            <a:noFill/>
+          </a:ln>
+          <a:effectLst/>
+        </c:spPr>
+        <c:txPr>
+          <a:bodyPr rot="-60000000" spcFirstLastPara="1" vertOverflow="ellipsis" vert="horz" wrap="square" anchor="ctr" anchorCtr="1"/>
+          <a:lstStyle/>
+          <a:p>
+            <a:pPr>
+              <a:defRPr sz="1400" b="0" i="0" u="none" strike="noStrike" kern="1200" baseline="0">
+                <a:solidFill>
+                  <a:sysClr val="windowText" lastClr="000000"/>
+                </a:solidFill>
+                <a:latin typeface="Times New Roman" panose="02020603050405020304" pitchFamily="18" charset="0"/>
+                <a:ea typeface="+mn-ea"/>
+                <a:cs typeface="Times New Roman" panose="02020603050405020304" pitchFamily="18" charset="0"/>
+              </a:defRPr>
+            </a:pPr>
+            <a:endParaRPr lang="en-CN"/>
+          </a:p>
+        </c:txPr>
+        <c:crossAx val="1112240016"/>
+        <c:crosses val="autoZero"/>
+        <c:crossBetween val="between"/>
+      </c:valAx>
+      <c:spPr>
+        <a:noFill/>
+        <a:ln>
+          <a:noFill/>
+        </a:ln>
+        <a:effectLst/>
+      </c:spPr>
+    </c:plotArea>
+    <c:plotVisOnly val="1"/>
+    <c:dispBlanksAs val="gap"/>
+    <c:extLst>
+      <c:ext xmlns:c16r3="http://schemas.microsoft.com/office/drawing/2017/03/chart" uri="{56B9EC1D-385E-4148-901F-78D8002777C0}">
+        <c16r3:dataDisplayOptions16>
+          <c16r3:dispNaAsBlank val="1"/>
+        </c16r3:dataDisplayOptions16>
+      </c:ext>
+    </c:extLst>
+    <c:showDLblsOverMax val="0"/>
+  </c:chart>
+  <c:spPr>
+    <a:noFill/>
+    <a:ln>
+      <a:noFill/>
+    </a:ln>
+    <a:effectLst/>
+  </c:spPr>
+  <c:txPr>
+    <a:bodyPr/>
+    <a:lstStyle/>
+    <a:p>
+      <a:pPr>
+        <a:defRPr sz="1400">
+          <a:solidFill>
+            <a:sysClr val="windowText" lastClr="000000"/>
+          </a:solidFill>
+          <a:latin typeface="Times New Roman" panose="02020603050405020304" pitchFamily="18" charset="0"/>
+          <a:cs typeface="Times New Roman" panose="02020603050405020304" pitchFamily="18" charset="0"/>
+        </a:defRPr>
+      </a:pPr>
+      <a:endParaRPr lang="en-CN"/>
+    </a:p>
+  </c:txPr>
+  <c:externalData r:id="rId3">
+    <c:autoUpdate val="0"/>
+  </c:externalData>
+</c:chartSpace>
+</file>
+
+<file path=ppt/charts/chart7.xml><?xml version="1.0" encoding="utf-8"?>
+<c:chartSpace xmlns:c="http://schemas.openxmlformats.org/drawingml/2006/chart" xmlns:a="http://schemas.openxmlformats.org/drawingml/2006/main" xmlns:r="http://schemas.openxmlformats.org/officeDocument/2006/relationships" xmlns:c16r2="http://schemas.microsoft.com/office/drawing/2015/06/chart">
+  <c:date1904 val="0"/>
+  <c:lang val="en-US"/>
+  <c:roundedCorners val="0"/>
+  <mc:AlternateContent xmlns:mc="http://schemas.openxmlformats.org/markup-compatibility/2006">
+    <mc:Choice xmlns:c14="http://schemas.microsoft.com/office/drawing/2007/8/2/chart" Requires="c14">
+      <c14:style val="102"/>
+    </mc:Choice>
+    <mc:Fallback>
+      <c:style val="2"/>
+    </mc:Fallback>
+  </mc:AlternateContent>
+  <c:chart>
+    <c:autoTitleDeleted val="1"/>
+    <c:plotArea>
+      <c:layout/>
+      <c:barChart>
+        <c:barDir val="bar"/>
+        <c:grouping val="clustered"/>
+        <c:varyColors val="0"/>
+        <c:ser>
+          <c:idx val="0"/>
+          <c:order val="0"/>
+          <c:tx>
+            <c:strRef>
+              <c:f>Sheet1!$B$1</c:f>
+              <c:strCache>
+                <c:ptCount val="1"/>
+                <c:pt idx="0">
+                  <c:v>Foreign Exchange Reserves</c:v>
+                </c:pt>
+              </c:strCache>
+            </c:strRef>
+          </c:tx>
+          <c:spPr>
+            <a:solidFill>
+              <a:schemeClr val="bg1">
+                <a:lumMod val="65000"/>
+              </a:schemeClr>
+            </a:solidFill>
+            <a:ln>
+              <a:noFill/>
+            </a:ln>
+            <a:effectLst/>
+          </c:spPr>
+          <c:invertIfNegative val="0"/>
+          <c:dPt>
+            <c:idx val="8"/>
+            <c:invertIfNegative val="0"/>
+            <c:bubble3D val="0"/>
+            <c:spPr>
+              <a:solidFill>
+                <a:schemeClr val="accent1"/>
+              </a:solidFill>
+              <a:ln>
+                <a:noFill/>
+              </a:ln>
+              <a:effectLst/>
+            </c:spPr>
+            <c:extLst>
+              <c:ext xmlns:c16="http://schemas.microsoft.com/office/drawing/2014/chart" uri="{C3380CC4-5D6E-409C-BE32-E72D297353CC}">
+                <c16:uniqueId val="{00000008-5561-2647-9211-EF93B62BC1E3}"/>
+              </c:ext>
+            </c:extLst>
+          </c:dPt>
+          <c:dPt>
+            <c:idx val="17"/>
+            <c:invertIfNegative val="0"/>
+            <c:bubble3D val="0"/>
+            <c:spPr>
+              <a:solidFill>
+                <a:srgbClr val="E68109"/>
+              </a:solidFill>
+              <a:ln>
+                <a:noFill/>
+              </a:ln>
+              <a:effectLst/>
+            </c:spPr>
+            <c:extLst>
+              <c:ext xmlns:c16="http://schemas.microsoft.com/office/drawing/2014/chart" uri="{C3380CC4-5D6E-409C-BE32-E72D297353CC}">
+                <c16:uniqueId val="{0000000B-5561-2647-9211-EF93B62BC1E3}"/>
+              </c:ext>
+            </c:extLst>
+          </c:dPt>
+          <c:dPt>
+            <c:idx val="18"/>
+            <c:invertIfNegative val="0"/>
+            <c:bubble3D val="0"/>
+            <c:spPr>
+              <a:solidFill>
+                <a:srgbClr val="C00000"/>
+              </a:solidFill>
+              <a:ln>
+                <a:noFill/>
+              </a:ln>
+              <a:effectLst/>
+            </c:spPr>
+            <c:extLst>
+              <c:ext xmlns:c16="http://schemas.microsoft.com/office/drawing/2014/chart" uri="{C3380CC4-5D6E-409C-BE32-E72D297353CC}">
+                <c16:uniqueId val="{0000000C-5561-2647-9211-EF93B62BC1E3}"/>
+              </c:ext>
+            </c:extLst>
+          </c:dPt>
+          <c:dLbls>
+            <c:dLbl>
+              <c:idx val="0"/>
+              <c:layout>
+                <c:manualLayout>
+                  <c:x val="-1.0940889402230161E-2"/>
+                  <c:y val="3.0402682330511631E-3"/>
+                </c:manualLayout>
+              </c:layout>
+              <c:dLblPos val="outEnd"/>
+              <c:showLegendKey val="0"/>
+              <c:showVal val="1"/>
+              <c:showCatName val="0"/>
+              <c:showSerName val="0"/>
+              <c:showPercent val="0"/>
+              <c:showBubbleSize val="0"/>
+              <c:extLst>
+                <c:ext xmlns:c15="http://schemas.microsoft.com/office/drawing/2012/chart" uri="{CE6537A1-D6FC-4f65-9D91-7224C49458BB}"/>
+                <c:ext xmlns:c16="http://schemas.microsoft.com/office/drawing/2014/chart" uri="{C3380CC4-5D6E-409C-BE32-E72D297353CC}">
+                  <c16:uniqueId val="{00000000-5561-2647-9211-EF93B62BC1E3}"/>
+                </c:ext>
+              </c:extLst>
+            </c:dLbl>
+            <c:dLbl>
+              <c:idx val="1"/>
+              <c:layout>
+                <c:manualLayout>
+                  <c:x val="-1.1241609576260036E-2"/>
+                  <c:y val="3.0402682330510516E-3"/>
+                </c:manualLayout>
+              </c:layout>
+              <c:dLblPos val="outEnd"/>
+              <c:showLegendKey val="0"/>
+              <c:showVal val="1"/>
+              <c:showCatName val="0"/>
+              <c:showSerName val="0"/>
+              <c:showPercent val="0"/>
+              <c:showBubbleSize val="0"/>
+              <c:extLst>
+                <c:ext xmlns:c15="http://schemas.microsoft.com/office/drawing/2012/chart" uri="{CE6537A1-D6FC-4f65-9D91-7224C49458BB}"/>
+                <c:ext xmlns:c16="http://schemas.microsoft.com/office/drawing/2014/chart" uri="{C3380CC4-5D6E-409C-BE32-E72D297353CC}">
+                  <c16:uniqueId val="{00000001-5561-2647-9211-EF93B62BC1E3}"/>
+                </c:ext>
+              </c:extLst>
+            </c:dLbl>
+            <c:dLbl>
+              <c:idx val="2"/>
+              <c:layout>
+                <c:manualLayout>
+                  <c:x val="-1.0329291668558352E-2"/>
+                  <c:y val="3.0402682330510516E-3"/>
+                </c:manualLayout>
+              </c:layout>
+              <c:dLblPos val="outEnd"/>
+              <c:showLegendKey val="0"/>
+              <c:showVal val="1"/>
+              <c:showCatName val="0"/>
+              <c:showSerName val="0"/>
+              <c:showPercent val="0"/>
+              <c:showBubbleSize val="0"/>
+              <c:extLst>
+                <c:ext xmlns:c15="http://schemas.microsoft.com/office/drawing/2012/chart" uri="{CE6537A1-D6FC-4f65-9D91-7224C49458BB}"/>
+                <c:ext xmlns:c16="http://schemas.microsoft.com/office/drawing/2014/chart" uri="{C3380CC4-5D6E-409C-BE32-E72D297353CC}">
+                  <c16:uniqueId val="{00000002-5561-2647-9211-EF93B62BC1E3}"/>
+                </c:ext>
+              </c:extLst>
+            </c:dLbl>
+            <c:dLbl>
+              <c:idx val="3"/>
+              <c:layout>
+                <c:manualLayout>
+                  <c:x val="-1.1180819162369656E-2"/>
+                  <c:y val="0"/>
+                </c:manualLayout>
+              </c:layout>
+              <c:dLblPos val="outEnd"/>
+              <c:showLegendKey val="0"/>
+              <c:showVal val="1"/>
+              <c:showCatName val="0"/>
+              <c:showSerName val="0"/>
+              <c:showPercent val="0"/>
+              <c:showBubbleSize val="0"/>
+              <c:extLst>
+                <c:ext xmlns:c15="http://schemas.microsoft.com/office/drawing/2012/chart" uri="{CE6537A1-D6FC-4f65-9D91-7224C49458BB}"/>
+                <c:ext xmlns:c16="http://schemas.microsoft.com/office/drawing/2014/chart" uri="{C3380CC4-5D6E-409C-BE32-E72D297353CC}">
+                  <c16:uniqueId val="{00000003-5561-2647-9211-EF93B62BC1E3}"/>
+                </c:ext>
+              </c:extLst>
+            </c:dLbl>
+            <c:dLbl>
+              <c:idx val="4"/>
+              <c:layout>
+                <c:manualLayout>
+                  <c:x val="-1.1180819162369656E-2"/>
+                  <c:y val="0"/>
+                </c:manualLayout>
+              </c:layout>
+              <c:dLblPos val="outEnd"/>
+              <c:showLegendKey val="0"/>
+              <c:showVal val="1"/>
+              <c:showCatName val="0"/>
+              <c:showSerName val="0"/>
+              <c:showPercent val="0"/>
+              <c:showBubbleSize val="0"/>
+              <c:extLst>
+                <c:ext xmlns:c15="http://schemas.microsoft.com/office/drawing/2012/chart" uri="{CE6537A1-D6FC-4f65-9D91-7224C49458BB}"/>
+                <c:ext xmlns:c16="http://schemas.microsoft.com/office/drawing/2014/chart" uri="{C3380CC4-5D6E-409C-BE32-E72D297353CC}">
+                  <c16:uniqueId val="{00000004-5561-2647-9211-EF93B62BC1E3}"/>
+                </c:ext>
+              </c:extLst>
+            </c:dLbl>
+            <c:dLbl>
+              <c:idx val="5"/>
+              <c:layout>
+                <c:manualLayout>
+                  <c:x val="-1.022848731134776E-2"/>
+                  <c:y val="3.0402682330511631E-3"/>
+                </c:manualLayout>
+              </c:layout>
+              <c:dLblPos val="outEnd"/>
+              <c:showLegendKey val="0"/>
+              <c:showVal val="1"/>
+              <c:showCatName val="0"/>
+              <c:showSerName val="0"/>
+              <c:showPercent val="0"/>
+              <c:showBubbleSize val="0"/>
+              <c:extLst>
+                <c:ext xmlns:c15="http://schemas.microsoft.com/office/drawing/2012/chart" uri="{CE6537A1-D6FC-4f65-9D91-7224C49458BB}"/>
+                <c:ext xmlns:c16="http://schemas.microsoft.com/office/drawing/2014/chart" uri="{C3380CC4-5D6E-409C-BE32-E72D297353CC}">
+                  <c16:uniqueId val="{00000005-5561-2647-9211-EF93B62BC1E3}"/>
+                </c:ext>
+              </c:extLst>
+            </c:dLbl>
+            <c:dLbl>
+              <c:idx val="6"/>
+              <c:layout>
+                <c:manualLayout>
+                  <c:x val="-9.6058087933718807E-3"/>
+                  <c:y val="3.0402682330511631E-3"/>
+                </c:manualLayout>
+              </c:layout>
+              <c:dLblPos val="outEnd"/>
+              <c:showLegendKey val="0"/>
+              <c:showVal val="1"/>
+              <c:showCatName val="0"/>
+              <c:showSerName val="0"/>
+              <c:showPercent val="0"/>
+              <c:showBubbleSize val="0"/>
+              <c:extLst>
+                <c:ext xmlns:c15="http://schemas.microsoft.com/office/drawing/2012/chart" uri="{CE6537A1-D6FC-4f65-9D91-7224C49458BB}"/>
+                <c:ext xmlns:c16="http://schemas.microsoft.com/office/drawing/2014/chart" uri="{C3380CC4-5D6E-409C-BE32-E72D297353CC}">
+                  <c16:uniqueId val="{00000006-5561-2647-9211-EF93B62BC1E3}"/>
+                </c:ext>
+              </c:extLst>
+            </c:dLbl>
+            <c:dLbl>
+              <c:idx val="7"/>
+              <c:layout>
+                <c:manualLayout>
+                  <c:x val="-1.1229297593699995E-2"/>
+                  <c:y val="-3.0402682330511631E-3"/>
+                </c:manualLayout>
+              </c:layout>
+              <c:dLblPos val="outEnd"/>
+              <c:showLegendKey val="0"/>
+              <c:showVal val="1"/>
+              <c:showCatName val="0"/>
+              <c:showSerName val="0"/>
+              <c:showPercent val="0"/>
+              <c:showBubbleSize val="0"/>
+              <c:extLst>
+                <c:ext xmlns:c15="http://schemas.microsoft.com/office/drawing/2012/chart" uri="{CE6537A1-D6FC-4f65-9D91-7224C49458BB}"/>
+                <c:ext xmlns:c16="http://schemas.microsoft.com/office/drawing/2014/chart" uri="{C3380CC4-5D6E-409C-BE32-E72D297353CC}">
+                  <c16:uniqueId val="{00000007-5561-2647-9211-EF93B62BC1E3}"/>
+                </c:ext>
+              </c:extLst>
+            </c:dLbl>
+            <c:dLbl>
+              <c:idx val="8"/>
+              <c:layout>
+                <c:manualLayout>
+                  <c:x val="-9.504234937251211E-3"/>
+                  <c:y val="3.0402682330511631E-3"/>
+                </c:manualLayout>
+              </c:layout>
+              <c:dLblPos val="outEnd"/>
+              <c:showLegendKey val="0"/>
+              <c:showVal val="1"/>
+              <c:showCatName val="0"/>
+              <c:showSerName val="0"/>
+              <c:showPercent val="0"/>
+              <c:showBubbleSize val="0"/>
+              <c:extLst>
+                <c:ext xmlns:c15="http://schemas.microsoft.com/office/drawing/2012/chart" uri="{CE6537A1-D6FC-4f65-9D91-7224C49458BB}"/>
+                <c:ext xmlns:c16="http://schemas.microsoft.com/office/drawing/2014/chart" uri="{C3380CC4-5D6E-409C-BE32-E72D297353CC}">
+                  <c16:uniqueId val="{00000008-5561-2647-9211-EF93B62BC1E3}"/>
+                </c:ext>
+              </c:extLst>
+            </c:dLbl>
+            <c:dLbl>
+              <c:idx val="9"/>
+              <c:layout>
+                <c:manualLayout>
+                  <c:x val="-8.8007590337248285E-3"/>
+                  <c:y val="3.0402682330511631E-3"/>
+                </c:manualLayout>
+              </c:layout>
+              <c:dLblPos val="outEnd"/>
+              <c:showLegendKey val="0"/>
+              <c:showVal val="1"/>
+              <c:showCatName val="0"/>
+              <c:showSerName val="0"/>
+              <c:showPercent val="0"/>
+              <c:showBubbleSize val="0"/>
+              <c:extLst>
+                <c:ext xmlns:c15="http://schemas.microsoft.com/office/drawing/2012/chart" uri="{CE6537A1-D6FC-4f65-9D91-7224C49458BB}"/>
+                <c:ext xmlns:c16="http://schemas.microsoft.com/office/drawing/2014/chart" uri="{C3380CC4-5D6E-409C-BE32-E72D297353CC}">
+                  <c16:uniqueId val="{00000009-5561-2647-9211-EF93B62BC1E3}"/>
+                </c:ext>
+              </c:extLst>
+            </c:dLbl>
+            <c:dLbl>
+              <c:idx val="10"/>
+              <c:layout>
+                <c:manualLayout>
+                  <c:x val="-4.9207916296986568E-3"/>
+                  <c:y val="3.0402682330511071E-3"/>
+                </c:manualLayout>
+              </c:layout>
+              <c:dLblPos val="outEnd"/>
+              <c:showLegendKey val="0"/>
+              <c:showVal val="1"/>
+              <c:showCatName val="0"/>
+              <c:showSerName val="0"/>
+              <c:showPercent val="0"/>
+              <c:showBubbleSize val="0"/>
+              <c:extLst>
+                <c:ext xmlns:c15="http://schemas.microsoft.com/office/drawing/2012/chart" uri="{CE6537A1-D6FC-4f65-9D91-7224C49458BB}"/>
+                <c:ext xmlns:c16="http://schemas.microsoft.com/office/drawing/2014/chart" uri="{C3380CC4-5D6E-409C-BE32-E72D297353CC}">
+                  <c16:uniqueId val="{0000000A-5561-2647-9211-EF93B62BC1E3}"/>
+                </c:ext>
+              </c:extLst>
+            </c:dLbl>
+            <c:dLbl>
+              <c:idx val="17"/>
+              <c:tx>
+                <c:rich>
+                  <a:bodyPr/>
+                  <a:lstStyle/>
+                  <a:p>
+                    <a:r>
+                      <a:rPr lang="en-US"/>
+                      <a:t>$1.2T</a:t>
+                    </a:r>
+                  </a:p>
+                </c:rich>
+              </c:tx>
+              <c:dLblPos val="inEnd"/>
+              <c:showLegendKey val="0"/>
+              <c:showVal val="1"/>
+              <c:showCatName val="0"/>
+              <c:showSerName val="0"/>
+              <c:showPercent val="0"/>
+              <c:showBubbleSize val="0"/>
+              <c:extLst>
+                <c:ext xmlns:c15="http://schemas.microsoft.com/office/drawing/2012/chart" uri="{CE6537A1-D6FC-4f65-9D91-7224C49458BB}">
+                  <c15:showDataLabelsRange val="0"/>
+                </c:ext>
+                <c:ext xmlns:c16="http://schemas.microsoft.com/office/drawing/2014/chart" uri="{C3380CC4-5D6E-409C-BE32-E72D297353CC}">
+                  <c16:uniqueId val="{0000000B-5561-2647-9211-EF93B62BC1E3}"/>
+                </c:ext>
+              </c:extLst>
+            </c:dLbl>
+            <c:dLbl>
+              <c:idx val="18"/>
+              <c:tx>
+                <c:rich>
+                  <a:bodyPr rot="0" spcFirstLastPara="1" vertOverflow="ellipsis" vert="horz" wrap="square" anchor="ctr" anchorCtr="1"/>
+                  <a:lstStyle/>
+                  <a:p>
+                    <a:pPr>
+                      <a:defRPr sz="1400" b="0" i="0" u="none" strike="noStrike" kern="1200" baseline="0">
+                        <a:solidFill>
+                          <a:schemeClr val="bg1"/>
+                        </a:solidFill>
+                        <a:latin typeface="Times New Roman" panose="02020603050405020304" pitchFamily="18" charset="0"/>
+                        <a:ea typeface="+mn-ea"/>
+                        <a:cs typeface="Times New Roman" panose="02020603050405020304" pitchFamily="18" charset="0"/>
+                      </a:defRPr>
+                    </a:pPr>
+                    <a:r>
+                      <a:rPr lang="en-US" b="0">
+                        <a:solidFill>
+                          <a:schemeClr val="bg1"/>
+                        </a:solidFill>
+                      </a:rPr>
+                      <a:t>$3.2T</a:t>
+                    </a:r>
+                  </a:p>
+                </c:rich>
+              </c:tx>
+              <c:spPr>
+                <a:noFill/>
+                <a:ln>
+                  <a:noFill/>
+                </a:ln>
+                <a:effectLst/>
+              </c:spPr>
+              <c:txPr>
+                <a:bodyPr rot="0" spcFirstLastPara="1" vertOverflow="ellipsis" vert="horz" wrap="square" anchor="ctr" anchorCtr="1"/>
+                <a:lstStyle/>
+                <a:p>
+                  <a:pPr>
+                    <a:defRPr sz="1400" b="0" i="0" u="none" strike="noStrike" kern="1200" baseline="0">
+                      <a:solidFill>
+                        <a:schemeClr val="bg1"/>
+                      </a:solidFill>
+                      <a:latin typeface="Times New Roman" panose="02020603050405020304" pitchFamily="18" charset="0"/>
+                      <a:ea typeface="+mn-ea"/>
+                      <a:cs typeface="Times New Roman" panose="02020603050405020304" pitchFamily="18" charset="0"/>
+                    </a:defRPr>
+                  </a:pPr>
+                  <a:endParaRPr lang="en-CN"/>
+                </a:p>
+              </c:txPr>
+              <c:dLblPos val="inEnd"/>
+              <c:showLegendKey val="0"/>
+              <c:showVal val="1"/>
+              <c:showCatName val="0"/>
+              <c:showSerName val="0"/>
+              <c:showPercent val="0"/>
+              <c:showBubbleSize val="0"/>
+              <c:extLst>
+                <c:ext xmlns:c15="http://schemas.microsoft.com/office/drawing/2012/chart" uri="{CE6537A1-D6FC-4f65-9D91-7224C49458BB}">
+                  <c15:showDataLabelsRange val="0"/>
+                </c:ext>
+                <c:ext xmlns:c16="http://schemas.microsoft.com/office/drawing/2014/chart" uri="{C3380CC4-5D6E-409C-BE32-E72D297353CC}">
+                  <c16:uniqueId val="{0000000C-5561-2647-9211-EF93B62BC1E3}"/>
+                </c:ext>
+              </c:extLst>
+            </c:dLbl>
+            <c:spPr>
+              <a:noFill/>
+              <a:ln>
+                <a:noFill/>
+              </a:ln>
+              <a:effectLst/>
+            </c:spPr>
+            <c:txPr>
+              <a:bodyPr rot="0" spcFirstLastPara="1" vertOverflow="ellipsis" vert="horz" wrap="square" anchor="ctr" anchorCtr="1"/>
+              <a:lstStyle/>
+              <a:p>
+                <a:pPr>
+                  <a:defRPr sz="1400" b="0" i="0" u="none" strike="noStrike" kern="1200" baseline="0">
+                    <a:solidFill>
+                      <a:sysClr val="windowText" lastClr="000000"/>
+                    </a:solidFill>
+                    <a:latin typeface="Times New Roman" panose="02020603050405020304" pitchFamily="18" charset="0"/>
+                    <a:ea typeface="+mn-ea"/>
+                    <a:cs typeface="Times New Roman" panose="02020603050405020304" pitchFamily="18" charset="0"/>
+                  </a:defRPr>
+                </a:pPr>
+                <a:endParaRPr lang="en-CN"/>
+              </a:p>
+            </c:txPr>
+            <c:dLblPos val="inEnd"/>
+            <c:showLegendKey val="0"/>
+            <c:showVal val="1"/>
+            <c:showCatName val="0"/>
+            <c:showSerName val="0"/>
+            <c:showPercent val="0"/>
+            <c:showBubbleSize val="0"/>
+            <c:showLeaderLines val="0"/>
+            <c:extLst>
+              <c:ext xmlns:c15="http://schemas.microsoft.com/office/drawing/2012/chart" uri="{CE6537A1-D6FC-4f65-9D91-7224C49458BB}">
+                <c15:showLeaderLines val="1"/>
+                <c15:leaderLines>
+                  <c:spPr>
+                    <a:ln w="9525">
+                      <a:solidFill>
+                        <a:schemeClr val="tx1">
+                          <a:lumMod val="35000"/>
+                          <a:lumOff val="65000"/>
+                        </a:schemeClr>
+                      </a:solidFill>
+                    </a:ln>
+                    <a:effectLst/>
+                  </c:spPr>
+                </c15:leaderLines>
+              </c:ext>
+            </c:extLst>
+          </c:dLbls>
+          <c:cat>
+            <c:strRef>
+              <c:f>Sheet1!$A$2:$A$20</c:f>
+              <c:strCache>
+                <c:ptCount val="19"/>
+                <c:pt idx="0">
+                  <c:v>Indonesia</c:v>
+                </c:pt>
+                <c:pt idx="1">
+                  <c:v>United Arab Emirates</c:v>
+                </c:pt>
+                <c:pt idx="2">
+                  <c:v>Czech Republic</c:v>
+                </c:pt>
+                <c:pt idx="3">
+                  <c:v>Mexico</c:v>
+                </c:pt>
+                <c:pt idx="4">
+                  <c:v>Poland</c:v>
+                </c:pt>
+                <c:pt idx="5">
+                  <c:v>United Kingdom</c:v>
+                </c:pt>
+                <c:pt idx="6">
+                  <c:v>Israel</c:v>
+                </c:pt>
+                <c:pt idx="7">
+                  <c:v>Thailand</c:v>
+                </c:pt>
+                <c:pt idx="8">
+                  <c:v>United States</c:v>
+                </c:pt>
+                <c:pt idx="9">
+                  <c:v>Singapore</c:v>
+                </c:pt>
+                <c:pt idx="10">
+                  <c:v>Brazil</c:v>
+                </c:pt>
+                <c:pt idx="11">
+                  <c:v>South Korea</c:v>
+                </c:pt>
+                <c:pt idx="12">
+                  <c:v>Hong Kong</c:v>
+                </c:pt>
+                <c:pt idx="13">
+                  <c:v>Russia</c:v>
+                </c:pt>
+                <c:pt idx="14">
+                  <c:v>Saudi Arabia</c:v>
+                </c:pt>
+                <c:pt idx="15">
+                  <c:v>India</c:v>
+                </c:pt>
+                <c:pt idx="16">
+                  <c:v>Switzerland</c:v>
+                </c:pt>
+                <c:pt idx="17">
+                  <c:v>Japan</c:v>
+                </c:pt>
+                <c:pt idx="18">
+                  <c:v>China(Main Land)</c:v>
+                </c:pt>
+              </c:strCache>
+            </c:strRef>
+          </c:cat>
+          <c:val>
+            <c:numRef>
+              <c:f>Sheet1!$B$2:$B$20</c:f>
+              <c:numCache>
+                <c:formatCode>\$0"B"</c:formatCode>
+                <c:ptCount val="19"/>
+                <c:pt idx="0">
+                  <c:v>132.6</c:v>
+                </c:pt>
+                <c:pt idx="1">
+                  <c:v>134.1</c:v>
+                </c:pt>
+                <c:pt idx="2">
+                  <c:v>139.30000000000001</c:v>
+                </c:pt>
+                <c:pt idx="3">
+                  <c:v>153.30000000000001</c:v>
+                </c:pt>
+                <c:pt idx="4">
+                  <c:v>153.30000000000001</c:v>
+                </c:pt>
+                <c:pt idx="5">
+                  <c:v>158.30000000000001</c:v>
+                </c:pt>
+                <c:pt idx="6">
+                  <c:v>194.2</c:v>
+                </c:pt>
+                <c:pt idx="7">
+                  <c:v>202.3</c:v>
+                </c:pt>
+                <c:pt idx="8">
+                  <c:v>232.7</c:v>
+                </c:pt>
+                <c:pt idx="9">
+                  <c:v>287.7</c:v>
+                </c:pt>
+                <c:pt idx="10">
+                  <c:v>317.10000000000002</c:v>
+                </c:pt>
+                <c:pt idx="11">
+                  <c:v>417.3</c:v>
+                </c:pt>
+                <c:pt idx="12">
+                  <c:v>423.9</c:v>
+                </c:pt>
+                <c:pt idx="13">
+                  <c:v>445.8</c:v>
+                </c:pt>
+                <c:pt idx="14">
+                  <c:v>459.4</c:v>
+                </c:pt>
+                <c:pt idx="15">
+                  <c:v>521.4</c:v>
+                </c:pt>
+                <c:pt idx="16">
+                  <c:v>863</c:v>
+                </c:pt>
+                <c:pt idx="17">
+                  <c:v>1200</c:v>
+                </c:pt>
+                <c:pt idx="18">
+                  <c:v>3754.9</c:v>
+                </c:pt>
+              </c:numCache>
+            </c:numRef>
+          </c:val>
+          <c:extLst>
+            <c:ext xmlns:c16="http://schemas.microsoft.com/office/drawing/2014/chart" uri="{C3380CC4-5D6E-409C-BE32-E72D297353CC}">
+              <c16:uniqueId val="{0000000D-5561-2647-9211-EF93B62BC1E3}"/>
+            </c:ext>
+          </c:extLst>
+        </c:ser>
+        <c:dLbls>
+          <c:showLegendKey val="0"/>
+          <c:showVal val="0"/>
+          <c:showCatName val="0"/>
+          <c:showSerName val="0"/>
+          <c:showPercent val="0"/>
+          <c:showBubbleSize val="0"/>
+        </c:dLbls>
+        <c:gapWidth val="40"/>
+        <c:overlap val="-58"/>
+        <c:axId val="1564342096"/>
+        <c:axId val="1263155472"/>
+      </c:barChart>
+      <c:catAx>
+        <c:axId val="1564342096"/>
+        <c:scaling>
+          <c:orientation val="minMax"/>
+        </c:scaling>
+        <c:delete val="0"/>
+        <c:axPos val="l"/>
+        <c:numFmt formatCode="General" sourceLinked="1"/>
+        <c:majorTickMark val="none"/>
+        <c:minorTickMark val="none"/>
+        <c:tickLblPos val="nextTo"/>
+        <c:spPr>
+          <a:noFill/>
+          <a:ln w="19050" cap="flat" cmpd="sng" algn="ctr">
+            <a:solidFill>
+              <a:schemeClr val="tx1">
+                <a:lumMod val="15000"/>
+                <a:lumOff val="85000"/>
+              </a:schemeClr>
+            </a:solidFill>
+            <a:round/>
+            <a:headEnd type="none" w="sm" len="sm"/>
+            <a:tailEnd type="none" w="sm" len="sm"/>
+          </a:ln>
+          <a:effectLst/>
+        </c:spPr>
+        <c:txPr>
+          <a:bodyPr rot="-60000000" spcFirstLastPara="1" vertOverflow="ellipsis" vert="horz" wrap="square" anchor="ctr" anchorCtr="1"/>
+          <a:lstStyle/>
+          <a:p>
+            <a:pPr>
+              <a:defRPr sz="1400" b="0" i="0" u="none" strike="noStrike" kern="1200" baseline="0">
+                <a:solidFill>
+                  <a:sysClr val="windowText" lastClr="000000"/>
+                </a:solidFill>
+                <a:latin typeface="Times New Roman" panose="02020603050405020304" pitchFamily="18" charset="0"/>
+                <a:ea typeface="+mn-ea"/>
+                <a:cs typeface="Times New Roman" panose="02020603050405020304" pitchFamily="18" charset="0"/>
+              </a:defRPr>
+            </a:pPr>
+            <a:endParaRPr lang="en-CN"/>
+          </a:p>
+        </c:txPr>
+        <c:crossAx val="1263155472"/>
+        <c:crosses val="autoZero"/>
+        <c:auto val="1"/>
+        <c:lblAlgn val="ctr"/>
+        <c:lblOffset val="100"/>
+        <c:noMultiLvlLbl val="0"/>
+      </c:catAx>
+      <c:valAx>
+        <c:axId val="1263155472"/>
+        <c:scaling>
+          <c:orientation val="minMax"/>
+        </c:scaling>
+        <c:delete val="1"/>
+        <c:axPos val="b"/>
+        <c:majorGridlines>
+          <c:spPr>
+            <a:ln w="9525" cap="flat" cmpd="sng" algn="ctr">
+              <a:gradFill>
+                <a:gsLst>
+                  <a:gs pos="99000">
+                    <a:schemeClr val="tx1">
+                      <a:lumMod val="25000"/>
+                      <a:lumOff val="75000"/>
+                    </a:schemeClr>
+                  </a:gs>
+                  <a:gs pos="0">
+                    <a:schemeClr val="tx1">
+                      <a:lumMod val="15000"/>
+                      <a:lumOff val="85000"/>
+                    </a:schemeClr>
+                  </a:gs>
+                </a:gsLst>
+                <a:lin ang="5400000" scaled="0"/>
+              </a:gradFill>
+              <a:prstDash val="dash"/>
+              <a:round/>
+            </a:ln>
+            <a:effectLst/>
+          </c:spPr>
+        </c:majorGridlines>
+        <c:numFmt formatCode="\$0&quot;B&quot;" sourceLinked="1"/>
+        <c:majorTickMark val="none"/>
+        <c:minorTickMark val="none"/>
+        <c:tickLblPos val="nextTo"/>
+        <c:crossAx val="1564342096"/>
+        <c:crosses val="autoZero"/>
+        <c:crossBetween val="between"/>
+      </c:valAx>
+      <c:spPr>
+        <a:noFill/>
+        <a:ln>
+          <a:noFill/>
+        </a:ln>
+        <a:effectLst/>
+      </c:spPr>
+    </c:plotArea>
+    <c:plotVisOnly val="1"/>
+    <c:dispBlanksAs val="gap"/>
+    <c:showDLblsOverMax val="0"/>
+  </c:chart>
+  <c:spPr>
+    <a:noFill/>
+    <a:ln>
+      <a:noFill/>
+    </a:ln>
+    <a:effectLst/>
+  </c:spPr>
+  <c:txPr>
+    <a:bodyPr/>
+    <a:lstStyle/>
+    <a:p>
+      <a:pPr>
+        <a:defRPr sz="1400" b="0">
+          <a:solidFill>
+            <a:sysClr val="windowText" lastClr="000000"/>
           </a:solidFill>
           <a:latin typeface="Times New Roman" panose="02020603050405020304" pitchFamily="18" charset="0"/>
           <a:cs typeface="Times New Roman" panose="02020603050405020304" pitchFamily="18" charset="0"/>
@@ -21966,11 +23259,11 @@
           </cx:tx>
           <cx:spPr>
             <a:solidFill>
-              <a:schemeClr val="accent2"/>
+              <a:schemeClr val="accent1"/>
             </a:solidFill>
             <a:ln>
               <a:solidFill>
-                <a:schemeClr val="accent2">
+                <a:schemeClr val="accent1">
                   <a:lumMod val="50000"/>
                 </a:schemeClr>
               </a:solidFill>
@@ -21991,11 +23284,11 @@
           </cx:tx>
           <cx:spPr>
             <a:solidFill>
-              <a:schemeClr val="accent1"/>
+              <a:srgbClr val="E68109"/>
             </a:solidFill>
             <a:ln>
               <a:solidFill>
-                <a:schemeClr val="accent1">
+                <a:schemeClr val="accent4">
                   <a:lumMod val="50000"/>
                 </a:schemeClr>
               </a:solidFill>
@@ -22281,6 +23574,86 @@
 </file>
 
 <file path=ppt/charts/colors6.xml><?xml version="1.0" encoding="utf-8"?>
+<cs:colorStyle xmlns:cs="http://schemas.microsoft.com/office/drawing/2012/chartStyle" xmlns:a="http://schemas.openxmlformats.org/drawingml/2006/main" meth="cycle" id="10">
+  <a:schemeClr val="accent1"/>
+  <a:schemeClr val="accent2"/>
+  <a:schemeClr val="accent3"/>
+  <a:schemeClr val="accent4"/>
+  <a:schemeClr val="accent5"/>
+  <a:schemeClr val="accent6"/>
+  <cs:variation/>
+  <cs:variation>
+    <a:lumMod val="60000"/>
+  </cs:variation>
+  <cs:variation>
+    <a:lumMod val="80000"/>
+    <a:lumOff val="20000"/>
+  </cs:variation>
+  <cs:variation>
+    <a:lumMod val="80000"/>
+  </cs:variation>
+  <cs:variation>
+    <a:lumMod val="60000"/>
+    <a:lumOff val="40000"/>
+  </cs:variation>
+  <cs:variation>
+    <a:lumMod val="50000"/>
+  </cs:variation>
+  <cs:variation>
+    <a:lumMod val="70000"/>
+    <a:lumOff val="30000"/>
+  </cs:variation>
+  <cs:variation>
+    <a:lumMod val="70000"/>
+  </cs:variation>
+  <cs:variation>
+    <a:lumMod val="50000"/>
+    <a:lumOff val="50000"/>
+  </cs:variation>
+</cs:colorStyle>
+</file>
+
+<file path=ppt/charts/colors7.xml><?xml version="1.0" encoding="utf-8"?>
+<cs:colorStyle xmlns:cs="http://schemas.microsoft.com/office/drawing/2012/chartStyle" xmlns:a="http://schemas.openxmlformats.org/drawingml/2006/main" meth="cycle" id="10">
+  <a:schemeClr val="accent1"/>
+  <a:schemeClr val="accent2"/>
+  <a:schemeClr val="accent3"/>
+  <a:schemeClr val="accent4"/>
+  <a:schemeClr val="accent5"/>
+  <a:schemeClr val="accent6"/>
+  <cs:variation/>
+  <cs:variation>
+    <a:lumMod val="60000"/>
+  </cs:variation>
+  <cs:variation>
+    <a:lumMod val="80000"/>
+    <a:lumOff val="20000"/>
+  </cs:variation>
+  <cs:variation>
+    <a:lumMod val="80000"/>
+  </cs:variation>
+  <cs:variation>
+    <a:lumMod val="60000"/>
+    <a:lumOff val="40000"/>
+  </cs:variation>
+  <cs:variation>
+    <a:lumMod val="50000"/>
+  </cs:variation>
+  <cs:variation>
+    <a:lumMod val="70000"/>
+    <a:lumOff val="30000"/>
+  </cs:variation>
+  <cs:variation>
+    <a:lumMod val="70000"/>
+  </cs:variation>
+  <cs:variation>
+    <a:lumMod val="50000"/>
+    <a:lumOff val="50000"/>
+  </cs:variation>
+</cs:colorStyle>
+</file>
+
+<file path=ppt/charts/colors8.xml><?xml version="1.0" encoding="utf-8"?>
 <cs:colorStyle xmlns:cs="http://schemas.microsoft.com/office/drawing/2012/chartStyle" xmlns:a="http://schemas.openxmlformats.org/drawingml/2006/main" meth="cycle" id="10">
   <a:schemeClr val="accent1"/>
   <a:schemeClr val="accent2"/>
@@ -25380,6 +26753,1106 @@
 </cs:chartStyle>
 </file>
 
+<file path=ppt/charts/style7.xml><?xml version="1.0" encoding="utf-8"?>
+<cs:chartStyle xmlns:cs="http://schemas.microsoft.com/office/drawing/2012/chartStyle" xmlns:a="http://schemas.openxmlformats.org/drawingml/2006/main" id="216">
+  <cs:axisTitle>
+    <cs:lnRef idx="0"/>
+    <cs:fillRef idx="0"/>
+    <cs:effectRef idx="0"/>
+    <cs:fontRef idx="minor">
+      <a:schemeClr val="tx1">
+        <a:lumMod val="65000"/>
+        <a:lumOff val="35000"/>
+      </a:schemeClr>
+    </cs:fontRef>
+    <cs:defRPr sz="1000" kern="1200"/>
+  </cs:axisTitle>
+  <cs:categoryAxis>
+    <cs:lnRef idx="0"/>
+    <cs:fillRef idx="0"/>
+    <cs:effectRef idx="0"/>
+    <cs:fontRef idx="minor">
+      <a:schemeClr val="tx1">
+        <a:lumMod val="65000"/>
+        <a:lumOff val="35000"/>
+      </a:schemeClr>
+    </cs:fontRef>
+    <cs:spPr>
+      <a:ln w="9525" cap="flat" cmpd="sng" algn="ctr">
+        <a:solidFill>
+          <a:schemeClr val="tx1">
+            <a:lumMod val="15000"/>
+            <a:lumOff val="85000"/>
+          </a:schemeClr>
+        </a:solidFill>
+        <a:round/>
+      </a:ln>
+    </cs:spPr>
+    <cs:defRPr sz="900" kern="1200"/>
+  </cs:categoryAxis>
+  <cs:chartArea mods="allowNoFillOverride allowNoLineOverride">
+    <cs:lnRef idx="0"/>
+    <cs:fillRef idx="0"/>
+    <cs:effectRef idx="0"/>
+    <cs:fontRef idx="minor">
+      <a:schemeClr val="tx1"/>
+    </cs:fontRef>
+    <cs:spPr>
+      <a:solidFill>
+        <a:schemeClr val="bg1"/>
+      </a:solidFill>
+      <a:ln w="9525" cap="flat" cmpd="sng" algn="ctr">
+        <a:solidFill>
+          <a:schemeClr val="tx1">
+            <a:lumMod val="15000"/>
+            <a:lumOff val="85000"/>
+          </a:schemeClr>
+        </a:solidFill>
+        <a:round/>
+      </a:ln>
+    </cs:spPr>
+    <cs:defRPr sz="1000" kern="1200"/>
+  </cs:chartArea>
+  <cs:dataLabel>
+    <cs:lnRef idx="0"/>
+    <cs:fillRef idx="0"/>
+    <cs:effectRef idx="0"/>
+    <cs:fontRef idx="minor">
+      <a:schemeClr val="tx1">
+        <a:lumMod val="75000"/>
+        <a:lumOff val="25000"/>
+      </a:schemeClr>
+    </cs:fontRef>
+    <cs:defRPr sz="900" kern="1200"/>
+  </cs:dataLabel>
+  <cs:dataLabelCallout>
+    <cs:lnRef idx="0"/>
+    <cs:fillRef idx="0"/>
+    <cs:effectRef idx="0"/>
+    <cs:fontRef idx="minor">
+      <a:schemeClr val="dk1">
+        <a:lumMod val="65000"/>
+        <a:lumOff val="35000"/>
+      </a:schemeClr>
+    </cs:fontRef>
+    <cs:spPr>
+      <a:solidFill>
+        <a:schemeClr val="lt1"/>
+      </a:solidFill>
+      <a:ln>
+        <a:solidFill>
+          <a:schemeClr val="dk1">
+            <a:lumMod val="25000"/>
+            <a:lumOff val="75000"/>
+          </a:schemeClr>
+        </a:solidFill>
+      </a:ln>
+    </cs:spPr>
+    <cs:defRPr sz="900" kern="1200"/>
+    <cs:bodyPr rot="0" spcFirstLastPara="1" vertOverflow="clip" horzOverflow="clip" vert="horz" wrap="square" lIns="36576" tIns="18288" rIns="36576" bIns="18288" anchor="ctr" anchorCtr="1">
+      <a:spAutoFit/>
+    </cs:bodyPr>
+  </cs:dataLabelCallout>
+  <cs:dataPoint>
+    <cs:lnRef idx="0"/>
+    <cs:fillRef idx="1">
+      <cs:styleClr val="auto"/>
+    </cs:fillRef>
+    <cs:effectRef idx="0"/>
+    <cs:fontRef idx="minor">
+      <a:schemeClr val="tx1"/>
+    </cs:fontRef>
+  </cs:dataPoint>
+  <cs:dataPoint3D>
+    <cs:lnRef idx="0"/>
+    <cs:fillRef idx="1">
+      <cs:styleClr val="auto"/>
+    </cs:fillRef>
+    <cs:effectRef idx="0"/>
+    <cs:fontRef idx="minor">
+      <a:schemeClr val="tx1"/>
+    </cs:fontRef>
+  </cs:dataPoint3D>
+  <cs:dataPointLine>
+    <cs:lnRef idx="0">
+      <cs:styleClr val="auto"/>
+    </cs:lnRef>
+    <cs:fillRef idx="1"/>
+    <cs:effectRef idx="0"/>
+    <cs:fontRef idx="minor">
+      <a:schemeClr val="tx1"/>
+    </cs:fontRef>
+    <cs:spPr>
+      <a:ln w="28575" cap="rnd">
+        <a:solidFill>
+          <a:schemeClr val="phClr"/>
+        </a:solidFill>
+        <a:round/>
+      </a:ln>
+    </cs:spPr>
+  </cs:dataPointLine>
+  <cs:dataPointMarker>
+    <cs:lnRef idx="0">
+      <cs:styleClr val="auto"/>
+    </cs:lnRef>
+    <cs:fillRef idx="1">
+      <cs:styleClr val="auto"/>
+    </cs:fillRef>
+    <cs:effectRef idx="0"/>
+    <cs:fontRef idx="minor">
+      <a:schemeClr val="tx1"/>
+    </cs:fontRef>
+    <cs:spPr>
+      <a:ln w="9525">
+        <a:solidFill>
+          <a:schemeClr val="phClr"/>
+        </a:solidFill>
+      </a:ln>
+    </cs:spPr>
+  </cs:dataPointMarker>
+  <cs:dataPointMarkerLayout symbol="circle" size="5"/>
+  <cs:dataPointWireframe>
+    <cs:lnRef idx="0">
+      <cs:styleClr val="auto"/>
+    </cs:lnRef>
+    <cs:fillRef idx="1"/>
+    <cs:effectRef idx="0"/>
+    <cs:fontRef idx="minor">
+      <a:schemeClr val="tx1"/>
+    </cs:fontRef>
+    <cs:spPr>
+      <a:ln w="9525" cap="rnd">
+        <a:solidFill>
+          <a:schemeClr val="phClr"/>
+        </a:solidFill>
+        <a:round/>
+      </a:ln>
+    </cs:spPr>
+  </cs:dataPointWireframe>
+  <cs:dataTable>
+    <cs:lnRef idx="0"/>
+    <cs:fillRef idx="0"/>
+    <cs:effectRef idx="0"/>
+    <cs:fontRef idx="minor">
+      <a:schemeClr val="tx1">
+        <a:lumMod val="65000"/>
+        <a:lumOff val="35000"/>
+      </a:schemeClr>
+    </cs:fontRef>
+    <cs:spPr>
+      <a:noFill/>
+      <a:ln w="9525" cap="flat" cmpd="sng" algn="ctr">
+        <a:solidFill>
+          <a:schemeClr val="tx1">
+            <a:lumMod val="15000"/>
+            <a:lumOff val="85000"/>
+          </a:schemeClr>
+        </a:solidFill>
+        <a:round/>
+      </a:ln>
+    </cs:spPr>
+    <cs:defRPr sz="900" kern="1200"/>
+  </cs:dataTable>
+  <cs:downBar>
+    <cs:lnRef idx="0"/>
+    <cs:fillRef idx="0"/>
+    <cs:effectRef idx="0"/>
+    <cs:fontRef idx="minor">
+      <a:schemeClr val="tx1"/>
+    </cs:fontRef>
+    <cs:spPr>
+      <a:solidFill>
+        <a:schemeClr val="dk1">
+          <a:lumMod val="75000"/>
+          <a:lumOff val="25000"/>
+        </a:schemeClr>
+      </a:solidFill>
+      <a:ln w="9525" cap="flat" cmpd="sng" algn="ctr">
+        <a:solidFill>
+          <a:schemeClr val="tx1">
+            <a:lumMod val="65000"/>
+            <a:lumOff val="35000"/>
+          </a:schemeClr>
+        </a:solidFill>
+        <a:round/>
+      </a:ln>
+    </cs:spPr>
+  </cs:downBar>
+  <cs:dropLine>
+    <cs:lnRef idx="0"/>
+    <cs:fillRef idx="0"/>
+    <cs:effectRef idx="0"/>
+    <cs:fontRef idx="minor">
+      <a:schemeClr val="tx1"/>
+    </cs:fontRef>
+    <cs:spPr>
+      <a:ln w="9525" cap="flat" cmpd="sng" algn="ctr">
+        <a:solidFill>
+          <a:schemeClr val="tx1">
+            <a:lumMod val="35000"/>
+            <a:lumOff val="65000"/>
+          </a:schemeClr>
+        </a:solidFill>
+        <a:round/>
+      </a:ln>
+    </cs:spPr>
+  </cs:dropLine>
+  <cs:errorBar>
+    <cs:lnRef idx="0"/>
+    <cs:fillRef idx="0"/>
+    <cs:effectRef idx="0"/>
+    <cs:fontRef idx="minor">
+      <a:schemeClr val="tx1"/>
+    </cs:fontRef>
+    <cs:spPr>
+      <a:ln w="9525" cap="flat" cmpd="sng" algn="ctr">
+        <a:solidFill>
+          <a:schemeClr val="tx1">
+            <a:lumMod val="65000"/>
+            <a:lumOff val="35000"/>
+          </a:schemeClr>
+        </a:solidFill>
+        <a:round/>
+      </a:ln>
+    </cs:spPr>
+  </cs:errorBar>
+  <cs:floor>
+    <cs:lnRef idx="0"/>
+    <cs:fillRef idx="0"/>
+    <cs:effectRef idx="0"/>
+    <cs:fontRef idx="minor">
+      <a:schemeClr val="tx1"/>
+    </cs:fontRef>
+    <cs:spPr>
+      <a:noFill/>
+      <a:ln>
+        <a:noFill/>
+      </a:ln>
+    </cs:spPr>
+  </cs:floor>
+  <cs:gridlineMajor>
+    <cs:lnRef idx="0"/>
+    <cs:fillRef idx="0"/>
+    <cs:effectRef idx="0"/>
+    <cs:fontRef idx="minor">
+      <a:schemeClr val="tx1"/>
+    </cs:fontRef>
+    <cs:spPr>
+      <a:ln w="9525" cap="flat" cmpd="sng" algn="ctr">
+        <a:solidFill>
+          <a:schemeClr val="tx1">
+            <a:lumMod val="15000"/>
+            <a:lumOff val="85000"/>
+          </a:schemeClr>
+        </a:solidFill>
+        <a:round/>
+      </a:ln>
+    </cs:spPr>
+  </cs:gridlineMajor>
+  <cs:gridlineMinor>
+    <cs:lnRef idx="0"/>
+    <cs:fillRef idx="0"/>
+    <cs:effectRef idx="0"/>
+    <cs:fontRef idx="minor">
+      <a:schemeClr val="tx1"/>
+    </cs:fontRef>
+    <cs:spPr>
+      <a:ln w="9525" cap="flat" cmpd="sng" algn="ctr">
+        <a:solidFill>
+          <a:schemeClr val="tx1">
+            <a:lumMod val="5000"/>
+            <a:lumOff val="95000"/>
+          </a:schemeClr>
+        </a:solidFill>
+        <a:round/>
+      </a:ln>
+    </cs:spPr>
+  </cs:gridlineMinor>
+  <cs:hiLoLine>
+    <cs:lnRef idx="0"/>
+    <cs:fillRef idx="0"/>
+    <cs:effectRef idx="0"/>
+    <cs:fontRef idx="minor">
+      <a:schemeClr val="tx1"/>
+    </cs:fontRef>
+    <cs:spPr>
+      <a:ln w="9525" cap="flat" cmpd="sng" algn="ctr">
+        <a:solidFill>
+          <a:schemeClr val="tx1">
+            <a:lumMod val="50000"/>
+            <a:lumOff val="50000"/>
+          </a:schemeClr>
+        </a:solidFill>
+        <a:round/>
+      </a:ln>
+    </cs:spPr>
+  </cs:hiLoLine>
+  <cs:leaderLine>
+    <cs:lnRef idx="0"/>
+    <cs:fillRef idx="0"/>
+    <cs:effectRef idx="0"/>
+    <cs:fontRef idx="minor">
+      <a:schemeClr val="tx1"/>
+    </cs:fontRef>
+    <cs:spPr>
+      <a:ln w="9525" cap="flat" cmpd="sng" algn="ctr">
+        <a:solidFill>
+          <a:schemeClr val="tx1">
+            <a:lumMod val="35000"/>
+            <a:lumOff val="65000"/>
+          </a:schemeClr>
+        </a:solidFill>
+        <a:round/>
+      </a:ln>
+    </cs:spPr>
+  </cs:leaderLine>
+  <cs:legend>
+    <cs:lnRef idx="0"/>
+    <cs:fillRef idx="0"/>
+    <cs:effectRef idx="0"/>
+    <cs:fontRef idx="minor">
+      <a:schemeClr val="tx1">
+        <a:lumMod val="65000"/>
+        <a:lumOff val="35000"/>
+      </a:schemeClr>
+    </cs:fontRef>
+    <cs:defRPr sz="900" kern="1200"/>
+  </cs:legend>
+  <cs:plotArea mods="allowNoFillOverride allowNoLineOverride">
+    <cs:lnRef idx="0"/>
+    <cs:fillRef idx="0"/>
+    <cs:effectRef idx="0"/>
+    <cs:fontRef idx="minor">
+      <a:schemeClr val="tx1"/>
+    </cs:fontRef>
+  </cs:plotArea>
+  <cs:plotArea3D mods="allowNoFillOverride allowNoLineOverride">
+    <cs:lnRef idx="0"/>
+    <cs:fillRef idx="0"/>
+    <cs:effectRef idx="0"/>
+    <cs:fontRef idx="minor">
+      <a:schemeClr val="tx1"/>
+    </cs:fontRef>
+  </cs:plotArea3D>
+  <cs:seriesAxis>
+    <cs:lnRef idx="0"/>
+    <cs:fillRef idx="0"/>
+    <cs:effectRef idx="0"/>
+    <cs:fontRef idx="minor">
+      <a:schemeClr val="tx1">
+        <a:lumMod val="65000"/>
+        <a:lumOff val="35000"/>
+      </a:schemeClr>
+    </cs:fontRef>
+    <cs:defRPr sz="900" kern="1200"/>
+  </cs:seriesAxis>
+  <cs:seriesLine>
+    <cs:lnRef idx="0"/>
+    <cs:fillRef idx="0"/>
+    <cs:effectRef idx="0"/>
+    <cs:fontRef idx="minor">
+      <a:schemeClr val="tx1"/>
+    </cs:fontRef>
+    <cs:spPr>
+      <a:ln w="9525" cap="flat" cmpd="sng" algn="ctr">
+        <a:solidFill>
+          <a:schemeClr val="tx1">
+            <a:lumMod val="35000"/>
+            <a:lumOff val="65000"/>
+          </a:schemeClr>
+        </a:solidFill>
+        <a:round/>
+      </a:ln>
+    </cs:spPr>
+  </cs:seriesLine>
+  <cs:title>
+    <cs:lnRef idx="0"/>
+    <cs:fillRef idx="0"/>
+    <cs:effectRef idx="0"/>
+    <cs:fontRef idx="minor">
+      <a:schemeClr val="tx1">
+        <a:lumMod val="65000"/>
+        <a:lumOff val="35000"/>
+      </a:schemeClr>
+    </cs:fontRef>
+    <cs:defRPr sz="1400" b="0" kern="1200" spc="0" baseline="0"/>
+  </cs:title>
+  <cs:trendline>
+    <cs:lnRef idx="0">
+      <cs:styleClr val="auto"/>
+    </cs:lnRef>
+    <cs:fillRef idx="0"/>
+    <cs:effectRef idx="0"/>
+    <cs:fontRef idx="minor">
+      <a:schemeClr val="tx1"/>
+    </cs:fontRef>
+    <cs:spPr>
+      <a:ln w="19050" cap="rnd">
+        <a:solidFill>
+          <a:schemeClr val="phClr"/>
+        </a:solidFill>
+        <a:prstDash val="sysDot"/>
+      </a:ln>
+    </cs:spPr>
+  </cs:trendline>
+  <cs:trendlineLabel>
+    <cs:lnRef idx="0"/>
+    <cs:fillRef idx="0"/>
+    <cs:effectRef idx="0"/>
+    <cs:fontRef idx="minor">
+      <a:schemeClr val="tx1">
+        <a:lumMod val="65000"/>
+        <a:lumOff val="35000"/>
+      </a:schemeClr>
+    </cs:fontRef>
+    <cs:defRPr sz="900" kern="1200"/>
+  </cs:trendlineLabel>
+  <cs:upBar>
+    <cs:lnRef idx="0"/>
+    <cs:fillRef idx="0"/>
+    <cs:effectRef idx="0"/>
+    <cs:fontRef idx="minor">
+      <a:schemeClr val="tx1"/>
+    </cs:fontRef>
+    <cs:spPr>
+      <a:solidFill>
+        <a:schemeClr val="lt1"/>
+      </a:solidFill>
+      <a:ln w="9525" cap="flat" cmpd="sng" algn="ctr">
+        <a:solidFill>
+          <a:schemeClr val="tx1">
+            <a:lumMod val="65000"/>
+            <a:lumOff val="35000"/>
+          </a:schemeClr>
+        </a:solidFill>
+        <a:round/>
+      </a:ln>
+    </cs:spPr>
+  </cs:upBar>
+  <cs:valueAxis>
+    <cs:lnRef idx="0"/>
+    <cs:fillRef idx="0"/>
+    <cs:effectRef idx="0"/>
+    <cs:fontRef idx="minor">
+      <a:schemeClr val="tx1">
+        <a:lumMod val="65000"/>
+        <a:lumOff val="35000"/>
+      </a:schemeClr>
+    </cs:fontRef>
+    <cs:defRPr sz="900" kern="1200"/>
+  </cs:valueAxis>
+  <cs:wall>
+    <cs:lnRef idx="0"/>
+    <cs:fillRef idx="0"/>
+    <cs:effectRef idx="0"/>
+    <cs:fontRef idx="minor">
+      <a:schemeClr val="tx1"/>
+    </cs:fontRef>
+    <cs:spPr>
+      <a:noFill/>
+      <a:ln>
+        <a:noFill/>
+      </a:ln>
+    </cs:spPr>
+  </cs:wall>
+</cs:chartStyle>
+</file>
+
+<file path=ppt/charts/style8.xml><?xml version="1.0" encoding="utf-8"?>
+<cs:chartStyle xmlns:cs="http://schemas.microsoft.com/office/drawing/2012/chartStyle" xmlns:a="http://schemas.openxmlformats.org/drawingml/2006/main" id="223">
+  <cs:axisTitle>
+    <cs:lnRef idx="0"/>
+    <cs:fillRef idx="0"/>
+    <cs:effectRef idx="0"/>
+    <cs:fontRef idx="minor">
+      <a:schemeClr val="tx1">
+        <a:lumMod val="65000"/>
+        <a:lumOff val="35000"/>
+      </a:schemeClr>
+    </cs:fontRef>
+    <cs:defRPr sz="900" kern="1200" cap="all"/>
+  </cs:axisTitle>
+  <cs:categoryAxis>
+    <cs:lnRef idx="0"/>
+    <cs:fillRef idx="0"/>
+    <cs:effectRef idx="0"/>
+    <cs:fontRef idx="minor">
+      <a:schemeClr val="tx1">
+        <a:lumMod val="65000"/>
+        <a:lumOff val="35000"/>
+      </a:schemeClr>
+    </cs:fontRef>
+    <cs:spPr>
+      <a:ln w="19050" cap="flat" cmpd="sng" algn="ctr">
+        <a:solidFill>
+          <a:schemeClr val="tx1">
+            <a:lumMod val="15000"/>
+            <a:lumOff val="85000"/>
+          </a:schemeClr>
+        </a:solidFill>
+        <a:round/>
+        <a:headEnd type="none" w="sm" len="sm"/>
+        <a:tailEnd type="none" w="sm" len="sm"/>
+      </a:ln>
+    </cs:spPr>
+    <cs:defRPr sz="900" kern="1200"/>
+  </cs:categoryAxis>
+  <cs:chartArea mods="allowNoFillOverride allowNoLineOverride">
+    <cs:lnRef idx="0"/>
+    <cs:fillRef idx="0"/>
+    <cs:effectRef idx="0"/>
+    <cs:fontRef idx="minor">
+      <a:schemeClr val="dk1"/>
+    </cs:fontRef>
+    <cs:spPr>
+      <a:solidFill>
+        <a:schemeClr val="bg1"/>
+      </a:solidFill>
+      <a:ln w="9525" cap="flat" cmpd="sng" algn="ctr">
+        <a:solidFill>
+          <a:schemeClr val="tx1">
+            <a:lumMod val="15000"/>
+            <a:lumOff val="85000"/>
+          </a:schemeClr>
+        </a:solidFill>
+        <a:round/>
+      </a:ln>
+    </cs:spPr>
+    <cs:defRPr sz="900" kern="1200"/>
+  </cs:chartArea>
+  <cs:dataLabel>
+    <cs:lnRef idx="0"/>
+    <cs:fillRef idx="0"/>
+    <cs:effectRef idx="0"/>
+    <cs:fontRef idx="minor">
+      <a:schemeClr val="tx1">
+        <a:lumMod val="75000"/>
+        <a:lumOff val="25000"/>
+      </a:schemeClr>
+    </cs:fontRef>
+    <cs:defRPr sz="900" kern="1200"/>
+  </cs:dataLabel>
+  <cs:dataLabelCallout>
+    <cs:lnRef idx="0"/>
+    <cs:fillRef idx="0"/>
+    <cs:effectRef idx="0"/>
+    <cs:fontRef idx="minor">
+      <a:schemeClr val="bg1"/>
+    </cs:fontRef>
+    <cs:spPr>
+      <a:solidFill>
+        <a:schemeClr val="tx1">
+          <a:lumMod val="50000"/>
+          <a:lumOff val="50000"/>
+        </a:schemeClr>
+      </a:solidFill>
+    </cs:spPr>
+    <cs:defRPr sz="900" kern="1200"/>
+    <cs:bodyPr rot="0" spcFirstLastPara="1" vertOverflow="clip" horzOverflow="clip" vert="horz" wrap="square" lIns="36576" tIns="18288" rIns="36576" bIns="18288" anchor="ctr" anchorCtr="1">
+      <a:spAutoFit/>
+    </cs:bodyPr>
+  </cs:dataLabelCallout>
+  <cs:dataPoint>
+    <cs:lnRef idx="0"/>
+    <cs:fillRef idx="0">
+      <cs:styleClr val="auto"/>
+    </cs:fillRef>
+    <cs:effectRef idx="0"/>
+    <cs:fontRef idx="minor">
+      <a:schemeClr val="dk1"/>
+    </cs:fontRef>
+    <cs:spPr>
+      <a:gradFill flip="none" rotWithShape="1">
+        <a:gsLst>
+          <a:gs pos="0">
+            <a:schemeClr val="phClr"/>
+          </a:gs>
+          <a:gs pos="75000">
+            <a:schemeClr val="phClr">
+              <a:lumMod val="60000"/>
+              <a:lumOff val="40000"/>
+            </a:schemeClr>
+          </a:gs>
+          <a:gs pos="51000">
+            <a:schemeClr val="phClr">
+              <a:alpha val="75000"/>
+            </a:schemeClr>
+          </a:gs>
+          <a:gs pos="100000">
+            <a:schemeClr val="phClr">
+              <a:lumMod val="20000"/>
+              <a:lumOff val="80000"/>
+              <a:alpha val="15000"/>
+            </a:schemeClr>
+          </a:gs>
+        </a:gsLst>
+        <a:lin ang="10800000" scaled="1"/>
+        <a:tileRect/>
+      </a:gradFill>
+    </cs:spPr>
+  </cs:dataPoint>
+  <cs:dataPoint3D>
+    <cs:lnRef idx="0"/>
+    <cs:fillRef idx="0">
+      <cs:styleClr val="auto"/>
+    </cs:fillRef>
+    <cs:effectRef idx="0"/>
+    <cs:fontRef idx="minor">
+      <a:schemeClr val="dk1"/>
+    </cs:fontRef>
+    <cs:spPr>
+      <a:gradFill flip="none" rotWithShape="1">
+        <a:gsLst>
+          <a:gs pos="0">
+            <a:schemeClr val="phClr"/>
+          </a:gs>
+          <a:gs pos="75000">
+            <a:schemeClr val="phClr">
+              <a:lumMod val="60000"/>
+              <a:lumOff val="40000"/>
+            </a:schemeClr>
+          </a:gs>
+          <a:gs pos="51000">
+            <a:schemeClr val="phClr">
+              <a:alpha val="75000"/>
+            </a:schemeClr>
+          </a:gs>
+          <a:gs pos="100000">
+            <a:schemeClr val="phClr">
+              <a:lumMod val="20000"/>
+              <a:lumOff val="80000"/>
+              <a:alpha val="15000"/>
+            </a:schemeClr>
+          </a:gs>
+        </a:gsLst>
+        <a:lin ang="10800000" scaled="1"/>
+        <a:tileRect/>
+      </a:gradFill>
+    </cs:spPr>
+  </cs:dataPoint3D>
+  <cs:dataPointLine>
+    <cs:lnRef idx="0">
+      <cs:styleClr val="auto"/>
+    </cs:lnRef>
+    <cs:fillRef idx="0"/>
+    <cs:effectRef idx="0"/>
+    <cs:fontRef idx="minor">
+      <a:schemeClr val="dk1"/>
+    </cs:fontRef>
+    <cs:spPr>
+      <a:ln w="28575" cap="rnd">
+        <a:solidFill>
+          <a:schemeClr val="phClr"/>
+        </a:solidFill>
+        <a:round/>
+      </a:ln>
+    </cs:spPr>
+  </cs:dataPointLine>
+  <cs:dataPointMarker>
+    <cs:lnRef idx="0">
+      <cs:styleClr val="auto"/>
+    </cs:lnRef>
+    <cs:fillRef idx="0">
+      <cs:styleClr val="auto"/>
+    </cs:fillRef>
+    <cs:effectRef idx="0"/>
+    <cs:fontRef idx="minor">
+      <a:schemeClr val="dk1"/>
+    </cs:fontRef>
+    <cs:spPr>
+      <a:gradFill>
+        <a:gsLst>
+          <a:gs pos="0">
+            <a:schemeClr val="phClr"/>
+          </a:gs>
+          <a:gs pos="46000">
+            <a:schemeClr val="phClr"/>
+          </a:gs>
+          <a:gs pos="100000">
+            <a:schemeClr val="phClr">
+              <a:lumMod val="20000"/>
+              <a:lumOff val="80000"/>
+              <a:alpha val="0"/>
+            </a:schemeClr>
+          </a:gs>
+        </a:gsLst>
+        <a:path path="circle">
+          <a:fillToRect l="50000" t="-80000" r="50000" b="180000"/>
+        </a:path>
+      </a:gradFill>
+      <a:ln w="9525" cap="flat" cmpd="sng" algn="ctr">
+        <a:solidFill>
+          <a:schemeClr val="phClr">
+            <a:shade val="95000"/>
+          </a:schemeClr>
+        </a:solidFill>
+        <a:round/>
+      </a:ln>
+    </cs:spPr>
+  </cs:dataPointMarker>
+  <cs:dataPointMarkerLayout symbol="circle" size="6"/>
+  <cs:dataPointWireframe>
+    <cs:lnRef idx="0">
+      <cs:styleClr val="auto"/>
+    </cs:lnRef>
+    <cs:fillRef idx="0"/>
+    <cs:effectRef idx="0"/>
+    <cs:fontRef idx="minor">
+      <a:schemeClr val="dk1"/>
+    </cs:fontRef>
+    <cs:spPr>
+      <a:ln w="9525" cap="rnd">
+        <a:solidFill>
+          <a:schemeClr val="phClr"/>
+        </a:solidFill>
+        <a:round/>
+      </a:ln>
+    </cs:spPr>
+  </cs:dataPointWireframe>
+  <cs:dataTable>
+    <cs:lnRef idx="0"/>
+    <cs:fillRef idx="0"/>
+    <cs:effectRef idx="0"/>
+    <cs:fontRef idx="minor">
+      <a:schemeClr val="tx1">
+        <a:lumMod val="65000"/>
+        <a:lumOff val="35000"/>
+      </a:schemeClr>
+    </cs:fontRef>
+    <cs:spPr>
+      <a:ln w="9525">
+        <a:solidFill>
+          <a:schemeClr val="tx1">
+            <a:lumMod val="15000"/>
+            <a:lumOff val="85000"/>
+          </a:schemeClr>
+        </a:solidFill>
+      </a:ln>
+    </cs:spPr>
+    <cs:defRPr sz="900" kern="1200"/>
+  </cs:dataTable>
+  <cs:downBar>
+    <cs:lnRef idx="0"/>
+    <cs:fillRef idx="0"/>
+    <cs:effectRef idx="0"/>
+    <cs:fontRef idx="minor">
+      <a:schemeClr val="dk1"/>
+    </cs:fontRef>
+    <cs:spPr>
+      <a:solidFill>
+        <a:schemeClr val="dk1">
+          <a:lumMod val="75000"/>
+          <a:lumOff val="25000"/>
+        </a:schemeClr>
+      </a:solidFill>
+      <a:ln w="9525">
+        <a:solidFill>
+          <a:schemeClr val="tx1">
+            <a:lumMod val="65000"/>
+            <a:lumOff val="35000"/>
+          </a:schemeClr>
+        </a:solidFill>
+      </a:ln>
+    </cs:spPr>
+  </cs:downBar>
+  <cs:dropLine>
+    <cs:lnRef idx="0"/>
+    <cs:fillRef idx="0"/>
+    <cs:effectRef idx="0"/>
+    <cs:fontRef idx="minor">
+      <a:schemeClr val="dk1"/>
+    </cs:fontRef>
+    <cs:spPr>
+      <a:ln w="9525">
+        <a:solidFill>
+          <a:schemeClr val="tx1">
+            <a:lumMod val="35000"/>
+            <a:lumOff val="65000"/>
+          </a:schemeClr>
+        </a:solidFill>
+      </a:ln>
+    </cs:spPr>
+  </cs:dropLine>
+  <cs:errorBar>
+    <cs:lnRef idx="0"/>
+    <cs:fillRef idx="0"/>
+    <cs:effectRef idx="0"/>
+    <cs:fontRef idx="minor">
+      <a:schemeClr val="dk1"/>
+    </cs:fontRef>
+    <cs:spPr>
+      <a:ln w="9525" cap="flat" cmpd="sng" algn="ctr">
+        <a:solidFill>
+          <a:schemeClr val="tx1">
+            <a:lumMod val="65000"/>
+            <a:lumOff val="35000"/>
+          </a:schemeClr>
+        </a:solidFill>
+        <a:round/>
+      </a:ln>
+    </cs:spPr>
+  </cs:errorBar>
+  <cs:floor>
+    <cs:lnRef idx="0"/>
+    <cs:fillRef idx="0"/>
+    <cs:effectRef idx="0"/>
+    <cs:fontRef idx="minor">
+      <a:schemeClr val="dk1"/>
+    </cs:fontRef>
+  </cs:floor>
+  <cs:gridlineMajor>
+    <cs:lnRef idx="0"/>
+    <cs:fillRef idx="0"/>
+    <cs:effectRef idx="0"/>
+    <cs:fontRef idx="minor">
+      <a:schemeClr val="dk1"/>
+    </cs:fontRef>
+    <cs:spPr>
+      <a:ln w="9525" cap="flat" cmpd="sng" algn="ctr">
+        <a:gradFill>
+          <a:gsLst>
+            <a:gs pos="99000">
+              <a:schemeClr val="tx1">
+                <a:lumMod val="25000"/>
+                <a:lumOff val="75000"/>
+              </a:schemeClr>
+            </a:gs>
+            <a:gs pos="0">
+              <a:schemeClr val="tx1">
+                <a:lumMod val="15000"/>
+                <a:lumOff val="85000"/>
+              </a:schemeClr>
+            </a:gs>
+          </a:gsLst>
+          <a:lin ang="5400000" scaled="0"/>
+        </a:gradFill>
+        <a:round/>
+      </a:ln>
+    </cs:spPr>
+  </cs:gridlineMajor>
+  <cs:gridlineMinor>
+    <cs:lnRef idx="0"/>
+    <cs:fillRef idx="0"/>
+    <cs:effectRef idx="0"/>
+    <cs:fontRef idx="minor">
+      <a:schemeClr val="dk1"/>
+    </cs:fontRef>
+    <cs:spPr>
+      <a:ln w="9525" cap="flat" cmpd="sng" algn="ctr">
+        <a:gradFill>
+          <a:gsLst>
+            <a:gs pos="100000">
+              <a:schemeClr val="tx1">
+                <a:lumMod val="15000"/>
+                <a:lumOff val="85000"/>
+              </a:schemeClr>
+            </a:gs>
+            <a:gs pos="0">
+              <a:schemeClr val="tx1">
+                <a:lumMod val="5000"/>
+                <a:lumOff val="95000"/>
+              </a:schemeClr>
+            </a:gs>
+          </a:gsLst>
+          <a:lin ang="5400000" scaled="0"/>
+        </a:gradFill>
+        <a:round/>
+      </a:ln>
+    </cs:spPr>
+  </cs:gridlineMinor>
+  <cs:hiLoLine>
+    <cs:lnRef idx="0"/>
+    <cs:fillRef idx="0"/>
+    <cs:effectRef idx="0"/>
+    <cs:fontRef idx="minor">
+      <a:schemeClr val="dk1"/>
+    </cs:fontRef>
+    <cs:spPr>
+      <a:ln w="9525">
+        <a:solidFill>
+          <a:schemeClr val="tx1">
+            <a:lumMod val="50000"/>
+            <a:lumOff val="50000"/>
+          </a:schemeClr>
+        </a:solidFill>
+      </a:ln>
+    </cs:spPr>
+  </cs:hiLoLine>
+  <cs:leaderLine>
+    <cs:lnRef idx="0"/>
+    <cs:fillRef idx="0"/>
+    <cs:effectRef idx="0"/>
+    <cs:fontRef idx="minor">
+      <a:schemeClr val="dk1"/>
+    </cs:fontRef>
+    <cs:spPr>
+      <a:ln w="9525">
+        <a:solidFill>
+          <a:schemeClr val="tx1">
+            <a:lumMod val="35000"/>
+            <a:lumOff val="65000"/>
+          </a:schemeClr>
+        </a:solidFill>
+      </a:ln>
+    </cs:spPr>
+  </cs:leaderLine>
+  <cs:legend>
+    <cs:lnRef idx="0"/>
+    <cs:fillRef idx="0"/>
+    <cs:effectRef idx="0"/>
+    <cs:fontRef idx="minor">
+      <a:schemeClr val="tx1">
+        <a:lumMod val="65000"/>
+        <a:lumOff val="35000"/>
+      </a:schemeClr>
+    </cs:fontRef>
+    <cs:defRPr sz="900" kern="1200"/>
+  </cs:legend>
+  <cs:plotArea mods="allowNoFillOverride allowNoLineOverride">
+    <cs:lnRef idx="0"/>
+    <cs:fillRef idx="0"/>
+    <cs:effectRef idx="0"/>
+    <cs:fontRef idx="minor">
+      <a:schemeClr val="dk1"/>
+    </cs:fontRef>
+  </cs:plotArea>
+  <cs:plotArea3D mods="allowNoFillOverride allowNoLineOverride">
+    <cs:lnRef idx="0"/>
+    <cs:fillRef idx="0"/>
+    <cs:effectRef idx="0"/>
+    <cs:fontRef idx="minor">
+      <a:schemeClr val="dk1"/>
+    </cs:fontRef>
+  </cs:plotArea3D>
+  <cs:seriesAxis>
+    <cs:lnRef idx="0"/>
+    <cs:fillRef idx="0"/>
+    <cs:effectRef idx="0"/>
+    <cs:fontRef idx="minor">
+      <a:schemeClr val="tx1">
+        <a:lumMod val="65000"/>
+        <a:lumOff val="35000"/>
+      </a:schemeClr>
+    </cs:fontRef>
+    <cs:spPr>
+      <a:ln w="9525" cap="flat" cmpd="sng" algn="ctr">
+        <a:solidFill>
+          <a:schemeClr val="tx1">
+            <a:lumMod val="15000"/>
+            <a:lumOff val="85000"/>
+          </a:schemeClr>
+        </a:solidFill>
+        <a:round/>
+        <a:headEnd type="none" w="sm" len="sm"/>
+        <a:tailEnd type="none" w="sm" len="sm"/>
+      </a:ln>
+    </cs:spPr>
+    <cs:defRPr sz="900" kern="1200"/>
+  </cs:seriesAxis>
+  <cs:seriesLine>
+    <cs:lnRef idx="0"/>
+    <cs:fillRef idx="0"/>
+    <cs:effectRef idx="0"/>
+    <cs:fontRef idx="minor">
+      <a:schemeClr val="dk1"/>
+    </cs:fontRef>
+    <cs:spPr>
+      <a:ln w="9525">
+        <a:solidFill>
+          <a:schemeClr val="tx1">
+            <a:lumMod val="35000"/>
+            <a:lumOff val="65000"/>
+          </a:schemeClr>
+        </a:solidFill>
+        <a:round/>
+      </a:ln>
+    </cs:spPr>
+  </cs:seriesLine>
+  <cs:title>
+    <cs:lnRef idx="0"/>
+    <cs:fillRef idx="0"/>
+    <cs:effectRef idx="0"/>
+    <cs:fontRef idx="minor">
+      <a:schemeClr val="tx1">
+        <a:lumMod val="65000"/>
+        <a:lumOff val="35000"/>
+      </a:schemeClr>
+    </cs:fontRef>
+    <cs:defRPr sz="1800" b="1" kern="1200" cap="all" spc="50" baseline="0"/>
+  </cs:title>
+  <cs:trendline>
+    <cs:lnRef idx="0">
+      <cs:styleClr val="auto"/>
+    </cs:lnRef>
+    <cs:fillRef idx="0"/>
+    <cs:effectRef idx="0"/>
+    <cs:fontRef idx="minor">
+      <a:schemeClr val="dk1"/>
+    </cs:fontRef>
+    <cs:spPr>
+      <a:ln w="9525" cap="rnd">
+        <a:solidFill>
+          <a:schemeClr val="phClr"/>
+        </a:solidFill>
+      </a:ln>
+    </cs:spPr>
+  </cs:trendline>
+  <cs:trendlineLabel>
+    <cs:lnRef idx="0"/>
+    <cs:fillRef idx="0"/>
+    <cs:effectRef idx="0"/>
+    <cs:fontRef idx="minor">
+      <a:schemeClr val="tx1">
+        <a:lumMod val="65000"/>
+        <a:lumOff val="35000"/>
+      </a:schemeClr>
+    </cs:fontRef>
+    <cs:defRPr sz="900" kern="1200"/>
+  </cs:trendlineLabel>
+  <cs:upBar>
+    <cs:lnRef idx="0"/>
+    <cs:fillRef idx="0"/>
+    <cs:effectRef idx="0"/>
+    <cs:fontRef idx="minor">
+      <a:schemeClr val="dk1"/>
+    </cs:fontRef>
+    <cs:spPr>
+      <a:solidFill>
+        <a:schemeClr val="lt1"/>
+      </a:solidFill>
+      <a:ln w="9525">
+        <a:solidFill>
+          <a:schemeClr val="tx1">
+            <a:lumMod val="65000"/>
+            <a:lumOff val="35000"/>
+          </a:schemeClr>
+        </a:solidFill>
+      </a:ln>
+    </cs:spPr>
+  </cs:upBar>
+  <cs:valueAxis>
+    <cs:lnRef idx="0"/>
+    <cs:fillRef idx="0"/>
+    <cs:effectRef idx="0"/>
+    <cs:fontRef idx="minor">
+      <a:schemeClr val="tx1">
+        <a:lumMod val="65000"/>
+        <a:lumOff val="35000"/>
+      </a:schemeClr>
+    </cs:fontRef>
+    <cs:defRPr sz="900" kern="1200"/>
+  </cs:valueAxis>
+  <cs:wall>
+    <cs:lnRef idx="0"/>
+    <cs:fillRef idx="0"/>
+    <cs:effectRef idx="0"/>
+    <cs:fontRef idx="minor">
+      <a:schemeClr val="dk1"/>
+    </cs:fontRef>
+  </cs:wall>
+</cs:chartStyle>
+</file>
+
 <file path=ppt/notesMasters/notesMaster1.xml><?xml version="1.0" encoding="utf-8"?>
 <p:notesMaster xmlns:a="http://schemas.openxmlformats.org/drawingml/2006/main" xmlns:r="http://schemas.openxmlformats.org/officeDocument/2006/relationships" xmlns:p="http://schemas.openxmlformats.org/presentationml/2006/main">
   <p:cSld>
@@ -25462,7 +27935,7 @@
           <a:p>
             <a:fld id="{EA8D938A-EB1D-DF44-973E-DA2B9D44EF7D}" type="datetimeFigureOut">
               <a:rPr lang="en-CN" smtClean="0"/>
-              <a:t>2025/1/8</a:t>
+              <a:t>2025/1/10</a:t>
             </a:fld>
             <a:endParaRPr lang="en-CN"/>
           </a:p>
@@ -25963,7 +28436,7 @@
           <a:p>
             <a:fld id="{C0F2A1D6-A8BB-8049-9211-26FB059DAFA7}" type="datetimeFigureOut">
               <a:rPr lang="en-CN" smtClean="0"/>
-              <a:t>2025/1/8</a:t>
+              <a:t>2025/1/10</a:t>
             </a:fld>
             <a:endParaRPr lang="en-CN"/>
           </a:p>
@@ -26163,7 +28636,7 @@
           <a:p>
             <a:fld id="{C0F2A1D6-A8BB-8049-9211-26FB059DAFA7}" type="datetimeFigureOut">
               <a:rPr lang="en-CN" smtClean="0"/>
-              <a:t>2025/1/8</a:t>
+              <a:t>2025/1/10</a:t>
             </a:fld>
             <a:endParaRPr lang="en-CN"/>
           </a:p>
@@ -26373,7 +28846,7 @@
           <a:p>
             <a:fld id="{C0F2A1D6-A8BB-8049-9211-26FB059DAFA7}" type="datetimeFigureOut">
               <a:rPr lang="en-CN" smtClean="0"/>
-              <a:t>2025/1/8</a:t>
+              <a:t>2025/1/10</a:t>
             </a:fld>
             <a:endParaRPr lang="en-CN"/>
           </a:p>
@@ -26573,7 +29046,7 @@
           <a:p>
             <a:fld id="{C0F2A1D6-A8BB-8049-9211-26FB059DAFA7}" type="datetimeFigureOut">
               <a:rPr lang="en-CN" smtClean="0"/>
-              <a:t>2025/1/8</a:t>
+              <a:t>2025/1/10</a:t>
             </a:fld>
             <a:endParaRPr lang="en-CN"/>
           </a:p>
@@ -26849,7 +29322,7 @@
           <a:p>
             <a:fld id="{C0F2A1D6-A8BB-8049-9211-26FB059DAFA7}" type="datetimeFigureOut">
               <a:rPr lang="en-CN" smtClean="0"/>
-              <a:t>2025/1/8</a:t>
+              <a:t>2025/1/10</a:t>
             </a:fld>
             <a:endParaRPr lang="en-CN"/>
           </a:p>
@@ -27117,7 +29590,7 @@
           <a:p>
             <a:fld id="{C0F2A1D6-A8BB-8049-9211-26FB059DAFA7}" type="datetimeFigureOut">
               <a:rPr lang="en-CN" smtClean="0"/>
-              <a:t>2025/1/8</a:t>
+              <a:t>2025/1/10</a:t>
             </a:fld>
             <a:endParaRPr lang="en-CN"/>
           </a:p>
@@ -27532,7 +30005,7 @@
           <a:p>
             <a:fld id="{C0F2A1D6-A8BB-8049-9211-26FB059DAFA7}" type="datetimeFigureOut">
               <a:rPr lang="en-CN" smtClean="0"/>
-              <a:t>2025/1/8</a:t>
+              <a:t>2025/1/10</a:t>
             </a:fld>
             <a:endParaRPr lang="en-CN"/>
           </a:p>
@@ -27674,7 +30147,7 @@
           <a:p>
             <a:fld id="{C0F2A1D6-A8BB-8049-9211-26FB059DAFA7}" type="datetimeFigureOut">
               <a:rPr lang="en-CN" smtClean="0"/>
-              <a:t>2025/1/8</a:t>
+              <a:t>2025/1/10</a:t>
             </a:fld>
             <a:endParaRPr lang="en-CN"/>
           </a:p>
@@ -27787,7 +30260,7 @@
           <a:p>
             <a:fld id="{C0F2A1D6-A8BB-8049-9211-26FB059DAFA7}" type="datetimeFigureOut">
               <a:rPr lang="en-CN" smtClean="0"/>
-              <a:t>2025/1/8</a:t>
+              <a:t>2025/1/10</a:t>
             </a:fld>
             <a:endParaRPr lang="en-CN"/>
           </a:p>
@@ -28100,7 +30573,7 @@
           <a:p>
             <a:fld id="{C0F2A1D6-A8BB-8049-9211-26FB059DAFA7}" type="datetimeFigureOut">
               <a:rPr lang="en-CN" smtClean="0"/>
-              <a:t>2025/1/8</a:t>
+              <a:t>2025/1/10</a:t>
             </a:fld>
             <a:endParaRPr lang="en-CN"/>
           </a:p>
@@ -28389,7 +30862,7 @@
           <a:p>
             <a:fld id="{C0F2A1D6-A8BB-8049-9211-26FB059DAFA7}" type="datetimeFigureOut">
               <a:rPr lang="en-CN" smtClean="0"/>
-              <a:t>2025/1/8</a:t>
+              <a:t>2025/1/10</a:t>
             </a:fld>
             <a:endParaRPr lang="en-CN"/>
           </a:p>
@@ -28632,7 +31105,7 @@
           <a:p>
             <a:fld id="{C0F2A1D6-A8BB-8049-9211-26FB059DAFA7}" type="datetimeFigureOut">
               <a:rPr lang="en-CN" smtClean="0"/>
-              <a:t>2025/1/8</a:t>
+              <a:t>2025/1/10</a:t>
             </a:fld>
             <a:endParaRPr lang="en-CN"/>
           </a:p>
@@ -29161,7 +31634,7 @@
             <p:nvPr>
               <p:extLst>
                 <p:ext uri="{D42A27DB-BD31-4B8C-83A1-F6EECF244321}">
-                  <p14:modId xmlns:p14="http://schemas.microsoft.com/office/powerpoint/2010/main" val="1056536815"/>
+                  <p14:modId xmlns:p14="http://schemas.microsoft.com/office/powerpoint/2010/main" val="2566686979"/>
                 </p:ext>
               </p:extLst>
             </p:nvPr>
@@ -29221,8 +31694,8 @@
         </p:nvSpPr>
         <p:spPr>
           <a:xfrm>
-            <a:off x="1385102" y="296408"/>
-            <a:ext cx="9421793" cy="6265184"/>
+            <a:off x="2048105" y="429322"/>
+            <a:ext cx="8095786" cy="5999356"/>
           </a:xfrm>
           <a:prstGeom prst="roundRect">
             <a:avLst>
@@ -29264,753 +31737,975 @@
           </a:p>
         </p:txBody>
       </p:sp>
-      <p:grpSp>
-        <p:nvGrpSpPr>
-          <p:cNvPr id="27" name="Group 26">
+      <p:sp>
+        <p:nvSpPr>
+          <p:cNvPr id="8" name="Rounded Rectangle 7">
             <a:extLst>
               <a:ext uri="{FF2B5EF4-FFF2-40B4-BE49-F238E27FC236}">
-                <a16:creationId xmlns:a16="http://schemas.microsoft.com/office/drawing/2014/main" id="{5B67A5F5-0EEB-0C43-9A43-C599A4500602}"/>
+                <a16:creationId xmlns:a16="http://schemas.microsoft.com/office/drawing/2014/main" id="{5A7345D9-3FAF-FB43-A2F1-CB30E88C80D1}"/>
               </a:ext>
             </a:extLst>
           </p:cNvPr>
-          <p:cNvGrpSpPr/>
+          <p:cNvSpPr/>
           <p:nvPr/>
-        </p:nvGrpSpPr>
-        <p:grpSpPr>
+        </p:nvSpPr>
+        <p:spPr>
           <a:xfrm>
-            <a:off x="2299501" y="574007"/>
-            <a:ext cx="7592993" cy="5709986"/>
-            <a:chOff x="2299502" y="729206"/>
-            <a:chExt cx="7592993" cy="5709986"/>
+            <a:off x="2299501" y="4024229"/>
+            <a:ext cx="7592993" cy="2259763"/>
           </a:xfrm>
-        </p:grpSpPr>
-        <p:sp>
-          <p:nvSpPr>
-            <p:cNvPr id="5" name="Rounded Rectangle 4">
-              <a:extLst>
-                <a:ext uri="{FF2B5EF4-FFF2-40B4-BE49-F238E27FC236}">
-                  <a16:creationId xmlns:a16="http://schemas.microsoft.com/office/drawing/2014/main" id="{181911C4-F1F7-CB46-AA29-22815AF5A3B5}"/>
-                </a:ext>
-              </a:extLst>
-            </p:cNvPr>
-            <p:cNvSpPr/>
-            <p:nvPr/>
-          </p:nvSpPr>
-          <p:spPr>
-            <a:xfrm>
-              <a:off x="2299502" y="729206"/>
-              <a:ext cx="7592993" cy="1944547"/>
-            </a:xfrm>
-            <a:prstGeom prst="roundRect">
-              <a:avLst>
-                <a:gd name="adj" fmla="val 1247"/>
-              </a:avLst>
-            </a:prstGeom>
+          <a:prstGeom prst="roundRect">
+            <a:avLst>
+              <a:gd name="adj" fmla="val 1247"/>
+            </a:avLst>
+          </a:prstGeom>
+          <a:solidFill>
+            <a:schemeClr val="bg1">
+              <a:lumMod val="95000"/>
+            </a:schemeClr>
+          </a:solidFill>
+          <a:ln w="19050">
             <a:solidFill>
-              <a:schemeClr val="accent6">
-                <a:lumMod val="20000"/>
-                <a:lumOff val="80000"/>
-              </a:schemeClr>
+              <a:schemeClr val="tx1"/>
             </a:solidFill>
-            <a:ln w="19050">
-              <a:solidFill>
-                <a:schemeClr val="tx1"/>
-              </a:solidFill>
-            </a:ln>
-          </p:spPr>
-          <p:style>
-            <a:lnRef idx="2">
-              <a:schemeClr val="accent1">
-                <a:shade val="50000"/>
-              </a:schemeClr>
-            </a:lnRef>
-            <a:fillRef idx="1">
-              <a:schemeClr val="accent1"/>
-            </a:fillRef>
-            <a:effectRef idx="0">
-              <a:schemeClr val="accent1"/>
-            </a:effectRef>
-            <a:fontRef idx="minor">
-              <a:schemeClr val="lt1"/>
-            </a:fontRef>
-          </p:style>
-          <p:txBody>
-            <a:bodyPr rtlCol="0" anchor="ctr"/>
-            <a:lstStyle/>
-            <a:p>
-              <a:pPr algn="ctr"/>
-              <a:r>
-                <a:rPr lang="en-CN" dirty="0">
-                  <a:solidFill>
-                    <a:schemeClr val="tx1"/>
-                  </a:solidFill>
-                  <a:latin typeface="Times New Roman" panose="02020603050405020304" pitchFamily="18" charset="0"/>
-                  <a:cs typeface="Times New Roman" panose="02020603050405020304" pitchFamily="18" charset="0"/>
-                </a:rPr>
-                <a:t>Q1. We want to propose </a:t>
-              </a:r>
-              <a:r>
-                <a:rPr lang="en-US" dirty="0">
-                  <a:solidFill>
-                    <a:schemeClr val="tx1"/>
-                  </a:solidFill>
-                  <a:latin typeface="Times New Roman" panose="02020603050405020304" pitchFamily="18" charset="0"/>
-                  <a:cs typeface="Times New Roman" panose="02020603050405020304" pitchFamily="18" charset="0"/>
-                </a:rPr>
-                <a:t>Reforms in China's Foreign Exchange Market</a:t>
-              </a:r>
-            </a:p>
-            <a:p>
-              <a:pPr algn="ctr"/>
-              <a:r>
-                <a:rPr lang="en-US" dirty="0">
-                  <a:solidFill>
-                    <a:schemeClr val="tx1"/>
-                  </a:solidFill>
-                  <a:latin typeface="Times New Roman" panose="02020603050405020304" pitchFamily="18" charset="0"/>
-                  <a:cs typeface="Times New Roman" panose="02020603050405020304" pitchFamily="18" charset="0"/>
-                </a:rPr>
-                <a:t>based on the Experience of the 2015 Exchange Reforms </a:t>
-              </a:r>
-            </a:p>
-            <a:p>
-              <a:pPr algn="ctr"/>
-              <a:endParaRPr lang="en-US" dirty="0">
+            <a:prstDash val="dash"/>
+          </a:ln>
+        </p:spPr>
+        <p:style>
+          <a:lnRef idx="2">
+            <a:schemeClr val="accent1">
+              <a:shade val="50000"/>
+            </a:schemeClr>
+          </a:lnRef>
+          <a:fillRef idx="1">
+            <a:schemeClr val="accent1"/>
+          </a:fillRef>
+          <a:effectRef idx="0">
+            <a:schemeClr val="accent1"/>
+          </a:effectRef>
+          <a:fontRef idx="minor">
+            <a:schemeClr val="lt1"/>
+          </a:fontRef>
+        </p:style>
+        <p:txBody>
+          <a:bodyPr rtlCol="0" anchor="t"/>
+          <a:lstStyle/>
+          <a:p>
+            <a:pPr algn="ctr"/>
+            <a:r>
+              <a:rPr lang="en-CN" dirty="0">
                 <a:solidFill>
                   <a:schemeClr val="tx1"/>
                 </a:solidFill>
                 <a:latin typeface="Times New Roman" panose="02020603050405020304" pitchFamily="18" charset="0"/>
                 <a:cs typeface="Times New Roman" panose="02020603050405020304" pitchFamily="18" charset="0"/>
-              </a:endParaRPr>
-            </a:p>
-            <a:p>
-              <a:pPr algn="ctr"/>
-              <a:r>
-                <a:rPr lang="en-CN" dirty="0">
-                  <a:solidFill>
-                    <a:schemeClr val="tx1"/>
-                  </a:solidFill>
-                  <a:latin typeface="Times New Roman" panose="02020603050405020304" pitchFamily="18" charset="0"/>
-                  <a:cs typeface="Times New Roman" panose="02020603050405020304" pitchFamily="18" charset="0"/>
-                </a:rPr>
-                <a:t>1. Say there are a lot of shortcomings in China now (FOX Market)</a:t>
-              </a:r>
-            </a:p>
-            <a:p>
-              <a:pPr algn="ctr"/>
-              <a:r>
-                <a:rPr lang="en-CN" dirty="0">
-                  <a:solidFill>
-                    <a:schemeClr val="tx1"/>
-                  </a:solidFill>
-                  <a:latin typeface="Times New Roman" panose="02020603050405020304" pitchFamily="18" charset="0"/>
-                  <a:cs typeface="Times New Roman" panose="02020603050405020304" pitchFamily="18" charset="0"/>
-                </a:rPr>
-                <a:t>2. The 2015 Exchange Reforms make some change</a:t>
-              </a:r>
-              <a:r>
-                <a:rPr lang="en-US" dirty="0">
-                  <a:solidFill>
-                    <a:schemeClr val="tx1"/>
-                  </a:solidFill>
-                  <a:latin typeface="Times New Roman" panose="02020603050405020304" pitchFamily="18" charset="0"/>
-                  <a:cs typeface="Times New Roman" panose="02020603050405020304" pitchFamily="18" charset="0"/>
-                </a:rPr>
-                <a:t>s</a:t>
-              </a:r>
-              <a:r>
-                <a:rPr lang="en-CN" dirty="0">
-                  <a:solidFill>
-                    <a:schemeClr val="tx1"/>
-                  </a:solidFill>
-                  <a:latin typeface="Times New Roman" panose="02020603050405020304" pitchFamily="18" charset="0"/>
-                  <a:cs typeface="Times New Roman" panose="02020603050405020304" pitchFamily="18" charset="0"/>
-                </a:rPr>
-                <a:t> (evaluate it)</a:t>
-              </a:r>
-            </a:p>
-            <a:p>
-              <a:pPr algn="ctr"/>
-              <a:r>
-                <a:rPr lang="en-CN" dirty="0">
-                  <a:solidFill>
-                    <a:schemeClr val="tx1"/>
-                  </a:solidFill>
-                  <a:latin typeface="Times New Roman" panose="02020603050405020304" pitchFamily="18" charset="0"/>
-                  <a:cs typeface="Times New Roman" panose="02020603050405020304" pitchFamily="18" charset="0"/>
-                </a:rPr>
-                <a:t>3. Say we can propose the reforms based on that</a:t>
-              </a:r>
-            </a:p>
-          </p:txBody>
-        </p:sp>
-        <p:sp>
-          <p:nvSpPr>
-            <p:cNvPr id="7" name="Rounded Rectangle 6">
-              <a:extLst>
-                <a:ext uri="{FF2B5EF4-FFF2-40B4-BE49-F238E27FC236}">
-                  <a16:creationId xmlns:a16="http://schemas.microsoft.com/office/drawing/2014/main" id="{FF6613BB-AA61-5444-9FAF-F3E7F343BB6D}"/>
-                </a:ext>
-              </a:extLst>
-            </p:cNvPr>
-            <p:cNvSpPr/>
-            <p:nvPr/>
-          </p:nvSpPr>
-          <p:spPr>
-            <a:xfrm>
-              <a:off x="2299502" y="2954633"/>
-              <a:ext cx="7592993" cy="943916"/>
-            </a:xfrm>
-            <a:prstGeom prst="roundRect">
-              <a:avLst>
-                <a:gd name="adj" fmla="val 1247"/>
-              </a:avLst>
-            </a:prstGeom>
+              </a:rPr>
+              <a:t>The Reforms Proposal</a:t>
+            </a:r>
+            <a:endParaRPr lang="en-CN" dirty="0"/>
+          </a:p>
+        </p:txBody>
+      </p:sp>
+      <p:sp>
+        <p:nvSpPr>
+          <p:cNvPr id="5" name="Rounded Rectangle 4">
+            <a:extLst>
+              <a:ext uri="{FF2B5EF4-FFF2-40B4-BE49-F238E27FC236}">
+                <a16:creationId xmlns:a16="http://schemas.microsoft.com/office/drawing/2014/main" id="{181911C4-F1F7-CB46-AA29-22815AF5A3B5}"/>
+              </a:ext>
+            </a:extLst>
+          </p:cNvPr>
+          <p:cNvSpPr/>
+          <p:nvPr/>
+        </p:nvSpPr>
+        <p:spPr>
+          <a:xfrm>
+            <a:off x="2299501" y="574007"/>
+            <a:ext cx="7592993" cy="1745446"/>
+          </a:xfrm>
+          <a:prstGeom prst="roundRect">
+            <a:avLst>
+              <a:gd name="adj" fmla="val 1247"/>
+            </a:avLst>
+          </a:prstGeom>
+          <a:solidFill>
+            <a:schemeClr val="accent5">
+              <a:lumMod val="20000"/>
+              <a:lumOff val="80000"/>
+            </a:schemeClr>
+          </a:solidFill>
+          <a:ln w="19050">
             <a:solidFill>
-              <a:schemeClr val="accent5">
-                <a:lumMod val="20000"/>
-                <a:lumOff val="80000"/>
-              </a:schemeClr>
+              <a:schemeClr val="tx1"/>
             </a:solidFill>
-            <a:ln w="19050">
+            <a:prstDash val="dash"/>
+          </a:ln>
+        </p:spPr>
+        <p:style>
+          <a:lnRef idx="2">
+            <a:schemeClr val="accent1">
+              <a:shade val="50000"/>
+            </a:schemeClr>
+          </a:lnRef>
+          <a:fillRef idx="1">
+            <a:schemeClr val="accent1"/>
+          </a:fillRef>
+          <a:effectRef idx="0">
+            <a:schemeClr val="accent1"/>
+          </a:effectRef>
+          <a:fontRef idx="minor">
+            <a:schemeClr val="lt1"/>
+          </a:fontRef>
+        </p:style>
+        <p:txBody>
+          <a:bodyPr rtlCol="0" anchor="t"/>
+          <a:lstStyle/>
+          <a:p>
+            <a:r>
+              <a:rPr lang="en-CN" b="1" dirty="0">
+                <a:solidFill>
+                  <a:schemeClr val="tx1"/>
+                </a:solidFill>
+                <a:latin typeface="Times New Roman" panose="02020603050405020304" pitchFamily="18" charset="0"/>
+                <a:cs typeface="Times New Roman" panose="02020603050405020304" pitchFamily="18" charset="0"/>
+              </a:rPr>
+              <a:t>Q1.</a:t>
+            </a:r>
+            <a:r>
+              <a:rPr lang="en-US" b="1" dirty="0">
+                <a:solidFill>
+                  <a:schemeClr val="tx1"/>
+                </a:solidFill>
+                <a:latin typeface="Times New Roman" panose="02020603050405020304" pitchFamily="18" charset="0"/>
+                <a:cs typeface="Times New Roman" panose="02020603050405020304" pitchFamily="18" charset="0"/>
+              </a:rPr>
+              <a:t> </a:t>
+            </a:r>
+            <a:r>
+              <a:rPr lang="en-US" dirty="0">
+                <a:solidFill>
+                  <a:schemeClr val="tx1"/>
+                </a:solidFill>
+                <a:latin typeface="Times New Roman" panose="02020603050405020304" pitchFamily="18" charset="0"/>
+                <a:cs typeface="Times New Roman" panose="02020603050405020304" pitchFamily="18" charset="0"/>
+              </a:rPr>
+              <a:t>Details and evaluation of 2015 foreign exchange reforms</a:t>
+            </a:r>
+            <a:r>
+              <a:rPr lang="en-US" b="1" dirty="0">
+                <a:solidFill>
+                  <a:schemeClr val="tx1"/>
+                </a:solidFill>
+                <a:latin typeface="Times New Roman" panose="02020603050405020304" pitchFamily="18" charset="0"/>
+                <a:cs typeface="Times New Roman" panose="02020603050405020304" pitchFamily="18" charset="0"/>
+              </a:rPr>
+              <a:t> </a:t>
+            </a:r>
+          </a:p>
+          <a:p>
+            <a:endParaRPr lang="en-US" b="1" dirty="0">
               <a:solidFill>
                 <a:schemeClr val="tx1"/>
               </a:solidFill>
-            </a:ln>
-          </p:spPr>
-          <p:style>
-            <a:lnRef idx="2">
-              <a:schemeClr val="accent1">
-                <a:shade val="50000"/>
-              </a:schemeClr>
-            </a:lnRef>
-            <a:fillRef idx="1">
-              <a:schemeClr val="accent1"/>
-            </a:fillRef>
-            <a:effectRef idx="0">
-              <a:schemeClr val="accent1"/>
-            </a:effectRef>
-            <a:fontRef idx="minor">
-              <a:schemeClr val="lt1"/>
-            </a:fontRef>
-          </p:style>
-          <p:txBody>
-            <a:bodyPr rtlCol="0" anchor="ctr"/>
-            <a:lstStyle/>
-            <a:p>
-              <a:pPr algn="ctr"/>
-              <a:r>
-                <a:rPr lang="en-CN" dirty="0">
-                  <a:solidFill>
-                    <a:schemeClr val="tx1"/>
-                  </a:solidFill>
-                  <a:latin typeface="Times New Roman" panose="02020603050405020304" pitchFamily="18" charset="0"/>
-                  <a:cs typeface="Times New Roman" panose="02020603050405020304" pitchFamily="18" charset="0"/>
-                </a:rPr>
-                <a:t>Q3. Analysis of the difference with other area </a:t>
-              </a:r>
-            </a:p>
-            <a:p>
-              <a:pPr algn="ctr"/>
-              <a:r>
-                <a:rPr lang="en-CN" dirty="0">
-                  <a:solidFill>
-                    <a:schemeClr val="tx1"/>
-                  </a:solidFill>
-                  <a:latin typeface="Times New Roman" panose="02020603050405020304" pitchFamily="18" charset="0"/>
-                  <a:cs typeface="Times New Roman" panose="02020603050405020304" pitchFamily="18" charset="0"/>
-                </a:rPr>
-                <a:t>(Say maybe we can find the idea from other areas)</a:t>
-              </a:r>
-            </a:p>
-          </p:txBody>
-        </p:sp>
-        <p:cxnSp>
-          <p:nvCxnSpPr>
-            <p:cNvPr id="16" name="Straight Arrow Connector 15">
-              <a:extLst>
-                <a:ext uri="{FF2B5EF4-FFF2-40B4-BE49-F238E27FC236}">
-                  <a16:creationId xmlns:a16="http://schemas.microsoft.com/office/drawing/2014/main" id="{1592B57A-DDF1-B649-850C-8AC4F61127C7}"/>
-                </a:ext>
-              </a:extLst>
-            </p:cNvPr>
-            <p:cNvCxnSpPr>
-              <a:stCxn id="5" idx="2"/>
-              <a:endCxn id="7" idx="0"/>
-            </p:cNvCxnSpPr>
-            <p:nvPr/>
-          </p:nvCxnSpPr>
-          <p:spPr>
-            <a:xfrm>
-              <a:off x="6095999" y="2673753"/>
-              <a:ext cx="0" cy="280880"/>
-            </a:xfrm>
-            <a:prstGeom prst="straightConnector1">
-              <a:avLst/>
-            </a:prstGeom>
-            <a:ln>
+              <a:latin typeface="Times New Roman" panose="02020603050405020304" pitchFamily="18" charset="0"/>
+              <a:cs typeface="Times New Roman" panose="02020603050405020304" pitchFamily="18" charset="0"/>
+            </a:endParaRPr>
+          </a:p>
+        </p:txBody>
+      </p:sp>
+      <p:sp>
+        <p:nvSpPr>
+          <p:cNvPr id="7" name="Rounded Rectangle 6">
+            <a:extLst>
+              <a:ext uri="{FF2B5EF4-FFF2-40B4-BE49-F238E27FC236}">
+                <a16:creationId xmlns:a16="http://schemas.microsoft.com/office/drawing/2014/main" id="{FF6613BB-AA61-5444-9FAF-F3E7F343BB6D}"/>
+              </a:ext>
+            </a:extLst>
+          </p:cNvPr>
+          <p:cNvSpPr/>
+          <p:nvPr/>
+        </p:nvSpPr>
+        <p:spPr>
+          <a:xfrm>
+            <a:off x="2295770" y="2553718"/>
+            <a:ext cx="7592993" cy="1236246"/>
+          </a:xfrm>
+          <a:prstGeom prst="roundRect">
+            <a:avLst>
+              <a:gd name="adj" fmla="val 1247"/>
+            </a:avLst>
+          </a:prstGeom>
+          <a:solidFill>
+            <a:schemeClr val="accent4">
+              <a:lumMod val="20000"/>
+              <a:lumOff val="80000"/>
+            </a:schemeClr>
+          </a:solidFill>
+          <a:ln w="19050">
+            <a:solidFill>
+              <a:schemeClr val="tx1"/>
+            </a:solidFill>
+            <a:prstDash val="dash"/>
+          </a:ln>
+        </p:spPr>
+        <p:style>
+          <a:lnRef idx="2">
+            <a:schemeClr val="accent1">
+              <a:shade val="50000"/>
+            </a:schemeClr>
+          </a:lnRef>
+          <a:fillRef idx="1">
+            <a:schemeClr val="accent1"/>
+          </a:fillRef>
+          <a:effectRef idx="0">
+            <a:schemeClr val="accent1"/>
+          </a:effectRef>
+          <a:fontRef idx="minor">
+            <a:schemeClr val="lt1"/>
+          </a:fontRef>
+        </p:style>
+        <p:txBody>
+          <a:bodyPr rtlCol="0" anchor="t"/>
+          <a:lstStyle/>
+          <a:p>
+            <a:r>
+              <a:rPr lang="en-CN" b="1" dirty="0">
+                <a:solidFill>
+                  <a:schemeClr val="tx1"/>
+                </a:solidFill>
+                <a:latin typeface="Times New Roman" panose="02020603050405020304" pitchFamily="18" charset="0"/>
+                <a:cs typeface="Times New Roman" panose="02020603050405020304" pitchFamily="18" charset="0"/>
+              </a:rPr>
+              <a:t>Q3.</a:t>
+            </a:r>
+            <a:r>
+              <a:rPr lang="en-CN" dirty="0">
+                <a:solidFill>
+                  <a:schemeClr val="tx1"/>
+                </a:solidFill>
+                <a:latin typeface="Times New Roman" panose="02020603050405020304" pitchFamily="18" charset="0"/>
+                <a:cs typeface="Times New Roman" panose="02020603050405020304" pitchFamily="18" charset="0"/>
+              </a:rPr>
+              <a:t> </a:t>
+            </a:r>
+            <a:r>
+              <a:rPr lang="en-US" dirty="0">
+                <a:solidFill>
+                  <a:schemeClr val="tx1"/>
+                </a:solidFill>
+                <a:latin typeface="Times New Roman" panose="02020603050405020304" pitchFamily="18" charset="0"/>
+                <a:cs typeface="Times New Roman" panose="02020603050405020304" pitchFamily="18" charset="0"/>
+              </a:rPr>
+              <a:t>Foreign exchange market regulation comparison </a:t>
+            </a:r>
+            <a:endParaRPr lang="en-CN" dirty="0">
               <a:solidFill>
                 <a:schemeClr val="tx1"/>
               </a:solidFill>
-              <a:tailEnd type="triangle"/>
-            </a:ln>
-          </p:spPr>
-          <p:style>
-            <a:lnRef idx="1">
-              <a:schemeClr val="accent1"/>
-            </a:lnRef>
-            <a:fillRef idx="0">
-              <a:schemeClr val="accent1"/>
-            </a:fillRef>
-            <a:effectRef idx="0">
-              <a:schemeClr val="accent1"/>
-            </a:effectRef>
-            <a:fontRef idx="minor">
+              <a:latin typeface="Times New Roman" panose="02020603050405020304" pitchFamily="18" charset="0"/>
+              <a:cs typeface="Times New Roman" panose="02020603050405020304" pitchFamily="18" charset="0"/>
+            </a:endParaRPr>
+          </a:p>
+        </p:txBody>
+      </p:sp>
+      <p:cxnSp>
+        <p:nvCxnSpPr>
+          <p:cNvPr id="16" name="Straight Arrow Connector 15">
+            <a:extLst>
+              <a:ext uri="{FF2B5EF4-FFF2-40B4-BE49-F238E27FC236}">
+                <a16:creationId xmlns:a16="http://schemas.microsoft.com/office/drawing/2014/main" id="{1592B57A-DDF1-B649-850C-8AC4F61127C7}"/>
+              </a:ext>
+            </a:extLst>
+          </p:cNvPr>
+          <p:cNvCxnSpPr>
+            <a:cxnSpLocks/>
+            <a:stCxn id="5" idx="2"/>
+            <a:endCxn id="7" idx="0"/>
+          </p:cNvCxnSpPr>
+          <p:nvPr/>
+        </p:nvCxnSpPr>
+        <p:spPr>
+          <a:xfrm flipH="1">
+            <a:off x="6092267" y="2319453"/>
+            <a:ext cx="3731" cy="234265"/>
+          </a:xfrm>
+          <a:prstGeom prst="straightConnector1">
+            <a:avLst/>
+          </a:prstGeom>
+          <a:ln w="15875">
+            <a:solidFill>
               <a:schemeClr val="tx1"/>
-            </a:fontRef>
-          </p:style>
-        </p:cxnSp>
-        <p:grpSp>
-          <p:nvGrpSpPr>
-            <p:cNvPr id="23" name="Group 22">
-              <a:extLst>
-                <a:ext uri="{FF2B5EF4-FFF2-40B4-BE49-F238E27FC236}">
-                  <a16:creationId xmlns:a16="http://schemas.microsoft.com/office/drawing/2014/main" id="{4DA1832C-5F4F-8F49-9403-2DE4AF0274F6}"/>
-                </a:ext>
-              </a:extLst>
-            </p:cNvPr>
-            <p:cNvGrpSpPr/>
-            <p:nvPr/>
-          </p:nvGrpSpPr>
-          <p:grpSpPr>
-            <a:xfrm>
-              <a:off x="2299502" y="4179429"/>
-              <a:ext cx="7592993" cy="2259763"/>
-              <a:chOff x="2299502" y="3853020"/>
-              <a:chExt cx="7592993" cy="2259763"/>
-            </a:xfrm>
-          </p:grpSpPr>
-          <p:sp>
-            <p:nvSpPr>
-              <p:cNvPr id="8" name="Rounded Rectangle 7">
-                <a:extLst>
-                  <a:ext uri="{FF2B5EF4-FFF2-40B4-BE49-F238E27FC236}">
-                    <a16:creationId xmlns:a16="http://schemas.microsoft.com/office/drawing/2014/main" id="{5A7345D9-3FAF-FB43-A2F1-CB30E88C80D1}"/>
-                  </a:ext>
-                </a:extLst>
-              </p:cNvPr>
-              <p:cNvSpPr/>
-              <p:nvPr/>
-            </p:nvSpPr>
-            <p:spPr>
-              <a:xfrm>
-                <a:off x="2299502" y="3853020"/>
-                <a:ext cx="7592993" cy="2259763"/>
-              </a:xfrm>
-              <a:prstGeom prst="roundRect">
-                <a:avLst>
-                  <a:gd name="adj" fmla="val 1247"/>
-                </a:avLst>
-              </a:prstGeom>
-              <a:solidFill>
-                <a:schemeClr val="accent4">
-                  <a:lumMod val="20000"/>
-                  <a:lumOff val="80000"/>
-                </a:schemeClr>
-              </a:solidFill>
-              <a:ln w="19050">
+            </a:solidFill>
+            <a:tailEnd type="stealth" w="lg" len="lg"/>
+          </a:ln>
+        </p:spPr>
+        <p:style>
+          <a:lnRef idx="1">
+            <a:schemeClr val="accent1"/>
+          </a:lnRef>
+          <a:fillRef idx="0">
+            <a:schemeClr val="accent1"/>
+          </a:fillRef>
+          <a:effectRef idx="0">
+            <a:schemeClr val="accent1"/>
+          </a:effectRef>
+          <a:fontRef idx="minor">
+            <a:schemeClr val="tx1"/>
+          </a:fontRef>
+        </p:style>
+      </p:cxnSp>
+      <p:sp>
+        <p:nvSpPr>
+          <p:cNvPr id="9" name="Rounded Rectangle 8">
+            <a:extLst>
+              <a:ext uri="{FF2B5EF4-FFF2-40B4-BE49-F238E27FC236}">
+                <a16:creationId xmlns:a16="http://schemas.microsoft.com/office/drawing/2014/main" id="{9F9B9D54-DD9D-2142-866C-7E7D5EAA0419}"/>
+              </a:ext>
+            </a:extLst>
+          </p:cNvPr>
+          <p:cNvSpPr/>
+          <p:nvPr/>
+        </p:nvSpPr>
+        <p:spPr>
+          <a:xfrm>
+            <a:off x="2533984" y="4447486"/>
+            <a:ext cx="7124018" cy="525957"/>
+          </a:xfrm>
+          <a:prstGeom prst="roundRect">
+            <a:avLst>
+              <a:gd name="adj" fmla="val 1247"/>
+            </a:avLst>
+          </a:prstGeom>
+          <a:solidFill>
+            <a:schemeClr val="bg1">
+              <a:lumMod val="85000"/>
+            </a:schemeClr>
+          </a:solidFill>
+          <a:ln w="19050">
+            <a:solidFill>
+              <a:schemeClr val="tx1"/>
+            </a:solidFill>
+          </a:ln>
+        </p:spPr>
+        <p:style>
+          <a:lnRef idx="2">
+            <a:schemeClr val="accent1">
+              <a:shade val="50000"/>
+            </a:schemeClr>
+          </a:lnRef>
+          <a:fillRef idx="1">
+            <a:schemeClr val="accent1"/>
+          </a:fillRef>
+          <a:effectRef idx="0">
+            <a:schemeClr val="accent1"/>
+          </a:effectRef>
+          <a:fontRef idx="minor">
+            <a:schemeClr val="lt1"/>
+          </a:fontRef>
+        </p:style>
+        <p:txBody>
+          <a:bodyPr rtlCol="0" anchor="ctr"/>
+          <a:lstStyle/>
+          <a:p>
+            <a:r>
+              <a:rPr lang="en-CN" sz="1600" b="1" dirty="0">
                 <a:solidFill>
                   <a:schemeClr val="tx1"/>
                 </a:solidFill>
-              </a:ln>
-            </p:spPr>
-            <p:style>
-              <a:lnRef idx="2">
-                <a:schemeClr val="accent1">
-                  <a:shade val="50000"/>
-                </a:schemeClr>
-              </a:lnRef>
-              <a:fillRef idx="1">
-                <a:schemeClr val="accent1"/>
-              </a:fillRef>
-              <a:effectRef idx="0">
-                <a:schemeClr val="accent1"/>
-              </a:effectRef>
-              <a:fontRef idx="minor">
-                <a:schemeClr val="lt1"/>
-              </a:fontRef>
-            </p:style>
-            <p:txBody>
-              <a:bodyPr rtlCol="0" anchor="ctr"/>
-              <a:lstStyle/>
-              <a:p>
-                <a:pPr algn="ctr"/>
-                <a:endParaRPr lang="en-CN" dirty="0">
-                  <a:solidFill>
-                    <a:schemeClr val="tx1"/>
-                  </a:solidFill>
-                  <a:latin typeface="Times New Roman" panose="02020603050405020304" pitchFamily="18" charset="0"/>
-                  <a:cs typeface="Times New Roman" panose="02020603050405020304" pitchFamily="18" charset="0"/>
-                </a:endParaRPr>
-              </a:p>
-            </p:txBody>
-          </p:sp>
-          <p:sp>
-            <p:nvSpPr>
-              <p:cNvPr id="9" name="Rounded Rectangle 8">
-                <a:extLst>
-                  <a:ext uri="{FF2B5EF4-FFF2-40B4-BE49-F238E27FC236}">
-                    <a16:creationId xmlns:a16="http://schemas.microsoft.com/office/drawing/2014/main" id="{9F9B9D54-DD9D-2142-866C-7E7D5EAA0419}"/>
-                  </a:ext>
-                </a:extLst>
-              </p:cNvPr>
-              <p:cNvSpPr/>
-              <p:nvPr/>
-            </p:nvSpPr>
-            <p:spPr>
-              <a:xfrm>
-                <a:off x="2421422" y="4313408"/>
-                <a:ext cx="2363939" cy="1418373"/>
-              </a:xfrm>
-              <a:prstGeom prst="roundRect">
-                <a:avLst>
-                  <a:gd name="adj" fmla="val 1247"/>
-                </a:avLst>
-              </a:prstGeom>
-              <a:solidFill>
-                <a:schemeClr val="accent4">
-                  <a:lumMod val="40000"/>
-                  <a:lumOff val="60000"/>
-                </a:schemeClr>
-              </a:solidFill>
-              <a:ln w="19050">
+                <a:latin typeface="Times New Roman" panose="02020603050405020304" pitchFamily="18" charset="0"/>
+                <a:cs typeface="Times New Roman" panose="02020603050405020304" pitchFamily="18" charset="0"/>
+              </a:rPr>
+              <a:t>Q2</a:t>
+            </a:r>
+            <a:r>
+              <a:rPr lang="en-US" altLang="zh-CN" sz="1600" b="1" dirty="0">
                 <a:solidFill>
                   <a:schemeClr val="tx1"/>
                 </a:solidFill>
-              </a:ln>
-            </p:spPr>
-            <p:style>
-              <a:lnRef idx="2">
-                <a:schemeClr val="accent1">
-                  <a:shade val="50000"/>
-                </a:schemeClr>
-              </a:lnRef>
-              <a:fillRef idx="1">
-                <a:schemeClr val="accent1"/>
-              </a:fillRef>
-              <a:effectRef idx="0">
-                <a:schemeClr val="accent1"/>
-              </a:effectRef>
-              <a:fontRef idx="minor">
-                <a:schemeClr val="lt1"/>
-              </a:fontRef>
-            </p:style>
-            <p:txBody>
-              <a:bodyPr rtlCol="0" anchor="ctr"/>
-              <a:lstStyle/>
-              <a:p>
-                <a:pPr algn="ctr"/>
-                <a:r>
-                  <a:rPr lang="en-CN" dirty="0">
-                    <a:solidFill>
-                      <a:schemeClr val="tx1"/>
-                    </a:solidFill>
-                    <a:latin typeface="Times New Roman" panose="02020603050405020304" pitchFamily="18" charset="0"/>
-                    <a:cs typeface="Times New Roman" panose="02020603050405020304" pitchFamily="18" charset="0"/>
-                  </a:rPr>
-                  <a:t>Q2. Change </a:t>
-                </a:r>
-                <a:r>
-                  <a:rPr lang="en-US" dirty="0">
-                    <a:solidFill>
-                      <a:schemeClr val="tx1"/>
-                    </a:solidFill>
-                    <a:latin typeface="Times New Roman" panose="02020603050405020304" pitchFamily="18" charset="0"/>
-                    <a:cs typeface="Times New Roman" panose="02020603050405020304" pitchFamily="18" charset="0"/>
-                  </a:rPr>
-                  <a:t>Regulatory Agencies</a:t>
-                </a:r>
-              </a:p>
-            </p:txBody>
-          </p:sp>
-          <p:sp>
-            <p:nvSpPr>
-              <p:cNvPr id="11" name="TextBox 10">
-                <a:extLst>
-                  <a:ext uri="{FF2B5EF4-FFF2-40B4-BE49-F238E27FC236}">
-                    <a16:creationId xmlns:a16="http://schemas.microsoft.com/office/drawing/2014/main" id="{6E0C509B-ADE7-E442-8F96-1AC527F9499C}"/>
-                  </a:ext>
-                </a:extLst>
-              </p:cNvPr>
-              <p:cNvSpPr txBox="1"/>
-              <p:nvPr/>
-            </p:nvSpPr>
-            <p:spPr>
-              <a:xfrm>
-                <a:off x="2299502" y="3898549"/>
-                <a:ext cx="7592992" cy="369332"/>
-              </a:xfrm>
-              <a:prstGeom prst="rect">
-                <a:avLst/>
-              </a:prstGeom>
-              <a:noFill/>
-            </p:spPr>
-            <p:txBody>
-              <a:bodyPr wrap="square">
-                <a:spAutoFit/>
-              </a:bodyPr>
-              <a:lstStyle/>
-              <a:p>
-                <a:pPr algn="ctr"/>
-                <a:r>
-                  <a:rPr lang="en-CN" dirty="0">
-                    <a:solidFill>
-                      <a:schemeClr val="tx1"/>
-                    </a:solidFill>
-                    <a:latin typeface="Times New Roman" panose="02020603050405020304" pitchFamily="18" charset="0"/>
-                    <a:cs typeface="Times New Roman" panose="02020603050405020304" pitchFamily="18" charset="0"/>
-                  </a:rPr>
-                  <a:t>Details of Reforms Proposal</a:t>
-                </a:r>
-                <a:endParaRPr lang="en-CN" dirty="0"/>
-              </a:p>
-            </p:txBody>
-          </p:sp>
-          <p:sp>
-            <p:nvSpPr>
-              <p:cNvPr id="12" name="Rounded Rectangle 11">
-                <a:extLst>
-                  <a:ext uri="{FF2B5EF4-FFF2-40B4-BE49-F238E27FC236}">
-                    <a16:creationId xmlns:a16="http://schemas.microsoft.com/office/drawing/2014/main" id="{D4218C58-C39E-5E46-A37C-4DC4C9161F0F}"/>
-                  </a:ext>
-                </a:extLst>
-              </p:cNvPr>
-              <p:cNvSpPr/>
-              <p:nvPr/>
-            </p:nvSpPr>
-            <p:spPr>
-              <a:xfrm>
-                <a:off x="4914028" y="4313409"/>
-                <a:ext cx="2363939" cy="1418374"/>
-              </a:xfrm>
-              <a:prstGeom prst="roundRect">
-                <a:avLst>
-                  <a:gd name="adj" fmla="val 1247"/>
-                </a:avLst>
-              </a:prstGeom>
-              <a:solidFill>
-                <a:schemeClr val="accent4">
-                  <a:lumMod val="40000"/>
-                  <a:lumOff val="60000"/>
-                </a:schemeClr>
-              </a:solidFill>
-              <a:ln w="19050">
+                <a:latin typeface="Times New Roman" panose="02020603050405020304" pitchFamily="18" charset="0"/>
+                <a:cs typeface="Times New Roman" panose="02020603050405020304" pitchFamily="18" charset="0"/>
+              </a:rPr>
+              <a:t>.</a:t>
+            </a:r>
+            <a:r>
+              <a:rPr lang="en-US" altLang="zh-CN" sz="1600" dirty="0">
                 <a:solidFill>
                   <a:schemeClr val="tx1"/>
                 </a:solidFill>
-              </a:ln>
-            </p:spPr>
-            <p:style>
-              <a:lnRef idx="2">
-                <a:schemeClr val="accent1">
-                  <a:shade val="50000"/>
-                </a:schemeClr>
-              </a:lnRef>
-              <a:fillRef idx="1">
-                <a:schemeClr val="accent1"/>
-              </a:fillRef>
-              <a:effectRef idx="0">
-                <a:schemeClr val="accent1"/>
-              </a:effectRef>
-              <a:fontRef idx="minor">
-                <a:schemeClr val="lt1"/>
-              </a:fontRef>
-            </p:style>
-            <p:txBody>
-              <a:bodyPr rtlCol="0" anchor="ctr"/>
-              <a:lstStyle/>
-              <a:p>
-                <a:pPr algn="ctr"/>
-                <a:r>
-                  <a:rPr lang="en-CN" dirty="0">
-                    <a:solidFill>
-                      <a:schemeClr val="tx1"/>
-                    </a:solidFill>
-                    <a:latin typeface="Times New Roman" panose="02020603050405020304" pitchFamily="18" charset="0"/>
-                    <a:cs typeface="Times New Roman" panose="02020603050405020304" pitchFamily="18" charset="0"/>
-                  </a:rPr>
-                  <a:t>Q4. </a:t>
-                </a:r>
-                <a:r>
-                  <a:rPr lang="en-US" dirty="0">
-                    <a:solidFill>
-                      <a:srgbClr val="000000"/>
-                    </a:solidFill>
-                    <a:latin typeface="Times New Roman" panose="02020603050405020304" pitchFamily="18" charset="0"/>
-                    <a:cs typeface="Times New Roman" panose="02020603050405020304" pitchFamily="18" charset="0"/>
-                  </a:rPr>
-                  <a:t>R</a:t>
-                </a:r>
-                <a:r>
-                  <a:rPr lang="en-US" dirty="0">
-                    <a:solidFill>
-                      <a:srgbClr val="000000"/>
-                    </a:solidFill>
-                    <a:effectLst/>
-                    <a:latin typeface="Times New Roman" panose="02020603050405020304" pitchFamily="18" charset="0"/>
-                  </a:rPr>
-                  <a:t>eform financial regulation in China</a:t>
-                </a:r>
-              </a:p>
-            </p:txBody>
-          </p:sp>
-          <p:sp>
-            <p:nvSpPr>
-              <p:cNvPr id="13" name="Rounded Rectangle 12">
-                <a:extLst>
-                  <a:ext uri="{FF2B5EF4-FFF2-40B4-BE49-F238E27FC236}">
-                    <a16:creationId xmlns:a16="http://schemas.microsoft.com/office/drawing/2014/main" id="{F49ECD91-0A99-A94C-9C15-AD6AD073D620}"/>
-                  </a:ext>
-                </a:extLst>
-              </p:cNvPr>
-              <p:cNvSpPr/>
-              <p:nvPr/>
-            </p:nvSpPr>
-            <p:spPr>
-              <a:xfrm>
-                <a:off x="7403261" y="4313408"/>
-                <a:ext cx="2363939" cy="1418375"/>
-              </a:xfrm>
-              <a:prstGeom prst="roundRect">
-                <a:avLst>
-                  <a:gd name="adj" fmla="val 1247"/>
-                </a:avLst>
-              </a:prstGeom>
-              <a:solidFill>
-                <a:schemeClr val="accent4">
-                  <a:lumMod val="40000"/>
-                  <a:lumOff val="60000"/>
-                </a:schemeClr>
-              </a:solidFill>
-              <a:ln w="19050">
+                <a:latin typeface="Times New Roman" panose="02020603050405020304" pitchFamily="18" charset="0"/>
+                <a:cs typeface="Times New Roman" panose="02020603050405020304" pitchFamily="18" charset="0"/>
+              </a:rPr>
+              <a:t> </a:t>
+            </a:r>
+            <a:r>
+              <a:rPr lang="en-US" sz="1600" dirty="0">
                 <a:solidFill>
                   <a:schemeClr val="tx1"/>
                 </a:solidFill>
-              </a:ln>
-            </p:spPr>
-            <p:style>
-              <a:lnRef idx="2">
-                <a:schemeClr val="accent1">
-                  <a:shade val="50000"/>
-                </a:schemeClr>
-              </a:lnRef>
-              <a:fillRef idx="1">
-                <a:schemeClr val="accent1"/>
-              </a:fillRef>
-              <a:effectRef idx="0">
-                <a:schemeClr val="accent1"/>
-              </a:effectRef>
-              <a:fontRef idx="minor">
-                <a:schemeClr val="lt1"/>
-              </a:fontRef>
-            </p:style>
-            <p:txBody>
-              <a:bodyPr rtlCol="0" anchor="ctr"/>
-              <a:lstStyle/>
-              <a:p>
-                <a:r>
-                  <a:rPr lang="en-CN" dirty="0">
-                    <a:solidFill>
-                      <a:schemeClr val="tx1"/>
-                    </a:solidFill>
-                    <a:latin typeface="Times New Roman" panose="02020603050405020304" pitchFamily="18" charset="0"/>
-                    <a:cs typeface="Times New Roman" panose="02020603050405020304" pitchFamily="18" charset="0"/>
-                  </a:rPr>
-                  <a:t>Q5. </a:t>
-                </a:r>
-                <a:r>
-                  <a:rPr lang="en-US" dirty="0">
-                    <a:solidFill>
-                      <a:srgbClr val="000000"/>
-                    </a:solidFill>
-                    <a:latin typeface="Times New Roman" panose="02020603050405020304" pitchFamily="18" charset="0"/>
-                    <a:cs typeface="Times New Roman" panose="02020603050405020304" pitchFamily="18" charset="0"/>
-                  </a:rPr>
-                  <a:t>R</a:t>
-                </a:r>
-                <a:r>
-                  <a:rPr lang="en-US" dirty="0">
-                    <a:solidFill>
-                      <a:srgbClr val="000000"/>
-                    </a:solidFill>
-                    <a:effectLst/>
-                    <a:latin typeface="Times New Roman" panose="02020603050405020304" pitchFamily="18" charset="0"/>
-                  </a:rPr>
-                  <a:t>eforms to make Chinese capital markets more efficient</a:t>
-                </a:r>
-              </a:p>
-              <a:p>
-                <a:r>
-                  <a:rPr lang="en-US" dirty="0">
-                    <a:solidFill>
-                      <a:srgbClr val="000000"/>
-                    </a:solidFill>
-                    <a:effectLst/>
-                    <a:latin typeface="Times New Roman" panose="02020603050405020304" pitchFamily="18" charset="0"/>
-                  </a:rPr>
-                  <a:t>and safer</a:t>
-                </a:r>
-              </a:p>
-            </p:txBody>
-          </p:sp>
-        </p:grpSp>
-        <p:cxnSp>
-          <p:nvCxnSpPr>
-            <p:cNvPr id="24" name="Straight Arrow Connector 23">
-              <a:extLst>
-                <a:ext uri="{FF2B5EF4-FFF2-40B4-BE49-F238E27FC236}">
-                  <a16:creationId xmlns:a16="http://schemas.microsoft.com/office/drawing/2014/main" id="{22BFF230-44DB-0D42-A969-07E204AA7E4B}"/>
-                </a:ext>
-              </a:extLst>
-            </p:cNvPr>
-            <p:cNvCxnSpPr>
-              <a:cxnSpLocks/>
-              <a:stCxn id="7" idx="2"/>
-              <a:endCxn id="8" idx="0"/>
-            </p:cNvCxnSpPr>
-            <p:nvPr/>
-          </p:nvCxnSpPr>
-          <p:spPr>
-            <a:xfrm>
-              <a:off x="6095999" y="3898549"/>
-              <a:ext cx="0" cy="280880"/>
-            </a:xfrm>
-            <a:prstGeom prst="straightConnector1">
-              <a:avLst/>
-            </a:prstGeom>
-            <a:ln>
+                <a:effectLst/>
+                <a:latin typeface="Times New Roman" panose="02020603050405020304" pitchFamily="18" charset="0"/>
+                <a:ea typeface="Times New Roman" panose="02020603050405020304" pitchFamily="18" charset="0"/>
+              </a:rPr>
+              <a:t>Changes for regulatory agencies: for PBOC, NFRA and the CSRC </a:t>
+            </a:r>
+            <a:endParaRPr lang="en-CN" sz="1600" dirty="0">
               <a:solidFill>
                 <a:schemeClr val="tx1"/>
               </a:solidFill>
-              <a:tailEnd type="triangle"/>
-            </a:ln>
-          </p:spPr>
-          <p:style>
-            <a:lnRef idx="1">
-              <a:schemeClr val="accent1"/>
-            </a:lnRef>
-            <a:fillRef idx="0">
-              <a:schemeClr val="accent1"/>
-            </a:fillRef>
-            <a:effectRef idx="0">
-              <a:schemeClr val="accent1"/>
-            </a:effectRef>
-            <a:fontRef idx="minor">
+              <a:effectLst/>
+              <a:latin typeface="Times New Roman" panose="02020603050405020304" pitchFamily="18" charset="0"/>
+              <a:ea typeface="Times New Roman" panose="02020603050405020304" pitchFamily="18" charset="0"/>
+            </a:endParaRPr>
+          </a:p>
+        </p:txBody>
+      </p:sp>
+      <p:cxnSp>
+        <p:nvCxnSpPr>
+          <p:cNvPr id="24" name="Straight Arrow Connector 23">
+            <a:extLst>
+              <a:ext uri="{FF2B5EF4-FFF2-40B4-BE49-F238E27FC236}">
+                <a16:creationId xmlns:a16="http://schemas.microsoft.com/office/drawing/2014/main" id="{22BFF230-44DB-0D42-A969-07E204AA7E4B}"/>
+              </a:ext>
+            </a:extLst>
+          </p:cNvPr>
+          <p:cNvCxnSpPr>
+            <a:cxnSpLocks/>
+            <a:stCxn id="7" idx="2"/>
+            <a:endCxn id="8" idx="0"/>
+          </p:cNvCxnSpPr>
+          <p:nvPr/>
+        </p:nvCxnSpPr>
+        <p:spPr>
+          <a:xfrm>
+            <a:off x="6092267" y="3789964"/>
+            <a:ext cx="3731" cy="234265"/>
+          </a:xfrm>
+          <a:prstGeom prst="straightConnector1">
+            <a:avLst/>
+          </a:prstGeom>
+          <a:ln w="15875">
+            <a:solidFill>
               <a:schemeClr val="tx1"/>
-            </a:fontRef>
-          </p:style>
-        </p:cxnSp>
-      </p:grpSp>
+            </a:solidFill>
+            <a:tailEnd type="stealth" w="lg" len="lg"/>
+          </a:ln>
+        </p:spPr>
+        <p:style>
+          <a:lnRef idx="1">
+            <a:schemeClr val="accent1"/>
+          </a:lnRef>
+          <a:fillRef idx="0">
+            <a:schemeClr val="accent1"/>
+          </a:fillRef>
+          <a:effectRef idx="0">
+            <a:schemeClr val="accent1"/>
+          </a:effectRef>
+          <a:fontRef idx="minor">
+            <a:schemeClr val="tx1"/>
+          </a:fontRef>
+        </p:style>
+      </p:cxnSp>
+      <p:sp>
+        <p:nvSpPr>
+          <p:cNvPr id="15" name="Rounded Rectangle 14">
+            <a:extLst>
+              <a:ext uri="{FF2B5EF4-FFF2-40B4-BE49-F238E27FC236}">
+                <a16:creationId xmlns:a16="http://schemas.microsoft.com/office/drawing/2014/main" id="{CEC03D48-5B9F-E248-82E4-F21EC4EDB758}"/>
+              </a:ext>
+            </a:extLst>
+          </p:cNvPr>
+          <p:cNvSpPr/>
+          <p:nvPr/>
+        </p:nvSpPr>
+        <p:spPr>
+          <a:xfrm>
+            <a:off x="2530256" y="1056302"/>
+            <a:ext cx="7124023" cy="539298"/>
+          </a:xfrm>
+          <a:prstGeom prst="roundRect">
+            <a:avLst>
+              <a:gd name="adj" fmla="val 1247"/>
+            </a:avLst>
+          </a:prstGeom>
+          <a:solidFill>
+            <a:schemeClr val="accent5">
+              <a:lumMod val="40000"/>
+              <a:lumOff val="60000"/>
+            </a:schemeClr>
+          </a:solidFill>
+          <a:ln w="19050">
+            <a:solidFill>
+              <a:schemeClr val="tx1"/>
+            </a:solidFill>
+          </a:ln>
+        </p:spPr>
+        <p:style>
+          <a:lnRef idx="2">
+            <a:schemeClr val="accent1">
+              <a:shade val="50000"/>
+            </a:schemeClr>
+          </a:lnRef>
+          <a:fillRef idx="1">
+            <a:schemeClr val="accent1"/>
+          </a:fillRef>
+          <a:effectRef idx="0">
+            <a:schemeClr val="accent1"/>
+          </a:effectRef>
+          <a:fontRef idx="minor">
+            <a:schemeClr val="lt1"/>
+          </a:fontRef>
+        </p:style>
+        <p:txBody>
+          <a:bodyPr rtlCol="0" anchor="ctr"/>
+          <a:lstStyle/>
+          <a:p>
+            <a:pPr algn="ctr"/>
+            <a:r>
+              <a:rPr lang="en-US" sz="1600" b="1" dirty="0">
+                <a:solidFill>
+                  <a:schemeClr val="tx1"/>
+                </a:solidFill>
+                <a:latin typeface="Times New Roman" panose="02020603050405020304" pitchFamily="18" charset="0"/>
+                <a:cs typeface="Times New Roman" panose="02020603050405020304" pitchFamily="18" charset="0"/>
+              </a:rPr>
+              <a:t>Details of  2015 foreign exchange reforms.</a:t>
+            </a:r>
+          </a:p>
+        </p:txBody>
+      </p:sp>
+      <p:sp>
+        <p:nvSpPr>
+          <p:cNvPr id="17" name="Rounded Rectangle 16">
+            <a:extLst>
+              <a:ext uri="{FF2B5EF4-FFF2-40B4-BE49-F238E27FC236}">
+                <a16:creationId xmlns:a16="http://schemas.microsoft.com/office/drawing/2014/main" id="{E5C394EF-885B-644D-BCCD-082C3F30E145}"/>
+              </a:ext>
+            </a:extLst>
+          </p:cNvPr>
+          <p:cNvSpPr/>
+          <p:nvPr/>
+        </p:nvSpPr>
+        <p:spPr>
+          <a:xfrm>
+            <a:off x="2533985" y="1639715"/>
+            <a:ext cx="3432969" cy="539298"/>
+          </a:xfrm>
+          <a:prstGeom prst="roundRect">
+            <a:avLst>
+              <a:gd name="adj" fmla="val 1247"/>
+            </a:avLst>
+          </a:prstGeom>
+          <a:solidFill>
+            <a:schemeClr val="accent5">
+              <a:lumMod val="40000"/>
+              <a:lumOff val="60000"/>
+            </a:schemeClr>
+          </a:solidFill>
+          <a:ln w="19050">
+            <a:solidFill>
+              <a:schemeClr val="tx1"/>
+            </a:solidFill>
+          </a:ln>
+        </p:spPr>
+        <p:style>
+          <a:lnRef idx="2">
+            <a:schemeClr val="accent1">
+              <a:shade val="50000"/>
+            </a:schemeClr>
+          </a:lnRef>
+          <a:fillRef idx="1">
+            <a:schemeClr val="accent1"/>
+          </a:fillRef>
+          <a:effectRef idx="0">
+            <a:schemeClr val="accent1"/>
+          </a:effectRef>
+          <a:fontRef idx="minor">
+            <a:schemeClr val="lt1"/>
+          </a:fontRef>
+        </p:style>
+        <p:txBody>
+          <a:bodyPr rtlCol="0" anchor="ctr"/>
+          <a:lstStyle/>
+          <a:p>
+            <a:pPr algn="ctr"/>
+            <a:r>
+              <a:rPr lang="en-US" sz="1600" dirty="0">
+                <a:solidFill>
+                  <a:schemeClr val="tx1"/>
+                </a:solidFill>
+                <a:latin typeface="Times New Roman" panose="02020603050405020304" pitchFamily="18" charset="0"/>
+                <a:cs typeface="Times New Roman" panose="02020603050405020304" pitchFamily="18" charset="0"/>
+              </a:rPr>
+              <a:t>Some specific impacts of the reforms.</a:t>
+            </a:r>
+          </a:p>
+        </p:txBody>
+      </p:sp>
+      <p:sp>
+        <p:nvSpPr>
+          <p:cNvPr id="18" name="Rounded Rectangle 17">
+            <a:extLst>
+              <a:ext uri="{FF2B5EF4-FFF2-40B4-BE49-F238E27FC236}">
+                <a16:creationId xmlns:a16="http://schemas.microsoft.com/office/drawing/2014/main" id="{D7BF4378-1715-8F46-BC14-8D3EB9C071DB}"/>
+              </a:ext>
+            </a:extLst>
+          </p:cNvPr>
+          <p:cNvSpPr/>
+          <p:nvPr/>
+        </p:nvSpPr>
+        <p:spPr>
+          <a:xfrm>
+            <a:off x="6225039" y="1639715"/>
+            <a:ext cx="3432969" cy="539298"/>
+          </a:xfrm>
+          <a:prstGeom prst="roundRect">
+            <a:avLst>
+              <a:gd name="adj" fmla="val 1247"/>
+            </a:avLst>
+          </a:prstGeom>
+          <a:solidFill>
+            <a:schemeClr val="accent5">
+              <a:lumMod val="40000"/>
+              <a:lumOff val="60000"/>
+            </a:schemeClr>
+          </a:solidFill>
+          <a:ln w="19050">
+            <a:solidFill>
+              <a:schemeClr val="tx1"/>
+            </a:solidFill>
+          </a:ln>
+        </p:spPr>
+        <p:style>
+          <a:lnRef idx="2">
+            <a:schemeClr val="accent1">
+              <a:shade val="50000"/>
+            </a:schemeClr>
+          </a:lnRef>
+          <a:fillRef idx="1">
+            <a:schemeClr val="accent1"/>
+          </a:fillRef>
+          <a:effectRef idx="0">
+            <a:schemeClr val="accent1"/>
+          </a:effectRef>
+          <a:fontRef idx="minor">
+            <a:schemeClr val="lt1"/>
+          </a:fontRef>
+        </p:style>
+        <p:txBody>
+          <a:bodyPr rtlCol="0" anchor="ctr"/>
+          <a:lstStyle/>
+          <a:p>
+            <a:pPr algn="ctr"/>
+            <a:r>
+              <a:rPr lang="en-US" sz="1600" dirty="0">
+                <a:solidFill>
+                  <a:schemeClr val="tx1"/>
+                </a:solidFill>
+                <a:latin typeface="Times New Roman" panose="02020603050405020304" pitchFamily="18" charset="0"/>
+                <a:cs typeface="Times New Roman" panose="02020603050405020304" pitchFamily="18" charset="0"/>
+              </a:rPr>
+              <a:t>Analysis based on the first trade war.</a:t>
+            </a:r>
+          </a:p>
+        </p:txBody>
+      </p:sp>
+      <p:sp>
+        <p:nvSpPr>
+          <p:cNvPr id="20" name="Rounded Rectangle 19">
+            <a:extLst>
+              <a:ext uri="{FF2B5EF4-FFF2-40B4-BE49-F238E27FC236}">
+                <a16:creationId xmlns:a16="http://schemas.microsoft.com/office/drawing/2014/main" id="{1F880F5E-5C26-3C4B-894D-5FB0CCFAEE89}"/>
+              </a:ext>
+            </a:extLst>
+          </p:cNvPr>
+          <p:cNvSpPr/>
+          <p:nvPr/>
+        </p:nvSpPr>
+        <p:spPr>
+          <a:xfrm>
+            <a:off x="2530262" y="2998274"/>
+            <a:ext cx="7124017" cy="653360"/>
+          </a:xfrm>
+          <a:prstGeom prst="roundRect">
+            <a:avLst>
+              <a:gd name="adj" fmla="val 1247"/>
+            </a:avLst>
+          </a:prstGeom>
+          <a:solidFill>
+            <a:schemeClr val="accent4">
+              <a:lumMod val="40000"/>
+              <a:lumOff val="60000"/>
+            </a:schemeClr>
+          </a:solidFill>
+          <a:ln w="19050">
+            <a:solidFill>
+              <a:schemeClr val="tx1"/>
+            </a:solidFill>
+          </a:ln>
+        </p:spPr>
+        <p:style>
+          <a:lnRef idx="2">
+            <a:schemeClr val="accent1">
+              <a:shade val="50000"/>
+            </a:schemeClr>
+          </a:lnRef>
+          <a:fillRef idx="1">
+            <a:schemeClr val="accent1"/>
+          </a:fillRef>
+          <a:effectRef idx="0">
+            <a:schemeClr val="accent1"/>
+          </a:effectRef>
+          <a:fontRef idx="minor">
+            <a:schemeClr val="lt1"/>
+          </a:fontRef>
+        </p:style>
+        <p:txBody>
+          <a:bodyPr rtlCol="0" anchor="ctr"/>
+          <a:lstStyle/>
+          <a:p>
+            <a:pPr algn="ctr"/>
+            <a:r>
+              <a:rPr lang="en-US" sz="1600" dirty="0">
+                <a:solidFill>
+                  <a:schemeClr val="tx1"/>
+                </a:solidFill>
+                <a:latin typeface="Times New Roman" panose="02020603050405020304" pitchFamily="18" charset="0"/>
+                <a:cs typeface="Times New Roman" panose="02020603050405020304" pitchFamily="18" charset="0"/>
+              </a:rPr>
+              <a:t>Compare the relevant policies and draw references from them. Especially focus on the strength of the US and HK, and the shortcoming of CHINA.</a:t>
+            </a:r>
+          </a:p>
+        </p:txBody>
+      </p:sp>
+      <p:sp>
+        <p:nvSpPr>
+          <p:cNvPr id="25" name="Rounded Rectangle 24">
+            <a:extLst>
+              <a:ext uri="{FF2B5EF4-FFF2-40B4-BE49-F238E27FC236}">
+                <a16:creationId xmlns:a16="http://schemas.microsoft.com/office/drawing/2014/main" id="{28220D4D-BE6B-4F4A-AB6E-C7BB54727EFA}"/>
+              </a:ext>
+            </a:extLst>
+          </p:cNvPr>
+          <p:cNvSpPr/>
+          <p:nvPr/>
+        </p:nvSpPr>
+        <p:spPr>
+          <a:xfrm>
+            <a:off x="2530261" y="5017558"/>
+            <a:ext cx="7124018" cy="525957"/>
+          </a:xfrm>
+          <a:prstGeom prst="roundRect">
+            <a:avLst>
+              <a:gd name="adj" fmla="val 1247"/>
+            </a:avLst>
+          </a:prstGeom>
+          <a:solidFill>
+            <a:schemeClr val="bg1">
+              <a:lumMod val="85000"/>
+            </a:schemeClr>
+          </a:solidFill>
+          <a:ln w="19050">
+            <a:solidFill>
+              <a:schemeClr val="tx1"/>
+            </a:solidFill>
+          </a:ln>
+        </p:spPr>
+        <p:style>
+          <a:lnRef idx="2">
+            <a:schemeClr val="accent1">
+              <a:shade val="50000"/>
+            </a:schemeClr>
+          </a:lnRef>
+          <a:fillRef idx="1">
+            <a:schemeClr val="accent1"/>
+          </a:fillRef>
+          <a:effectRef idx="0">
+            <a:schemeClr val="accent1"/>
+          </a:effectRef>
+          <a:fontRef idx="minor">
+            <a:schemeClr val="lt1"/>
+          </a:fontRef>
+        </p:style>
+        <p:txBody>
+          <a:bodyPr rtlCol="0" anchor="ctr"/>
+          <a:lstStyle/>
+          <a:p>
+            <a:r>
+              <a:rPr lang="en-CN" sz="1600" b="1" dirty="0">
+                <a:solidFill>
+                  <a:schemeClr val="tx1"/>
+                </a:solidFill>
+                <a:latin typeface="Times New Roman" panose="02020603050405020304" pitchFamily="18" charset="0"/>
+                <a:cs typeface="Times New Roman" panose="02020603050405020304" pitchFamily="18" charset="0"/>
+              </a:rPr>
+              <a:t>Q</a:t>
+            </a:r>
+            <a:r>
+              <a:rPr lang="en-US" altLang="zh-CN" sz="1600" b="1" dirty="0">
+                <a:solidFill>
+                  <a:schemeClr val="tx1"/>
+                </a:solidFill>
+                <a:latin typeface="Times New Roman" panose="02020603050405020304" pitchFamily="18" charset="0"/>
+                <a:cs typeface="Times New Roman" panose="02020603050405020304" pitchFamily="18" charset="0"/>
+              </a:rPr>
+              <a:t>4.</a:t>
+            </a:r>
+            <a:r>
+              <a:rPr lang="en-US" altLang="zh-CN" sz="1600" dirty="0">
+                <a:solidFill>
+                  <a:schemeClr val="tx1"/>
+                </a:solidFill>
+                <a:latin typeface="Times New Roman" panose="02020603050405020304" pitchFamily="18" charset="0"/>
+                <a:cs typeface="Times New Roman" panose="02020603050405020304" pitchFamily="18" charset="0"/>
+              </a:rPr>
+              <a:t> </a:t>
+            </a:r>
+            <a:r>
+              <a:rPr lang="en-US" sz="1600" dirty="0">
+                <a:solidFill>
+                  <a:schemeClr val="tx1"/>
+                </a:solidFill>
+                <a:effectLst/>
+                <a:latin typeface="Times New Roman" panose="02020603050405020304" pitchFamily="18" charset="0"/>
+                <a:ea typeface="Times New Roman" panose="02020603050405020304" pitchFamily="18" charset="0"/>
+              </a:rPr>
+              <a:t>Reforms for financial regulation</a:t>
+            </a:r>
+            <a:r>
+              <a:rPr lang="en-CN" sz="1600" dirty="0">
+                <a:solidFill>
+                  <a:schemeClr val="tx1"/>
+                </a:solidFill>
+                <a:effectLst/>
+              </a:rPr>
+              <a:t> </a:t>
+            </a:r>
+            <a:endParaRPr lang="en-CN" sz="1600" dirty="0">
+              <a:solidFill>
+                <a:schemeClr val="tx1"/>
+              </a:solidFill>
+              <a:effectLst/>
+              <a:latin typeface="Times New Roman" panose="02020603050405020304" pitchFamily="18" charset="0"/>
+              <a:ea typeface="Times New Roman" panose="02020603050405020304" pitchFamily="18" charset="0"/>
+            </a:endParaRPr>
+          </a:p>
+        </p:txBody>
+      </p:sp>
+      <p:sp>
+        <p:nvSpPr>
+          <p:cNvPr id="26" name="Rounded Rectangle 25">
+            <a:extLst>
+              <a:ext uri="{FF2B5EF4-FFF2-40B4-BE49-F238E27FC236}">
+                <a16:creationId xmlns:a16="http://schemas.microsoft.com/office/drawing/2014/main" id="{D1FD799E-F433-194B-968A-D05105C746E7}"/>
+              </a:ext>
+            </a:extLst>
+          </p:cNvPr>
+          <p:cNvSpPr/>
+          <p:nvPr/>
+        </p:nvSpPr>
+        <p:spPr>
+          <a:xfrm>
+            <a:off x="2530261" y="5587630"/>
+            <a:ext cx="7124018" cy="525957"/>
+          </a:xfrm>
+          <a:prstGeom prst="roundRect">
+            <a:avLst>
+              <a:gd name="adj" fmla="val 1247"/>
+            </a:avLst>
+          </a:prstGeom>
+          <a:solidFill>
+            <a:schemeClr val="bg1">
+              <a:lumMod val="85000"/>
+            </a:schemeClr>
+          </a:solidFill>
+          <a:ln w="19050">
+            <a:solidFill>
+              <a:schemeClr val="tx1"/>
+            </a:solidFill>
+          </a:ln>
+        </p:spPr>
+        <p:style>
+          <a:lnRef idx="2">
+            <a:schemeClr val="accent1">
+              <a:shade val="50000"/>
+            </a:schemeClr>
+          </a:lnRef>
+          <a:fillRef idx="1">
+            <a:schemeClr val="accent1"/>
+          </a:fillRef>
+          <a:effectRef idx="0">
+            <a:schemeClr val="accent1"/>
+          </a:effectRef>
+          <a:fontRef idx="minor">
+            <a:schemeClr val="lt1"/>
+          </a:fontRef>
+        </p:style>
+        <p:txBody>
+          <a:bodyPr rtlCol="0" anchor="ctr"/>
+          <a:lstStyle/>
+          <a:p>
+            <a:r>
+              <a:rPr lang="en-CN" sz="1600" b="1" dirty="0">
+                <a:solidFill>
+                  <a:schemeClr val="tx1"/>
+                </a:solidFill>
+                <a:latin typeface="Times New Roman" panose="02020603050405020304" pitchFamily="18" charset="0"/>
+                <a:cs typeface="Times New Roman" panose="02020603050405020304" pitchFamily="18" charset="0"/>
+              </a:rPr>
+              <a:t>Q</a:t>
+            </a:r>
+            <a:r>
+              <a:rPr lang="en-US" altLang="zh-CN" sz="1600" b="1" dirty="0">
+                <a:solidFill>
+                  <a:schemeClr val="tx1"/>
+                </a:solidFill>
+                <a:latin typeface="Times New Roman" panose="02020603050405020304" pitchFamily="18" charset="0"/>
+                <a:cs typeface="Times New Roman" panose="02020603050405020304" pitchFamily="18" charset="0"/>
+              </a:rPr>
+              <a:t>5</a:t>
+            </a:r>
+            <a:r>
+              <a:rPr lang="en-CN" sz="1600" b="1" dirty="0">
+                <a:solidFill>
+                  <a:schemeClr val="tx1"/>
+                </a:solidFill>
+                <a:latin typeface="Times New Roman" panose="02020603050405020304" pitchFamily="18" charset="0"/>
+                <a:cs typeface="Times New Roman" panose="02020603050405020304" pitchFamily="18" charset="0"/>
+              </a:rPr>
+              <a:t>.</a:t>
+            </a:r>
+            <a:r>
+              <a:rPr lang="en-US" altLang="zh-CN" sz="1600" dirty="0">
+                <a:solidFill>
+                  <a:schemeClr val="tx1"/>
+                </a:solidFill>
+                <a:latin typeface="Times New Roman" panose="02020603050405020304" pitchFamily="18" charset="0"/>
+                <a:cs typeface="Times New Roman" panose="02020603050405020304" pitchFamily="18" charset="0"/>
+              </a:rPr>
+              <a:t> </a:t>
+            </a:r>
+            <a:r>
+              <a:rPr lang="en-US" sz="1600" dirty="0">
+                <a:solidFill>
+                  <a:schemeClr val="tx1"/>
+                </a:solidFill>
+                <a:effectLst/>
+                <a:latin typeface="Times New Roman" panose="02020603050405020304" pitchFamily="18" charset="0"/>
+                <a:ea typeface="Times New Roman" panose="02020603050405020304" pitchFamily="18" charset="0"/>
+              </a:rPr>
+              <a:t>Reforms to make Chinese capital markets more efficient and safer </a:t>
+            </a:r>
+            <a:endParaRPr lang="en-CN" sz="1600" dirty="0">
+              <a:solidFill>
+                <a:schemeClr val="tx1"/>
+              </a:solidFill>
+              <a:effectLst/>
+              <a:latin typeface="Times New Roman" panose="02020603050405020304" pitchFamily="18" charset="0"/>
+              <a:ea typeface="Times New Roman" panose="02020603050405020304" pitchFamily="18" charset="0"/>
+            </a:endParaRPr>
+          </a:p>
+        </p:txBody>
+      </p:sp>
     </p:spTree>
     <p:extLst>
       <p:ext uri="{BB962C8B-B14F-4D97-AF65-F5344CB8AC3E}">
@@ -30041,12 +32736,266 @@
           <a:chExt cx="0" cy="0"/>
         </a:xfrm>
       </p:grpSpPr>
+      <p:sp>
+        <p:nvSpPr>
+          <p:cNvPr id="31" name="Rectangle 30">
+            <a:extLst>
+              <a:ext uri="{FF2B5EF4-FFF2-40B4-BE49-F238E27FC236}">
+                <a16:creationId xmlns:a16="http://schemas.microsoft.com/office/drawing/2014/main" id="{2A0DF829-D113-6D40-8B01-BE77E79641B2}"/>
+              </a:ext>
+            </a:extLst>
+          </p:cNvPr>
+          <p:cNvSpPr/>
+          <p:nvPr/>
+        </p:nvSpPr>
+        <p:spPr>
+          <a:xfrm>
+            <a:off x="1538571" y="747376"/>
+            <a:ext cx="5755608" cy="4717509"/>
+          </a:xfrm>
+          <a:prstGeom prst="rect">
+            <a:avLst/>
+          </a:prstGeom>
+          <a:solidFill>
+            <a:schemeClr val="accent1">
+              <a:alpha val="20000"/>
+            </a:schemeClr>
+          </a:solidFill>
+          <a:ln w="12700">
+            <a:solidFill>
+              <a:schemeClr val="tx1"/>
+            </a:solidFill>
+            <a:prstDash val="dash"/>
+          </a:ln>
+        </p:spPr>
+        <p:style>
+          <a:lnRef idx="2">
+            <a:schemeClr val="accent1">
+              <a:shade val="50000"/>
+            </a:schemeClr>
+          </a:lnRef>
+          <a:fillRef idx="1">
+            <a:schemeClr val="accent1"/>
+          </a:fillRef>
+          <a:effectRef idx="0">
+            <a:schemeClr val="accent1"/>
+          </a:effectRef>
+          <a:fontRef idx="minor">
+            <a:schemeClr val="lt1"/>
+          </a:fontRef>
+        </p:style>
+        <p:txBody>
+          <a:bodyPr rtlCol="0" anchor="ctr"/>
+          <a:lstStyle/>
+          <a:p>
+            <a:pPr algn="ctr"/>
+            <a:r>
+              <a:rPr lang="en-US" b="1" dirty="0">
+                <a:solidFill>
+                  <a:schemeClr val="accent1"/>
+                </a:solidFill>
+                <a:latin typeface="Times New Roman" panose="02020603050405020304" pitchFamily="18" charset="0"/>
+                <a:ea typeface="DengXian Light" panose="02010600030101010101" pitchFamily="2" charset="-122"/>
+              </a:rPr>
+              <a:t>G</a:t>
+            </a:r>
+            <a:r>
+              <a:rPr lang="en-US" sz="1800" b="1" dirty="0">
+                <a:solidFill>
+                  <a:schemeClr val="accent1"/>
+                </a:solidFill>
+                <a:effectLst/>
+                <a:latin typeface="Times New Roman" panose="02020603050405020304" pitchFamily="18" charset="0"/>
+                <a:ea typeface="DengXian Light" panose="02010600030101010101" pitchFamily="2" charset="-122"/>
+              </a:rPr>
+              <a:t>rew </a:t>
+            </a:r>
+            <a:r>
+              <a:rPr lang="en-US" b="1" dirty="0">
+                <a:solidFill>
+                  <a:schemeClr val="accent1"/>
+                </a:solidFill>
+                <a:latin typeface="Times New Roman" panose="02020603050405020304" pitchFamily="18" charset="0"/>
+                <a:ea typeface="DengXian Light" panose="02010600030101010101" pitchFamily="2" charset="-122"/>
+              </a:rPr>
+              <a:t>S</a:t>
+            </a:r>
+            <a:r>
+              <a:rPr lang="en-US" sz="1800" b="1" dirty="0">
+                <a:solidFill>
+                  <a:schemeClr val="accent1"/>
+                </a:solidFill>
+                <a:effectLst/>
+                <a:latin typeface="Times New Roman" panose="02020603050405020304" pitchFamily="18" charset="0"/>
+                <a:ea typeface="DengXian Light" panose="02010600030101010101" pitchFamily="2" charset="-122"/>
+              </a:rPr>
+              <a:t>teadily</a:t>
+            </a:r>
+            <a:r>
+              <a:rPr lang="en-CN" b="1" dirty="0">
+                <a:solidFill>
+                  <a:schemeClr val="accent1"/>
+                </a:solidFill>
+                <a:effectLst/>
+              </a:rPr>
+              <a:t> </a:t>
+            </a:r>
+            <a:endParaRPr lang="en-CN" b="1" dirty="0">
+              <a:solidFill>
+                <a:schemeClr val="accent1"/>
+              </a:solidFill>
+            </a:endParaRPr>
+          </a:p>
+        </p:txBody>
+      </p:sp>
+      <p:sp>
+        <p:nvSpPr>
+          <p:cNvPr id="32" name="Rectangle 31">
+            <a:extLst>
+              <a:ext uri="{FF2B5EF4-FFF2-40B4-BE49-F238E27FC236}">
+                <a16:creationId xmlns:a16="http://schemas.microsoft.com/office/drawing/2014/main" id="{E618CE55-F2E1-9C49-97ED-BAFAC5C9133C}"/>
+              </a:ext>
+            </a:extLst>
+          </p:cNvPr>
+          <p:cNvSpPr/>
+          <p:nvPr/>
+        </p:nvSpPr>
+        <p:spPr>
+          <a:xfrm>
+            <a:off x="7294179" y="747376"/>
+            <a:ext cx="1047963" cy="4717509"/>
+          </a:xfrm>
+          <a:prstGeom prst="rect">
+            <a:avLst/>
+          </a:prstGeom>
+          <a:solidFill>
+            <a:schemeClr val="accent4">
+              <a:alpha val="20000"/>
+            </a:schemeClr>
+          </a:solidFill>
+          <a:ln w="12700">
+            <a:solidFill>
+              <a:schemeClr val="tx1"/>
+            </a:solidFill>
+            <a:prstDash val="dash"/>
+          </a:ln>
+        </p:spPr>
+        <p:style>
+          <a:lnRef idx="2">
+            <a:schemeClr val="accent1">
+              <a:shade val="50000"/>
+            </a:schemeClr>
+          </a:lnRef>
+          <a:fillRef idx="1">
+            <a:schemeClr val="accent1"/>
+          </a:fillRef>
+          <a:effectRef idx="0">
+            <a:schemeClr val="accent1"/>
+          </a:effectRef>
+          <a:fontRef idx="minor">
+            <a:schemeClr val="lt1"/>
+          </a:fontRef>
+        </p:style>
+        <p:txBody>
+          <a:bodyPr rtlCol="0" anchor="ctr"/>
+          <a:lstStyle/>
+          <a:p>
+            <a:pPr algn="ctr"/>
+            <a:r>
+              <a:rPr lang="en-US" b="1" dirty="0">
+                <a:solidFill>
+                  <a:schemeClr val="accent4"/>
+                </a:solidFill>
+                <a:latin typeface="Times New Roman" panose="02020603050405020304" pitchFamily="18" charset="0"/>
+                <a:ea typeface="DengXian Light" panose="02010600030101010101" pitchFamily="2" charset="-122"/>
+              </a:rPr>
+              <a:t>Sharp Decline </a:t>
+            </a:r>
+            <a:endParaRPr lang="en-CN" b="1" dirty="0">
+              <a:solidFill>
+                <a:schemeClr val="accent4"/>
+              </a:solidFill>
+            </a:endParaRPr>
+          </a:p>
+        </p:txBody>
+      </p:sp>
+      <p:sp>
+        <p:nvSpPr>
+          <p:cNvPr id="33" name="Rectangle 32">
+            <a:extLst>
+              <a:ext uri="{FF2B5EF4-FFF2-40B4-BE49-F238E27FC236}">
+                <a16:creationId xmlns:a16="http://schemas.microsoft.com/office/drawing/2014/main" id="{CDEA91F3-A5DE-134A-98AE-75B97BBC2AB3}"/>
+              </a:ext>
+            </a:extLst>
+          </p:cNvPr>
+          <p:cNvSpPr/>
+          <p:nvPr/>
+        </p:nvSpPr>
+        <p:spPr>
+          <a:xfrm>
+            <a:off x="8342142" y="747376"/>
+            <a:ext cx="3357727" cy="4717509"/>
+          </a:xfrm>
+          <a:prstGeom prst="rect">
+            <a:avLst/>
+          </a:prstGeom>
+          <a:solidFill>
+            <a:schemeClr val="bg2">
+              <a:alpha val="20000"/>
+            </a:schemeClr>
+          </a:solidFill>
+          <a:ln w="12700">
+            <a:solidFill>
+              <a:schemeClr val="tx1"/>
+            </a:solidFill>
+            <a:prstDash val="dash"/>
+          </a:ln>
+        </p:spPr>
+        <p:style>
+          <a:lnRef idx="2">
+            <a:schemeClr val="accent1">
+              <a:shade val="50000"/>
+            </a:schemeClr>
+          </a:lnRef>
+          <a:fillRef idx="1">
+            <a:schemeClr val="accent1"/>
+          </a:fillRef>
+          <a:effectRef idx="0">
+            <a:schemeClr val="accent1"/>
+          </a:effectRef>
+          <a:fontRef idx="minor">
+            <a:schemeClr val="lt1"/>
+          </a:fontRef>
+        </p:style>
+        <p:txBody>
+          <a:bodyPr rtlCol="0" anchor="ctr"/>
+          <a:lstStyle/>
+          <a:p>
+            <a:pPr algn="ctr"/>
+            <a:r>
+              <a:rPr lang="en-US" b="1" dirty="0">
+                <a:solidFill>
+                  <a:schemeClr val="tx1"/>
+                </a:solidFill>
+                <a:latin typeface="Times New Roman" panose="02020603050405020304" pitchFamily="18" charset="0"/>
+                <a:ea typeface="DengXian Light" panose="02010600030101010101" pitchFamily="2" charset="-122"/>
+              </a:rPr>
+              <a:t>Reserve Stabilized </a:t>
+            </a:r>
+            <a:endParaRPr lang="en-CN" b="1" dirty="0">
+              <a:solidFill>
+                <a:schemeClr val="tx1"/>
+              </a:solidFill>
+            </a:endParaRPr>
+          </a:p>
+        </p:txBody>
+      </p:sp>
       <p:grpSp>
         <p:nvGrpSpPr>
-          <p:cNvPr id="38" name="Group 37">
+          <p:cNvPr id="28" name="Group 27">
             <a:extLst>
               <a:ext uri="{FF2B5EF4-FFF2-40B4-BE49-F238E27FC236}">
-                <a16:creationId xmlns:a16="http://schemas.microsoft.com/office/drawing/2014/main" id="{507D8182-DBE3-6D44-8D3A-8D56FF42AB60}"/>
+                <a16:creationId xmlns:a16="http://schemas.microsoft.com/office/drawing/2014/main" id="{00CE2E52-C9F9-8743-82C5-16E27AFF9CED}"/>
               </a:ext>
             </a:extLst>
           </p:cNvPr>
@@ -30057,408 +33006,107 @@
           <a:xfrm>
             <a:off x="492130" y="747376"/>
             <a:ext cx="11207739" cy="5363247"/>
-            <a:chOff x="723358" y="1083535"/>
-            <a:chExt cx="11207739" cy="5363247"/>
+            <a:chOff x="590123" y="1631731"/>
+            <a:chExt cx="11207739" cy="3594538"/>
           </a:xfrm>
         </p:grpSpPr>
-        <p:grpSp>
-          <p:nvGrpSpPr>
-            <p:cNvPr id="9" name="Group 8">
+        <p:graphicFrame>
+          <p:nvGraphicFramePr>
+            <p:cNvPr id="29" name="Chart 28">
               <a:extLst>
                 <a:ext uri="{FF2B5EF4-FFF2-40B4-BE49-F238E27FC236}">
-                  <a16:creationId xmlns:a16="http://schemas.microsoft.com/office/drawing/2014/main" id="{8377DEAD-FEAF-4845-9681-D643AAB3EDA9}"/>
+                  <a16:creationId xmlns:a16="http://schemas.microsoft.com/office/drawing/2014/main" id="{AEEB526E-1F66-D74B-8441-D16F0D8AD62C}"/>
                 </a:ext>
               </a:extLst>
             </p:cNvPr>
-            <p:cNvGrpSpPr/>
-            <p:nvPr/>
-          </p:nvGrpSpPr>
-          <p:grpSpPr>
-            <a:xfrm>
-              <a:off x="723358" y="1083535"/>
-              <a:ext cx="11207739" cy="5363247"/>
-              <a:chOff x="590123" y="1631731"/>
-              <a:chExt cx="11207739" cy="3594538"/>
-            </a:xfrm>
-          </p:grpSpPr>
-          <p:graphicFrame>
-            <p:nvGraphicFramePr>
-              <p:cNvPr id="4" name="Chart 3">
-                <a:extLst>
-                  <a:ext uri="{FF2B5EF4-FFF2-40B4-BE49-F238E27FC236}">
-                    <a16:creationId xmlns:a16="http://schemas.microsoft.com/office/drawing/2014/main" id="{9C0A5757-E4DC-A640-8DCE-5BA14D58EB7A}"/>
-                  </a:ext>
-                </a:extLst>
-              </p:cNvPr>
-              <p:cNvGraphicFramePr>
-                <a:graphicFrameLocks/>
-              </p:cNvGraphicFramePr>
-              <p:nvPr>
-                <p:extLst>
-                  <p:ext uri="{D42A27DB-BD31-4B8C-83A1-F6EECF244321}">
-                    <p14:modId xmlns:p14="http://schemas.microsoft.com/office/powerpoint/2010/main" val="4084526690"/>
-                  </p:ext>
-                </p:extLst>
-              </p:nvPr>
-            </p:nvGraphicFramePr>
-            <p:xfrm>
-              <a:off x="1082566" y="1631731"/>
-              <a:ext cx="10715296" cy="3594538"/>
-            </p:xfrm>
-            <a:graphic>
-              <a:graphicData uri="http://schemas.openxmlformats.org/drawingml/2006/chart">
-                <c:chart xmlns:c="http://schemas.openxmlformats.org/drawingml/2006/chart" xmlns:r="http://schemas.openxmlformats.org/officeDocument/2006/relationships" r:id="rId2"/>
-              </a:graphicData>
-            </a:graphic>
-          </p:graphicFrame>
-          <p:sp>
-            <p:nvSpPr>
-              <p:cNvPr id="5" name="TextBox 4">
-                <a:extLst>
-                  <a:ext uri="{FF2B5EF4-FFF2-40B4-BE49-F238E27FC236}">
-                    <a16:creationId xmlns:a16="http://schemas.microsoft.com/office/drawing/2014/main" id="{0628CDDB-7231-824E-B7D9-725F9CCDB56E}"/>
-                  </a:ext>
-                </a:extLst>
-              </p:cNvPr>
-              <p:cNvSpPr txBox="1"/>
-              <p:nvPr/>
-            </p:nvSpPr>
-            <p:spPr>
-              <a:xfrm>
-                <a:off x="590123" y="1631731"/>
-                <a:ext cx="553998" cy="3108435"/>
-              </a:xfrm>
-              <a:prstGeom prst="rect">
-                <a:avLst/>
-              </a:prstGeom>
-              <a:noFill/>
-            </p:spPr>
-            <p:txBody>
-              <a:bodyPr vert="vert270" wrap="square" rtlCol="0">
-                <a:spAutoFit/>
-              </a:bodyPr>
-              <a:lstStyle/>
-              <a:p>
-                <a:pPr algn="ctr"/>
-                <a:r>
-                  <a:rPr lang="en-US" sz="1200" b="1" dirty="0">
-                    <a:effectLst/>
-                    <a:latin typeface="Times New Roman" panose="02020603050405020304" pitchFamily="18" charset="0"/>
-                    <a:ea typeface="Times New Roman" panose="02020603050405020304" pitchFamily="18" charset="0"/>
-                  </a:rPr>
-                  <a:t>China’s Official Foreign Exchange </a:t>
-                </a:r>
-                <a:r>
-                  <a:rPr lang="en-US" altLang="zh-CN" sz="1200" b="1" dirty="0">
-                    <a:effectLst/>
-                    <a:latin typeface="Times New Roman" panose="02020603050405020304" pitchFamily="18" charset="0"/>
-                    <a:ea typeface="Times New Roman" panose="02020603050405020304" pitchFamily="18" charset="0"/>
-                  </a:rPr>
-                  <a:t>R</a:t>
-                </a:r>
-                <a:r>
-                  <a:rPr lang="en-US" sz="1200" b="1" dirty="0">
-                    <a:effectLst/>
-                    <a:latin typeface="Times New Roman" panose="02020603050405020304" pitchFamily="18" charset="0"/>
-                    <a:ea typeface="Times New Roman" panose="02020603050405020304" pitchFamily="18" charset="0"/>
-                  </a:rPr>
-                  <a:t>eserves</a:t>
-                </a:r>
-              </a:p>
-              <a:p>
-                <a:pPr algn="ctr"/>
-                <a:r>
-                  <a:rPr lang="en-US" sz="1200" b="1" dirty="0">
-                    <a:effectLst/>
-                    <a:latin typeface="Times New Roman" panose="02020603050405020304" pitchFamily="18" charset="0"/>
-                    <a:ea typeface="Times New Roman" panose="02020603050405020304" pitchFamily="18" charset="0"/>
-                  </a:rPr>
-                  <a:t>(USD Hundred Million) </a:t>
-                </a:r>
-                <a:endParaRPr lang="en-CN" sz="1200" b="1" dirty="0">
-                  <a:latin typeface="Times New Roman" panose="02020603050405020304" pitchFamily="18" charset="0"/>
-                  <a:cs typeface="Times New Roman" panose="02020603050405020304" pitchFamily="18" charset="0"/>
-                </a:endParaRPr>
-              </a:p>
-            </p:txBody>
-          </p:sp>
-        </p:grpSp>
+            <p:cNvGraphicFramePr>
+              <a:graphicFrameLocks/>
+            </p:cNvGraphicFramePr>
+            <p:nvPr>
+              <p:extLst>
+                <p:ext uri="{D42A27DB-BD31-4B8C-83A1-F6EECF244321}">
+                  <p14:modId xmlns:p14="http://schemas.microsoft.com/office/powerpoint/2010/main" val="3998169891"/>
+                </p:ext>
+              </p:extLst>
+            </p:nvPr>
+          </p:nvGraphicFramePr>
+          <p:xfrm>
+            <a:off x="1082566" y="1631731"/>
+            <a:ext cx="10715296" cy="3594538"/>
+          </p:xfrm>
+          <a:graphic>
+            <a:graphicData uri="http://schemas.openxmlformats.org/drawingml/2006/chart">
+              <c:chart xmlns:c="http://schemas.openxmlformats.org/drawingml/2006/chart" xmlns:r="http://schemas.openxmlformats.org/officeDocument/2006/relationships" r:id="rId2"/>
+            </a:graphicData>
+          </a:graphic>
+        </p:graphicFrame>
         <p:sp>
           <p:nvSpPr>
-            <p:cNvPr id="14" name="Rectangle 13">
+            <p:cNvPr id="30" name="TextBox 29">
               <a:extLst>
                 <a:ext uri="{FF2B5EF4-FFF2-40B4-BE49-F238E27FC236}">
-                  <a16:creationId xmlns:a16="http://schemas.microsoft.com/office/drawing/2014/main" id="{FDAF5874-0B55-3C4C-8D92-A0F9B7986985}"/>
+                  <a16:creationId xmlns:a16="http://schemas.microsoft.com/office/drawing/2014/main" id="{D96EC23C-AA6E-6F42-A859-E92198B1E4D8}"/>
                 </a:ext>
               </a:extLst>
             </p:cNvPr>
-            <p:cNvSpPr/>
+            <p:cNvSpPr txBox="1"/>
             <p:nvPr/>
           </p:nvSpPr>
           <p:spPr>
             <a:xfrm>
-              <a:off x="1769799" y="1083535"/>
-              <a:ext cx="5755608" cy="4771608"/>
+              <a:off x="590123" y="1631731"/>
+              <a:ext cx="553998" cy="3108435"/>
             </a:xfrm>
             <a:prstGeom prst="rect">
               <a:avLst/>
             </a:prstGeom>
-            <a:solidFill>
-              <a:schemeClr val="accent5">
-                <a:lumMod val="20000"/>
-                <a:lumOff val="80000"/>
-                <a:alpha val="33929"/>
-              </a:schemeClr>
-            </a:solidFill>
-            <a:ln w="19050">
-              <a:solidFill>
-                <a:schemeClr val="tx1"/>
-              </a:solidFill>
-              <a:prstDash val="dash"/>
-            </a:ln>
+            <a:noFill/>
           </p:spPr>
-          <p:style>
-            <a:lnRef idx="2">
-              <a:schemeClr val="accent1">
-                <a:shade val="50000"/>
-              </a:schemeClr>
-            </a:lnRef>
-            <a:fillRef idx="1">
-              <a:schemeClr val="accent1"/>
-            </a:fillRef>
-            <a:effectRef idx="0">
-              <a:schemeClr val="accent1"/>
-            </a:effectRef>
-            <a:fontRef idx="minor">
-              <a:schemeClr val="lt1"/>
-            </a:fontRef>
-          </p:style>
           <p:txBody>
-            <a:bodyPr rtlCol="0" anchor="ctr"/>
+            <a:bodyPr vert="vert270" wrap="square" rtlCol="0">
+              <a:spAutoFit/>
+            </a:bodyPr>
             <a:lstStyle/>
             <a:p>
               <a:pPr algn="ctr"/>
               <a:r>
-                <a:rPr lang="en-US" b="1" dirty="0">
-                  <a:solidFill>
-                    <a:schemeClr val="accent5">
-                      <a:lumMod val="50000"/>
-                    </a:schemeClr>
-                  </a:solidFill>
+                <a:rPr lang="en-US" sz="1200" b="1" dirty="0">
+                  <a:effectLst/>
                   <a:latin typeface="Times New Roman" panose="02020603050405020304" pitchFamily="18" charset="0"/>
-                  <a:ea typeface="DengXian Light" panose="02010600030101010101" pitchFamily="2" charset="-122"/>
+                  <a:ea typeface="Times New Roman" panose="02020603050405020304" pitchFamily="18" charset="0"/>
                 </a:rPr>
-                <a:t>G</a:t>
+                <a:t>China’s Official Foreign Exchange </a:t>
               </a:r>
               <a:r>
-                <a:rPr lang="en-US" sz="1800" b="1" dirty="0">
-                  <a:solidFill>
-                    <a:schemeClr val="accent5">
-                      <a:lumMod val="50000"/>
-                    </a:schemeClr>
-                  </a:solidFill>
+                <a:rPr lang="en-US" altLang="zh-CN" sz="1200" b="1" dirty="0">
                   <a:effectLst/>
                   <a:latin typeface="Times New Roman" panose="02020603050405020304" pitchFamily="18" charset="0"/>
-                  <a:ea typeface="DengXian Light" panose="02010600030101010101" pitchFamily="2" charset="-122"/>
+                  <a:ea typeface="Times New Roman" panose="02020603050405020304" pitchFamily="18" charset="0"/>
                 </a:rPr>
-                <a:t>rew </a:t>
+                <a:t>R</a:t>
               </a:r>
               <a:r>
-                <a:rPr lang="en-US" b="1" dirty="0">
-                  <a:solidFill>
-                    <a:schemeClr val="accent5">
-                      <a:lumMod val="50000"/>
-                    </a:schemeClr>
-                  </a:solidFill>
-                  <a:latin typeface="Times New Roman" panose="02020603050405020304" pitchFamily="18" charset="0"/>
-                  <a:ea typeface="DengXian Light" panose="02010600030101010101" pitchFamily="2" charset="-122"/>
-                </a:rPr>
-                <a:t>S</a:t>
-              </a:r>
-              <a:r>
-                <a:rPr lang="en-US" sz="1800" b="1" dirty="0">
-                  <a:solidFill>
-                    <a:schemeClr val="accent5">
-                      <a:lumMod val="50000"/>
-                    </a:schemeClr>
-                  </a:solidFill>
+                <a:rPr lang="en-US" sz="1200" b="1" dirty="0">
                   <a:effectLst/>
                   <a:latin typeface="Times New Roman" panose="02020603050405020304" pitchFamily="18" charset="0"/>
-                  <a:ea typeface="DengXian Light" panose="02010600030101010101" pitchFamily="2" charset="-122"/>
+                  <a:ea typeface="Times New Roman" panose="02020603050405020304" pitchFamily="18" charset="0"/>
                 </a:rPr>
-                <a:t>teadily</a:t>
+                <a:t>eserves</a:t>
               </a:r>
-              <a:r>
-                <a:rPr lang="en-CN" b="1" dirty="0">
-                  <a:solidFill>
-                    <a:schemeClr val="accent5">
-                      <a:lumMod val="50000"/>
-                    </a:schemeClr>
-                  </a:solidFill>
-                  <a:effectLst/>
-                </a:rPr>
-                <a:t> </a:t>
-              </a:r>
-              <a:endParaRPr lang="en-CN" b="1" dirty="0">
-                <a:solidFill>
-                  <a:schemeClr val="accent5">
-                    <a:lumMod val="50000"/>
-                  </a:schemeClr>
-                </a:solidFill>
-              </a:endParaRPr>
             </a:p>
-          </p:txBody>
-        </p:sp>
-        <p:sp>
-          <p:nvSpPr>
-            <p:cNvPr id="15" name="Rectangle 14">
-              <a:extLst>
-                <a:ext uri="{FF2B5EF4-FFF2-40B4-BE49-F238E27FC236}">
-                  <a16:creationId xmlns:a16="http://schemas.microsoft.com/office/drawing/2014/main" id="{586A8B45-A8D8-8B4C-8181-FC19E4449134}"/>
-                </a:ext>
-              </a:extLst>
-            </p:cNvPr>
-            <p:cNvSpPr/>
-            <p:nvPr/>
-          </p:nvSpPr>
-          <p:spPr>
-            <a:xfrm>
-              <a:off x="7525407" y="1083535"/>
-              <a:ext cx="1047963" cy="4771608"/>
-            </a:xfrm>
-            <a:prstGeom prst="rect">
-              <a:avLst/>
-            </a:prstGeom>
-            <a:solidFill>
-              <a:schemeClr val="accent6">
-                <a:lumMod val="20000"/>
-                <a:lumOff val="80000"/>
-                <a:alpha val="33929"/>
-              </a:schemeClr>
-            </a:solidFill>
-            <a:ln w="19050">
-              <a:solidFill>
-                <a:schemeClr val="tx1"/>
-              </a:solidFill>
-              <a:prstDash val="dash"/>
-            </a:ln>
-          </p:spPr>
-          <p:style>
-            <a:lnRef idx="2">
-              <a:schemeClr val="accent1">
-                <a:shade val="50000"/>
-              </a:schemeClr>
-            </a:lnRef>
-            <a:fillRef idx="1">
-              <a:schemeClr val="accent1"/>
-            </a:fillRef>
-            <a:effectRef idx="0">
-              <a:schemeClr val="accent1"/>
-            </a:effectRef>
-            <a:fontRef idx="minor">
-              <a:schemeClr val="lt1"/>
-            </a:fontRef>
-          </p:style>
-          <p:txBody>
-            <a:bodyPr rtlCol="0" anchor="ctr"/>
-            <a:lstStyle/>
             <a:p>
               <a:pPr algn="ctr"/>
               <a:r>
-                <a:rPr lang="en-US" b="1" dirty="0">
-                  <a:solidFill>
-                    <a:schemeClr val="accent6">
-                      <a:lumMod val="50000"/>
-                    </a:schemeClr>
-                  </a:solidFill>
+                <a:rPr lang="en-US" sz="1200" b="1" dirty="0">
+                  <a:effectLst/>
                   <a:latin typeface="Times New Roman" panose="02020603050405020304" pitchFamily="18" charset="0"/>
-                  <a:ea typeface="DengXian Light" panose="02010600030101010101" pitchFamily="2" charset="-122"/>
+                  <a:ea typeface="Times New Roman" panose="02020603050405020304" pitchFamily="18" charset="0"/>
                 </a:rPr>
-                <a:t>Sharp Decline </a:t>
+                <a:t>(USD Hundred Million) </a:t>
               </a:r>
-              <a:endParaRPr lang="en-CN" b="1" dirty="0">
-                <a:solidFill>
-                  <a:schemeClr val="accent6">
-                    <a:lumMod val="50000"/>
-                  </a:schemeClr>
-                </a:solidFill>
-              </a:endParaRPr>
-            </a:p>
-          </p:txBody>
-        </p:sp>
-        <p:sp>
-          <p:nvSpPr>
-            <p:cNvPr id="16" name="Rectangle 15">
-              <a:extLst>
-                <a:ext uri="{FF2B5EF4-FFF2-40B4-BE49-F238E27FC236}">
-                  <a16:creationId xmlns:a16="http://schemas.microsoft.com/office/drawing/2014/main" id="{DA0D4B33-C1D3-8D48-8E71-A3C6E78405C7}"/>
-                </a:ext>
-              </a:extLst>
-            </p:cNvPr>
-            <p:cNvSpPr/>
-            <p:nvPr/>
-          </p:nvSpPr>
-          <p:spPr>
-            <a:xfrm>
-              <a:off x="8573370" y="1083535"/>
-              <a:ext cx="3357727" cy="4771608"/>
-            </a:xfrm>
-            <a:prstGeom prst="rect">
-              <a:avLst/>
-            </a:prstGeom>
-            <a:solidFill>
-              <a:schemeClr val="accent4">
-                <a:lumMod val="20000"/>
-                <a:lumOff val="80000"/>
-                <a:alpha val="33929"/>
-              </a:schemeClr>
-            </a:solidFill>
-            <a:ln w="19050">
-              <a:solidFill>
-                <a:schemeClr val="tx1"/>
-              </a:solidFill>
-              <a:prstDash val="dash"/>
-            </a:ln>
-          </p:spPr>
-          <p:style>
-            <a:lnRef idx="2">
-              <a:schemeClr val="accent1">
-                <a:shade val="50000"/>
-              </a:schemeClr>
-            </a:lnRef>
-            <a:fillRef idx="1">
-              <a:schemeClr val="accent1"/>
-            </a:fillRef>
-            <a:effectRef idx="0">
-              <a:schemeClr val="accent1"/>
-            </a:effectRef>
-            <a:fontRef idx="minor">
-              <a:schemeClr val="lt1"/>
-            </a:fontRef>
-          </p:style>
-          <p:txBody>
-            <a:bodyPr rtlCol="0" anchor="ctr"/>
-            <a:lstStyle/>
-            <a:p>
-              <a:pPr algn="ctr"/>
-              <a:r>
-                <a:rPr lang="en-US" b="1" dirty="0">
-                  <a:solidFill>
-                    <a:schemeClr val="accent4">
-                      <a:lumMod val="50000"/>
-                    </a:schemeClr>
-                  </a:solidFill>
-                  <a:latin typeface="Times New Roman" panose="02020603050405020304" pitchFamily="18" charset="0"/>
-                  <a:ea typeface="DengXian Light" panose="02010600030101010101" pitchFamily="2" charset="-122"/>
-                </a:rPr>
-                <a:t>Reserve Stabilized </a:t>
-              </a:r>
-              <a:endParaRPr lang="en-CN" b="1" dirty="0">
-                <a:solidFill>
-                  <a:schemeClr val="accent4">
-                    <a:lumMod val="50000"/>
-                  </a:schemeClr>
-                </a:solidFill>
+              <a:endParaRPr lang="en-CN" sz="1200" b="1" dirty="0">
+                <a:latin typeface="Times New Roman" panose="02020603050405020304" pitchFamily="18" charset="0"/>
+                <a:cs typeface="Times New Roman" panose="02020603050405020304" pitchFamily="18" charset="0"/>
               </a:endParaRPr>
             </a:p>
           </p:txBody>
@@ -30494,42 +33142,12 @@
           <a:chExt cx="0" cy="0"/>
         </a:xfrm>
       </p:grpSpPr>
-      <p:graphicFrame>
-        <p:nvGraphicFramePr>
-          <p:cNvPr id="8" name="Chart 7">
+      <p:sp>
+        <p:nvSpPr>
+          <p:cNvPr id="25" name="Rectangle 24">
             <a:extLst>
               <a:ext uri="{FF2B5EF4-FFF2-40B4-BE49-F238E27FC236}">
-                <a16:creationId xmlns:a16="http://schemas.microsoft.com/office/drawing/2014/main" id="{3E04ED6C-E209-CC4B-8400-64BB4E58597F}"/>
-              </a:ext>
-            </a:extLst>
-          </p:cNvPr>
-          <p:cNvGraphicFramePr>
-            <a:graphicFrameLocks/>
-          </p:cNvGraphicFramePr>
-          <p:nvPr>
-            <p:extLst>
-              <p:ext uri="{D42A27DB-BD31-4B8C-83A1-F6EECF244321}">
-                <p14:modId xmlns:p14="http://schemas.microsoft.com/office/powerpoint/2010/main" val="4127177296"/>
-              </p:ext>
-            </p:extLst>
-          </p:nvPr>
-        </p:nvGraphicFramePr>
-        <p:xfrm>
-          <a:off x="0" y="0"/>
-          <a:ext cx="12192000" cy="6858000"/>
-        </p:xfrm>
-        <a:graphic>
-          <a:graphicData uri="http://schemas.openxmlformats.org/drawingml/2006/chart">
-            <c:chart xmlns:c="http://schemas.openxmlformats.org/drawingml/2006/chart" xmlns:r="http://schemas.openxmlformats.org/officeDocument/2006/relationships" r:id="rId3"/>
-          </a:graphicData>
-        </a:graphic>
-      </p:graphicFrame>
-      <p:sp>
-        <p:nvSpPr>
-          <p:cNvPr id="10" name="Rectangle 9">
-            <a:extLst>
-              <a:ext uri="{FF2B5EF4-FFF2-40B4-BE49-F238E27FC236}">
-                <a16:creationId xmlns:a16="http://schemas.microsoft.com/office/drawing/2014/main" id="{FE958C47-54AB-424D-AD7D-870C030AC379}"/>
+                <a16:creationId xmlns:a16="http://schemas.microsoft.com/office/drawing/2014/main" id="{ACB15E94-82E6-564B-AB87-6B7966BBFF8F}"/>
               </a:ext>
             </a:extLst>
           </p:cNvPr>
@@ -30538,18 +33156,18 @@
         </p:nvSpPr>
         <p:spPr>
           <a:xfrm>
-            <a:off x="519068" y="0"/>
-            <a:ext cx="4441815" cy="5633544"/>
+            <a:off x="528801" y="0"/>
+            <a:ext cx="4441815" cy="5583378"/>
           </a:xfrm>
           <a:prstGeom prst="rect">
             <a:avLst/>
           </a:prstGeom>
           <a:solidFill>
-            <a:schemeClr val="accent5">
+            <a:schemeClr val="accent1">
               <a:alpha val="20000"/>
             </a:schemeClr>
           </a:solidFill>
-          <a:ln w="19050">
+          <a:ln w="12700">
             <a:solidFill>
               <a:schemeClr val="tx1"/>
             </a:solidFill>
@@ -30573,100 +33191,14 @@
           </a:fontRef>
         </p:style>
         <p:txBody>
-          <a:bodyPr rtlCol="0" anchor="ctr"/>
-          <a:lstStyle/>
-          <a:p>
-            <a:pPr algn="ctr"/>
-            <a:endParaRPr lang="en-CN" b="1" dirty="0">
-              <a:solidFill>
-                <a:schemeClr val="accent5">
-                  <a:lumMod val="50000"/>
-                </a:schemeClr>
-              </a:solidFill>
-            </a:endParaRPr>
-          </a:p>
-        </p:txBody>
-      </p:sp>
-      <p:cxnSp>
-        <p:nvCxnSpPr>
-          <p:cNvPr id="3" name="Straight Arrow Connector 2">
-            <a:extLst>
-              <a:ext uri="{FF2B5EF4-FFF2-40B4-BE49-F238E27FC236}">
-                <a16:creationId xmlns:a16="http://schemas.microsoft.com/office/drawing/2014/main" id="{3E1C15A0-8504-B14F-9C34-8B7881BB49C4}"/>
-              </a:ext>
-            </a:extLst>
-          </p:cNvPr>
-          <p:cNvCxnSpPr/>
-          <p:nvPr/>
-        </p:nvCxnSpPr>
-        <p:spPr>
-          <a:xfrm>
-            <a:off x="777766" y="557048"/>
-            <a:ext cx="3626069" cy="0"/>
-          </a:xfrm>
-          <a:prstGeom prst="straightConnector1">
-            <a:avLst/>
-          </a:prstGeom>
-          <a:ln w="38100">
-            <a:solidFill>
-              <a:schemeClr val="tx1"/>
-            </a:solidFill>
-            <a:tailEnd type="stealth" w="lg" len="lg"/>
-          </a:ln>
-        </p:spPr>
-        <p:style>
-          <a:lnRef idx="1">
-            <a:schemeClr val="accent1"/>
-          </a:lnRef>
-          <a:fillRef idx="0">
-            <a:schemeClr val="accent1"/>
-          </a:fillRef>
-          <a:effectRef idx="0">
-            <a:schemeClr val="accent1"/>
-          </a:effectRef>
-          <a:fontRef idx="minor">
-            <a:schemeClr val="tx1"/>
-          </a:fontRef>
-        </p:style>
-      </p:cxnSp>
-      <p:sp>
-        <p:nvSpPr>
-          <p:cNvPr id="6" name="TextBox 5">
-            <a:extLst>
-              <a:ext uri="{FF2B5EF4-FFF2-40B4-BE49-F238E27FC236}">
-                <a16:creationId xmlns:a16="http://schemas.microsoft.com/office/drawing/2014/main" id="{B2D5FAE9-E67B-314F-81FE-6492B50D9440}"/>
-              </a:ext>
-            </a:extLst>
-          </p:cNvPr>
-          <p:cNvSpPr txBox="1"/>
-          <p:nvPr/>
-        </p:nvSpPr>
-        <p:spPr>
-          <a:xfrm>
-            <a:off x="1804847" y="63060"/>
-            <a:ext cx="1571905" cy="369332"/>
-          </a:xfrm>
-          <a:prstGeom prst="rect">
-            <a:avLst/>
-          </a:prstGeom>
-          <a:noFill/>
-          <a:ln>
-            <a:noFill/>
-          </a:ln>
-        </p:spPr>
-        <p:txBody>
-          <a:bodyPr wrap="none" rtlCol="0">
-            <a:spAutoFit/>
-          </a:bodyPr>
+          <a:bodyPr rtlCol="0" anchor="t"/>
           <a:lstStyle/>
           <a:p>
             <a:pPr algn="ctr"/>
             <a:r>
               <a:rPr lang="en-CN" b="1" dirty="0">
                 <a:solidFill>
-                  <a:schemeClr val="accent5">
-                    <a:lumMod val="50000"/>
-                  </a:schemeClr>
+                  <a:schemeClr val="accent1"/>
                 </a:solidFill>
                 <a:latin typeface="Times New Roman" panose="02020603050405020304" pitchFamily="18" charset="0"/>
                 <a:cs typeface="Times New Roman" panose="02020603050405020304" pitchFamily="18" charset="0"/>
@@ -30678,10 +33210,10 @@
       </p:sp>
       <p:sp>
         <p:nvSpPr>
-          <p:cNvPr id="13" name="Rectangle 12">
+          <p:cNvPr id="28" name="Rectangle 27">
             <a:extLst>
               <a:ext uri="{FF2B5EF4-FFF2-40B4-BE49-F238E27FC236}">
-                <a16:creationId xmlns:a16="http://schemas.microsoft.com/office/drawing/2014/main" id="{15B7A01D-5F53-4943-BDFB-E0832D57B502}"/>
+                <a16:creationId xmlns:a16="http://schemas.microsoft.com/office/drawing/2014/main" id="{59B3AAB3-5E77-6441-B0A0-B91F1EAB752A}"/>
               </a:ext>
             </a:extLst>
           </p:cNvPr>
@@ -30690,18 +33222,18 @@
         </p:nvSpPr>
         <p:spPr>
           <a:xfrm>
-            <a:off x="4960883" y="0"/>
-            <a:ext cx="3079531" cy="5633544"/>
+            <a:off x="4970616" y="1"/>
+            <a:ext cx="3079531" cy="5583378"/>
           </a:xfrm>
           <a:prstGeom prst="rect">
             <a:avLst/>
           </a:prstGeom>
           <a:solidFill>
-            <a:schemeClr val="accent6">
+            <a:schemeClr val="accent4">
               <a:alpha val="20000"/>
             </a:schemeClr>
           </a:solidFill>
-          <a:ln w="19050">
+          <a:ln w="12700">
             <a:solidFill>
               <a:schemeClr val="tx1"/>
             </a:solidFill>
@@ -30725,46 +33257,48 @@
           </a:fontRef>
         </p:style>
         <p:txBody>
-          <a:bodyPr rtlCol="0" anchor="ctr"/>
+          <a:bodyPr rtlCol="0" anchor="t"/>
           <a:lstStyle/>
           <a:p>
             <a:pPr algn="ctr"/>
-            <a:endParaRPr lang="en-CN" b="1" dirty="0">
-              <a:solidFill>
-                <a:schemeClr val="accent5">
-                  <a:lumMod val="50000"/>
-                </a:schemeClr>
-              </a:solidFill>
-            </a:endParaRPr>
+            <a:r>
+              <a:rPr lang="en-CN" b="1" dirty="0">
+                <a:solidFill>
+                  <a:schemeClr val="accent4"/>
+                </a:solidFill>
+                <a:latin typeface="Times New Roman" panose="02020603050405020304" pitchFamily="18" charset="0"/>
+                <a:cs typeface="Times New Roman" panose="02020603050405020304" pitchFamily="18" charset="0"/>
+              </a:rPr>
+              <a:t>Broad Depreciation</a:t>
+            </a:r>
           </a:p>
         </p:txBody>
       </p:sp>
       <p:cxnSp>
         <p:nvCxnSpPr>
-          <p:cNvPr id="17" name="Straight Arrow Connector 16">
+          <p:cNvPr id="26" name="Straight Arrow Connector 25">
             <a:extLst>
               <a:ext uri="{FF2B5EF4-FFF2-40B4-BE49-F238E27FC236}">
-                <a16:creationId xmlns:a16="http://schemas.microsoft.com/office/drawing/2014/main" id="{5540D4E2-72FD-264D-8A3B-ABAA92D85181}"/>
+                <a16:creationId xmlns:a16="http://schemas.microsoft.com/office/drawing/2014/main" id="{14FE3E41-4EC4-434D-A34D-982BECA2B73E}"/>
               </a:ext>
             </a:extLst>
           </p:cNvPr>
-          <p:cNvCxnSpPr>
-            <a:cxnSpLocks/>
-          </p:cNvCxnSpPr>
+          <p:cNvCxnSpPr/>
           <p:nvPr/>
         </p:nvCxnSpPr>
         <p:spPr>
           <a:xfrm>
-            <a:off x="5213131" y="1224456"/>
-            <a:ext cx="2827283" cy="1849820"/>
+            <a:off x="787499" y="557048"/>
+            <a:ext cx="3626069" cy="0"/>
           </a:xfrm>
           <a:prstGeom prst="straightConnector1">
             <a:avLst/>
           </a:prstGeom>
           <a:ln w="38100">
             <a:solidFill>
-              <a:schemeClr val="tx1"/>
+              <a:srgbClr val="C00000"/>
             </a:solidFill>
+            <a:prstDash val="sysDot"/>
             <a:tailEnd type="stealth" w="lg" len="lg"/>
           </a:ln>
         </p:spPr>
@@ -30785,57 +33319,10 @@
       </p:cxnSp>
       <p:sp>
         <p:nvSpPr>
-          <p:cNvPr id="19" name="TextBox 18">
+          <p:cNvPr id="31" name="Rectangle 30">
             <a:extLst>
               <a:ext uri="{FF2B5EF4-FFF2-40B4-BE49-F238E27FC236}">
-                <a16:creationId xmlns:a16="http://schemas.microsoft.com/office/drawing/2014/main" id="{C1317615-E0FA-7C49-BAEE-89652DAE844D}"/>
-              </a:ext>
-            </a:extLst>
-          </p:cNvPr>
-          <p:cNvSpPr txBox="1"/>
-          <p:nvPr/>
-        </p:nvSpPr>
-        <p:spPr>
-          <a:xfrm>
-            <a:off x="5567188" y="63060"/>
-            <a:ext cx="2119170" cy="369332"/>
-          </a:xfrm>
-          <a:prstGeom prst="rect">
-            <a:avLst/>
-          </a:prstGeom>
-          <a:noFill/>
-          <a:ln>
-            <a:noFill/>
-          </a:ln>
-        </p:spPr>
-        <p:txBody>
-          <a:bodyPr wrap="none" rtlCol="0">
-            <a:spAutoFit/>
-          </a:bodyPr>
-          <a:lstStyle/>
-          <a:p>
-            <a:pPr algn="ctr"/>
-            <a:r>
-              <a:rPr lang="en-CN" b="1" dirty="0">
-                <a:solidFill>
-                  <a:schemeClr val="accent6">
-                    <a:lumMod val="50000"/>
-                  </a:schemeClr>
-                </a:solidFill>
-                <a:latin typeface="Times New Roman" panose="02020603050405020304" pitchFamily="18" charset="0"/>
-                <a:cs typeface="Times New Roman" panose="02020603050405020304" pitchFamily="18" charset="0"/>
-              </a:rPr>
-              <a:t>Broad Depreciation</a:t>
-            </a:r>
-          </a:p>
-        </p:txBody>
-      </p:sp>
-      <p:sp>
-        <p:nvSpPr>
-          <p:cNvPr id="20" name="Rectangle 19">
-            <a:extLst>
-              <a:ext uri="{FF2B5EF4-FFF2-40B4-BE49-F238E27FC236}">
-                <a16:creationId xmlns:a16="http://schemas.microsoft.com/office/drawing/2014/main" id="{5E65E160-F92C-024A-9B2D-F1FD63A1C009}"/>
+                <a16:creationId xmlns:a16="http://schemas.microsoft.com/office/drawing/2014/main" id="{61361098-99D3-FA43-A6AA-C7C4D22BF2DA}"/>
               </a:ext>
             </a:extLst>
           </p:cNvPr>
@@ -30844,18 +33331,18 @@
         </p:nvSpPr>
         <p:spPr>
           <a:xfrm>
-            <a:off x="8040414" y="0"/>
-            <a:ext cx="3762703" cy="5633544"/>
+            <a:off x="8050147" y="0"/>
+            <a:ext cx="3762703" cy="5583378"/>
           </a:xfrm>
           <a:prstGeom prst="rect">
             <a:avLst/>
           </a:prstGeom>
           <a:solidFill>
-            <a:schemeClr val="accent4">
+            <a:schemeClr val="bg2">
               <a:alpha val="20000"/>
             </a:schemeClr>
           </a:solidFill>
-          <a:ln w="19050">
+          <a:ln w="12700">
             <a:solidFill>
               <a:schemeClr val="tx1"/>
             </a:solidFill>
@@ -30879,44 +33366,50 @@
           </a:fontRef>
         </p:style>
         <p:txBody>
-          <a:bodyPr rtlCol="0" anchor="ctr"/>
+          <a:bodyPr rtlCol="0" anchor="t"/>
           <a:lstStyle/>
           <a:p>
             <a:pPr algn="ctr"/>
-            <a:endParaRPr lang="en-CN" b="1" dirty="0">
-              <a:solidFill>
-                <a:schemeClr val="accent5">
-                  <a:lumMod val="50000"/>
-                </a:schemeClr>
-              </a:solidFill>
-            </a:endParaRPr>
+            <a:r>
+              <a:rPr lang="en-CN" b="1" dirty="0">
+                <a:solidFill>
+                  <a:schemeClr val="tx1"/>
+                </a:solidFill>
+                <a:latin typeface="Times New Roman" panose="02020603050405020304" pitchFamily="18" charset="0"/>
+                <a:cs typeface="Times New Roman" panose="02020603050405020304" pitchFamily="18" charset="0"/>
+              </a:rPr>
+              <a:t>Broad Basket Peg</a:t>
+            </a:r>
           </a:p>
         </p:txBody>
       </p:sp>
       <p:cxnSp>
         <p:nvCxnSpPr>
-          <p:cNvPr id="21" name="Straight Arrow Connector 20">
+          <p:cNvPr id="29" name="Straight Arrow Connector 28">
             <a:extLst>
               <a:ext uri="{FF2B5EF4-FFF2-40B4-BE49-F238E27FC236}">
-                <a16:creationId xmlns:a16="http://schemas.microsoft.com/office/drawing/2014/main" id="{535AAB28-8562-4A4A-913E-B885DB19B4E4}"/>
+                <a16:creationId xmlns:a16="http://schemas.microsoft.com/office/drawing/2014/main" id="{0A8945C3-26CD-2E48-8672-1E32B735BDB2}"/>
               </a:ext>
             </a:extLst>
           </p:cNvPr>
-          <p:cNvCxnSpPr/>
+          <p:cNvCxnSpPr>
+            <a:cxnSpLocks/>
+          </p:cNvCxnSpPr>
           <p:nvPr/>
         </p:nvCxnSpPr>
         <p:spPr>
           <a:xfrm>
-            <a:off x="8145518" y="2653862"/>
-            <a:ext cx="3626069" cy="0"/>
+            <a:off x="5222864" y="1224456"/>
+            <a:ext cx="2827283" cy="1849820"/>
           </a:xfrm>
           <a:prstGeom prst="straightConnector1">
             <a:avLst/>
           </a:prstGeom>
           <a:ln w="38100">
             <a:solidFill>
-              <a:schemeClr val="tx1"/>
+              <a:srgbClr val="C00000"/>
             </a:solidFill>
+            <a:prstDash val="sysDot"/>
             <a:tailEnd type="stealth" w="lg" len="lg"/>
           </a:ln>
         </p:spPr>
@@ -30935,53 +33428,79 @@
           </a:fontRef>
         </p:style>
       </p:cxnSp>
-      <p:sp>
-        <p:nvSpPr>
-          <p:cNvPr id="22" name="TextBox 21">
+      <p:cxnSp>
+        <p:nvCxnSpPr>
+          <p:cNvPr id="32" name="Straight Arrow Connector 31">
             <a:extLst>
               <a:ext uri="{FF2B5EF4-FFF2-40B4-BE49-F238E27FC236}">
-                <a16:creationId xmlns:a16="http://schemas.microsoft.com/office/drawing/2014/main" id="{DED820ED-CDEB-AC4A-8343-8A48752CD03D}"/>
+                <a16:creationId xmlns:a16="http://schemas.microsoft.com/office/drawing/2014/main" id="{54F433A3-3E3B-3C4E-A849-A2A2B666CF1A}"/>
               </a:ext>
             </a:extLst>
           </p:cNvPr>
-          <p:cNvSpPr txBox="1"/>
+          <p:cNvCxnSpPr/>
           <p:nvPr/>
-        </p:nvSpPr>
+        </p:nvCxnSpPr>
         <p:spPr>
           <a:xfrm>
-            <a:off x="8989856" y="63060"/>
-            <a:ext cx="1937390" cy="369332"/>
+            <a:off x="8155251" y="2653862"/>
+            <a:ext cx="3626069" cy="0"/>
           </a:xfrm>
-          <a:prstGeom prst="rect">
+          <a:prstGeom prst="straightConnector1">
             <a:avLst/>
           </a:prstGeom>
-          <a:noFill/>
-          <a:ln>
-            <a:noFill/>
+          <a:ln w="38100">
+            <a:solidFill>
+              <a:srgbClr val="C00000"/>
+            </a:solidFill>
+            <a:prstDash val="sysDot"/>
+            <a:tailEnd type="stealth" w="lg" len="lg"/>
           </a:ln>
         </p:spPr>
-        <p:txBody>
-          <a:bodyPr wrap="none" rtlCol="0">
-            <a:spAutoFit/>
-          </a:bodyPr>
-          <a:lstStyle/>
-          <a:p>
-            <a:pPr algn="ctr"/>
-            <a:r>
-              <a:rPr lang="en-CN" b="1" dirty="0">
-                <a:solidFill>
-                  <a:schemeClr val="accent4">
-                    <a:lumMod val="50000"/>
-                  </a:schemeClr>
-                </a:solidFill>
-                <a:latin typeface="Times New Roman" panose="02020603050405020304" pitchFamily="18" charset="0"/>
-                <a:cs typeface="Times New Roman" panose="02020603050405020304" pitchFamily="18" charset="0"/>
-              </a:rPr>
-              <a:t>Broad Basket Peg</a:t>
-            </a:r>
-          </a:p>
-        </p:txBody>
-      </p:sp>
+        <p:style>
+          <a:lnRef idx="1">
+            <a:schemeClr val="accent1"/>
+          </a:lnRef>
+          <a:fillRef idx="0">
+            <a:schemeClr val="accent1"/>
+          </a:fillRef>
+          <a:effectRef idx="0">
+            <a:schemeClr val="accent1"/>
+          </a:effectRef>
+          <a:fontRef idx="minor">
+            <a:schemeClr val="tx1"/>
+          </a:fontRef>
+        </p:style>
+      </p:cxnSp>
+      <p:graphicFrame>
+        <p:nvGraphicFramePr>
+          <p:cNvPr id="34" name="Chart 33">
+            <a:extLst>
+              <a:ext uri="{FF2B5EF4-FFF2-40B4-BE49-F238E27FC236}">
+                <a16:creationId xmlns:a16="http://schemas.microsoft.com/office/drawing/2014/main" id="{F6DEDFB1-02DA-2B4C-A9EF-402E58FF62D3}"/>
+              </a:ext>
+            </a:extLst>
+          </p:cNvPr>
+          <p:cNvGraphicFramePr>
+            <a:graphicFrameLocks/>
+          </p:cNvGraphicFramePr>
+          <p:nvPr>
+            <p:extLst>
+              <p:ext uri="{D42A27DB-BD31-4B8C-83A1-F6EECF244321}">
+                <p14:modId xmlns:p14="http://schemas.microsoft.com/office/powerpoint/2010/main" val="158430142"/>
+              </p:ext>
+            </p:extLst>
+          </p:nvPr>
+        </p:nvGraphicFramePr>
+        <p:xfrm>
+          <a:off x="0" y="0"/>
+          <a:ext cx="12192000" cy="6858000"/>
+        </p:xfrm>
+        <a:graphic>
+          <a:graphicData uri="http://schemas.openxmlformats.org/drawingml/2006/chart">
+            <c:chart xmlns:c="http://schemas.openxmlformats.org/drawingml/2006/chart" xmlns:r="http://schemas.openxmlformats.org/officeDocument/2006/relationships" r:id="rId3"/>
+          </a:graphicData>
+        </a:graphic>
+      </p:graphicFrame>
     </p:spTree>
     <p:extLst>
       <p:ext uri="{BB962C8B-B14F-4D97-AF65-F5344CB8AC3E}">
@@ -31047,7 +33566,7 @@
             <p:nvPr>
               <p:extLst>
                 <p:ext uri="{D42A27DB-BD31-4B8C-83A1-F6EECF244321}">
-                  <p14:modId xmlns:p14="http://schemas.microsoft.com/office/powerpoint/2010/main" val="1593276588"/>
+                  <p14:modId xmlns:p14="http://schemas.microsoft.com/office/powerpoint/2010/main" val="3319379415"/>
                 </p:ext>
               </p:extLst>
             </p:nvPr>
@@ -31077,7 +33596,7 @@
             <p:nvPr>
               <p:extLst>
                 <p:ext uri="{D42A27DB-BD31-4B8C-83A1-F6EECF244321}">
-                  <p14:modId xmlns:p14="http://schemas.microsoft.com/office/powerpoint/2010/main" val="4254901232"/>
+                  <p14:modId xmlns:p14="http://schemas.microsoft.com/office/powerpoint/2010/main" val="112086736"/>
                 </p:ext>
               </p:extLst>
             </p:nvPr>
@@ -31122,7 +33641,7 @@
             <a:p>
               <a:pPr algn="ctr"/>
               <a:r>
-                <a:rPr lang="en-CN" dirty="0">
+                <a:rPr lang="en-CN" b="1" dirty="0">
                   <a:latin typeface="Times New Roman" panose="02020603050405020304" pitchFamily="18" charset="0"/>
                   <a:cs typeface="Times New Roman" panose="02020603050405020304" pitchFamily="18" charset="0"/>
                 </a:rPr>
@@ -31161,7 +33680,7 @@
             <a:p>
               <a:pPr algn="ctr"/>
               <a:r>
-                <a:rPr lang="en-CN" dirty="0">
+                <a:rPr lang="en-CN" b="1" dirty="0">
                   <a:latin typeface="Times New Roman" panose="02020603050405020304" pitchFamily="18" charset="0"/>
                   <a:cs typeface="Times New Roman" panose="02020603050405020304" pitchFamily="18" charset="0"/>
                 </a:rPr>
@@ -31221,8 +33740,8 @@
             <a:chExt cx="8819649" cy="4121525"/>
           </a:xfrm>
         </p:grpSpPr>
-        <mc:AlternateContent xmlns:mc="http://schemas.openxmlformats.org/markup-compatibility/2006">
-          <mc:Choice xmlns:cx1="http://schemas.microsoft.com/office/drawing/2015/9/8/chartex" Requires="cx1">
+        <mc:AlternateContent xmlns:mc="http://schemas.openxmlformats.org/markup-compatibility/2006" xmlns:cx1="http://schemas.microsoft.com/office/drawing/2015/9/8/chartex">
+          <mc:Choice Requires="cx1">
             <p:graphicFrame>
               <p:nvGraphicFramePr>
                 <p:cNvPr id="4" name="Chart 3">
@@ -31236,7 +33755,7 @@
                 <p:nvPr>
                   <p:extLst>
                     <p:ext uri="{D42A27DB-BD31-4B8C-83A1-F6EECF244321}">
-                      <p14:modId xmlns:p14="http://schemas.microsoft.com/office/powerpoint/2010/main" val="4065493403"/>
+                      <p14:modId xmlns:p14="http://schemas.microsoft.com/office/powerpoint/2010/main" val="1749909368"/>
                     </p:ext>
                   </p:extLst>
                 </p:nvPr>
@@ -31252,7 +33771,7 @@
               </a:graphic>
             </p:graphicFrame>
           </mc:Choice>
-          <mc:Fallback>
+          <mc:Fallback xmlns="">
             <p:pic>
               <p:nvPicPr>
                 <p:cNvPr id="4" name="Chart 3">
@@ -31412,6 +33931,126 @@
     <p:extLst>
       <p:ext uri="{BB962C8B-B14F-4D97-AF65-F5344CB8AC3E}">
         <p14:creationId xmlns:p14="http://schemas.microsoft.com/office/powerpoint/2010/main" val="1035499011"/>
+      </p:ext>
+    </p:extLst>
+  </p:cSld>
+  <p:clrMapOvr>
+    <a:masterClrMapping/>
+  </p:clrMapOvr>
+</p:sld>
+</file>
+
+<file path=ppt/slides/slide7.xml><?xml version="1.0" encoding="utf-8"?>
+<p:sld xmlns:a="http://schemas.openxmlformats.org/drawingml/2006/main" xmlns:r="http://schemas.openxmlformats.org/officeDocument/2006/relationships" xmlns:p="http://schemas.openxmlformats.org/presentationml/2006/main">
+  <p:cSld>
+    <p:spTree>
+      <p:nvGrpSpPr>
+        <p:cNvPr id="1" name=""/>
+        <p:cNvGrpSpPr/>
+        <p:nvPr/>
+      </p:nvGrpSpPr>
+      <p:grpSpPr>
+        <a:xfrm>
+          <a:off x="0" y="0"/>
+          <a:ext cx="0" cy="0"/>
+          <a:chOff x="0" y="0"/>
+          <a:chExt cx="0" cy="0"/>
+        </a:xfrm>
+      </p:grpSpPr>
+      <p:graphicFrame>
+        <p:nvGraphicFramePr>
+          <p:cNvPr id="4" name="Chart 3">
+            <a:extLst>
+              <a:ext uri="{FF2B5EF4-FFF2-40B4-BE49-F238E27FC236}">
+                <a16:creationId xmlns:a16="http://schemas.microsoft.com/office/drawing/2014/main" id="{6945842E-F726-CA4B-BD45-BF30736BE9EF}"/>
+              </a:ext>
+            </a:extLst>
+          </p:cNvPr>
+          <p:cNvGraphicFramePr>
+            <a:graphicFrameLocks/>
+          </p:cNvGraphicFramePr>
+          <p:nvPr>
+            <p:extLst>
+              <p:ext uri="{D42A27DB-BD31-4B8C-83A1-F6EECF244321}">
+                <p14:modId xmlns:p14="http://schemas.microsoft.com/office/powerpoint/2010/main" val="1642522172"/>
+              </p:ext>
+            </p:extLst>
+          </p:nvPr>
+        </p:nvGraphicFramePr>
+        <p:xfrm>
+          <a:off x="1192192" y="1192192"/>
+          <a:ext cx="9965803" cy="3981692"/>
+        </p:xfrm>
+        <a:graphic>
+          <a:graphicData uri="http://schemas.openxmlformats.org/drawingml/2006/chart">
+            <c:chart xmlns:c="http://schemas.openxmlformats.org/drawingml/2006/chart" xmlns:r="http://schemas.openxmlformats.org/officeDocument/2006/relationships" r:id="rId2"/>
+          </a:graphicData>
+        </a:graphic>
+      </p:graphicFrame>
+    </p:spTree>
+    <p:extLst>
+      <p:ext uri="{BB962C8B-B14F-4D97-AF65-F5344CB8AC3E}">
+        <p14:creationId xmlns:p14="http://schemas.microsoft.com/office/powerpoint/2010/main" val="2992601227"/>
+      </p:ext>
+    </p:extLst>
+  </p:cSld>
+  <p:clrMapOvr>
+    <a:masterClrMapping/>
+  </p:clrMapOvr>
+</p:sld>
+</file>
+
+<file path=ppt/slides/slide8.xml><?xml version="1.0" encoding="utf-8"?>
+<p:sld xmlns:a="http://schemas.openxmlformats.org/drawingml/2006/main" xmlns:r="http://schemas.openxmlformats.org/officeDocument/2006/relationships" xmlns:p="http://schemas.openxmlformats.org/presentationml/2006/main">
+  <p:cSld>
+    <p:spTree>
+      <p:nvGrpSpPr>
+        <p:cNvPr id="1" name=""/>
+        <p:cNvGrpSpPr/>
+        <p:nvPr/>
+      </p:nvGrpSpPr>
+      <p:grpSpPr>
+        <a:xfrm>
+          <a:off x="0" y="0"/>
+          <a:ext cx="0" cy="0"/>
+          <a:chOff x="0" y="0"/>
+          <a:chExt cx="0" cy="0"/>
+        </a:xfrm>
+      </p:grpSpPr>
+      <p:graphicFrame>
+        <p:nvGraphicFramePr>
+          <p:cNvPr id="7" name="Chart 6">
+            <a:extLst>
+              <a:ext uri="{FF2B5EF4-FFF2-40B4-BE49-F238E27FC236}">
+                <a16:creationId xmlns:a16="http://schemas.microsoft.com/office/drawing/2014/main" id="{0177F10A-B6C7-9935-B3DC-683E14D8A644}"/>
+              </a:ext>
+            </a:extLst>
+          </p:cNvPr>
+          <p:cNvGraphicFramePr>
+            <a:graphicFrameLocks/>
+          </p:cNvGraphicFramePr>
+          <p:nvPr>
+            <p:extLst>
+              <p:ext uri="{D42A27DB-BD31-4B8C-83A1-F6EECF244321}">
+                <p14:modId xmlns:p14="http://schemas.microsoft.com/office/powerpoint/2010/main" val="3844663631"/>
+              </p:ext>
+            </p:extLst>
+          </p:nvPr>
+        </p:nvGraphicFramePr>
+        <p:xfrm>
+          <a:off x="88490" y="692690"/>
+          <a:ext cx="12015019" cy="5472619"/>
+        </p:xfrm>
+        <a:graphic>
+          <a:graphicData uri="http://schemas.openxmlformats.org/drawingml/2006/chart">
+            <c:chart xmlns:c="http://schemas.openxmlformats.org/drawingml/2006/chart" xmlns:r="http://schemas.openxmlformats.org/officeDocument/2006/relationships" r:id="rId2"/>
+          </a:graphicData>
+        </a:graphic>
+      </p:graphicFrame>
+    </p:spTree>
+    <p:extLst>
+      <p:ext uri="{BB962C8B-B14F-4D97-AF65-F5344CB8AC3E}">
+        <p14:creationId xmlns:p14="http://schemas.microsoft.com/office/powerpoint/2010/main" val="2251514102"/>
       </p:ext>
     </p:extLst>
   </p:cSld>

--- a/Project/images.pptx
+++ b/Project/images.pptx
@@ -27935,7 +27935,7 @@
           <a:p>
             <a:fld id="{EA8D938A-EB1D-DF44-973E-DA2B9D44EF7D}" type="datetimeFigureOut">
               <a:rPr lang="en-CN" smtClean="0"/>
-              <a:t>2025/1/10</a:t>
+              <a:t>2025/1/11</a:t>
             </a:fld>
             <a:endParaRPr lang="en-CN"/>
           </a:p>
@@ -28436,7 +28436,7 @@
           <a:p>
             <a:fld id="{C0F2A1D6-A8BB-8049-9211-26FB059DAFA7}" type="datetimeFigureOut">
               <a:rPr lang="en-CN" smtClean="0"/>
-              <a:t>2025/1/10</a:t>
+              <a:t>2025/1/11</a:t>
             </a:fld>
             <a:endParaRPr lang="en-CN"/>
           </a:p>
@@ -28636,7 +28636,7 @@
           <a:p>
             <a:fld id="{C0F2A1D6-A8BB-8049-9211-26FB059DAFA7}" type="datetimeFigureOut">
               <a:rPr lang="en-CN" smtClean="0"/>
-              <a:t>2025/1/10</a:t>
+              <a:t>2025/1/11</a:t>
             </a:fld>
             <a:endParaRPr lang="en-CN"/>
           </a:p>
@@ -28846,7 +28846,7 @@
           <a:p>
             <a:fld id="{C0F2A1D6-A8BB-8049-9211-26FB059DAFA7}" type="datetimeFigureOut">
               <a:rPr lang="en-CN" smtClean="0"/>
-              <a:t>2025/1/10</a:t>
+              <a:t>2025/1/11</a:t>
             </a:fld>
             <a:endParaRPr lang="en-CN"/>
           </a:p>
@@ -29046,7 +29046,7 @@
           <a:p>
             <a:fld id="{C0F2A1D6-A8BB-8049-9211-26FB059DAFA7}" type="datetimeFigureOut">
               <a:rPr lang="en-CN" smtClean="0"/>
-              <a:t>2025/1/10</a:t>
+              <a:t>2025/1/11</a:t>
             </a:fld>
             <a:endParaRPr lang="en-CN"/>
           </a:p>
@@ -29322,7 +29322,7 @@
           <a:p>
             <a:fld id="{C0F2A1D6-A8BB-8049-9211-26FB059DAFA7}" type="datetimeFigureOut">
               <a:rPr lang="en-CN" smtClean="0"/>
-              <a:t>2025/1/10</a:t>
+              <a:t>2025/1/11</a:t>
             </a:fld>
             <a:endParaRPr lang="en-CN"/>
           </a:p>
@@ -29590,7 +29590,7 @@
           <a:p>
             <a:fld id="{C0F2A1D6-A8BB-8049-9211-26FB059DAFA7}" type="datetimeFigureOut">
               <a:rPr lang="en-CN" smtClean="0"/>
-              <a:t>2025/1/10</a:t>
+              <a:t>2025/1/11</a:t>
             </a:fld>
             <a:endParaRPr lang="en-CN"/>
           </a:p>
@@ -30005,7 +30005,7 @@
           <a:p>
             <a:fld id="{C0F2A1D6-A8BB-8049-9211-26FB059DAFA7}" type="datetimeFigureOut">
               <a:rPr lang="en-CN" smtClean="0"/>
-              <a:t>2025/1/10</a:t>
+              <a:t>2025/1/11</a:t>
             </a:fld>
             <a:endParaRPr lang="en-CN"/>
           </a:p>
@@ -30147,7 +30147,7 @@
           <a:p>
             <a:fld id="{C0F2A1D6-A8BB-8049-9211-26FB059DAFA7}" type="datetimeFigureOut">
               <a:rPr lang="en-CN" smtClean="0"/>
-              <a:t>2025/1/10</a:t>
+              <a:t>2025/1/11</a:t>
             </a:fld>
             <a:endParaRPr lang="en-CN"/>
           </a:p>
@@ -30260,7 +30260,7 @@
           <a:p>
             <a:fld id="{C0F2A1D6-A8BB-8049-9211-26FB059DAFA7}" type="datetimeFigureOut">
               <a:rPr lang="en-CN" smtClean="0"/>
-              <a:t>2025/1/10</a:t>
+              <a:t>2025/1/11</a:t>
             </a:fld>
             <a:endParaRPr lang="en-CN"/>
           </a:p>
@@ -30573,7 +30573,7 @@
           <a:p>
             <a:fld id="{C0F2A1D6-A8BB-8049-9211-26FB059DAFA7}" type="datetimeFigureOut">
               <a:rPr lang="en-CN" smtClean="0"/>
-              <a:t>2025/1/10</a:t>
+              <a:t>2025/1/11</a:t>
             </a:fld>
             <a:endParaRPr lang="en-CN"/>
           </a:p>
@@ -30862,7 +30862,7 @@
           <a:p>
             <a:fld id="{C0F2A1D6-A8BB-8049-9211-26FB059DAFA7}" type="datetimeFigureOut">
               <a:rPr lang="en-CN" smtClean="0"/>
-              <a:t>2025/1/10</a:t>
+              <a:t>2025/1/11</a:t>
             </a:fld>
             <a:endParaRPr lang="en-CN"/>
           </a:p>
@@ -31105,7 +31105,7 @@
           <a:p>
             <a:fld id="{C0F2A1D6-A8BB-8049-9211-26FB059DAFA7}" type="datetimeFigureOut">
               <a:rPr lang="en-CN" smtClean="0"/>
-              <a:t>2025/1/10</a:t>
+              <a:t>2025/1/11</a:t>
             </a:fld>
             <a:endParaRPr lang="en-CN"/>
           </a:p>
